--- a/Equipo04_FalconChallenge.pptx
+++ b/Equipo04_FalconChallenge.pptx
@@ -5,7 +5,7 @@
     <p:sldMasterId id="2147483648" r:id="rId1"/>
   </p:sldMasterIdLst>
   <p:notesMasterIdLst>
-    <p:notesMasterId r:id="rId9"/>
+    <p:notesMasterId r:id="rId10"/>
   </p:notesMasterIdLst>
   <p:sldIdLst>
     <p:sldId id="256" r:id="rId2"/>
@@ -14,7 +14,8 @@
     <p:sldId id="259" r:id="rId5"/>
     <p:sldId id="260" r:id="rId6"/>
     <p:sldId id="261" r:id="rId7"/>
-    <p:sldId id="262" r:id="rId8"/>
+    <p:sldId id="263" r:id="rId8"/>
+    <p:sldId id="262" r:id="rId9"/>
   </p:sldIdLst>
   <p:sldSz cx="9144000" cy="5143500" type="screen16x9"/>
   <p:notesSz cx="5143500" cy="9144000"/>
@@ -1100,7 +1101,7 @@
           <a:p>
             <a:fld id="{F7021451-1387-4CA6-816F-3879F97B5CBC}" type="slidenum">
               <a:rPr lang="en-US"/>
-              <a:t>7</a:t>
+              <a:t>8</a:t>
             </a:fld>
             <a:endParaRPr lang="en-US"/>
           </a:p>
@@ -1563,7 +1564,7 @@
         <p:spPr>
           <a:xfrm>
             <a:off x="320040" y="347472"/>
-            <a:ext cx="1417320" cy="384048"/>
+            <a:ext cx="1417320" cy="521208"/>
           </a:xfrm>
           <a:prstGeom prst="roundRect">
             <a:avLst>
@@ -1596,7 +1597,7 @@
         </p:nvSpPr>
         <p:spPr>
           <a:xfrm>
-            <a:off x="320040" y="347472"/>
+            <a:off x="320040" y="391434"/>
             <a:ext cx="1417320" cy="384048"/>
           </a:xfrm>
           <a:prstGeom prst="rect">
@@ -1621,7 +1622,18 @@
                 <a:ea typeface="Calibri" pitchFamily="34" charset="-122"/>
                 <a:cs typeface="Calibri" pitchFamily="34" charset="-120"/>
               </a:rPr>
-              <a:t>Team 04</a:t>
+              <a:t>Team 04: </a:t>
+            </a:r>
+            <a:r>
+              <a:rPr lang="en-US" sz="1600" b="1" dirty="0" err="1">
+                <a:solidFill>
+                  <a:srgbClr val="0A1628"/>
+                </a:solidFill>
+                <a:latin typeface="Calibri" pitchFamily="34" charset="0"/>
+                <a:ea typeface="Calibri" pitchFamily="34" charset="-122"/>
+                <a:cs typeface="Calibri" pitchFamily="34" charset="-120"/>
+              </a:rPr>
+              <a:t>QFalcon</a:t>
             </a:r>
             <a:endParaRPr lang="en-US" sz="1600" dirty="0"/>
           </a:p>
@@ -2454,7 +2466,18 @@
                 <a:ea typeface="Georgia" pitchFamily="34" charset="-122"/>
                 <a:cs typeface="Georgia" pitchFamily="34" charset="-120"/>
               </a:rPr>
-              <a:t>The Challenge</a:t>
+              <a:t>The </a:t>
+            </a:r>
+            <a:r>
+              <a:rPr lang="en-US" b="1" dirty="0">
+                <a:solidFill>
+                  <a:srgbClr val="1B3A6B"/>
+                </a:solidFill>
+                <a:latin typeface="Georgia" pitchFamily="34" charset="0"/>
+                <a:ea typeface="Georgia" pitchFamily="34" charset="-122"/>
+                <a:cs typeface="Georgia" pitchFamily="34" charset="-120"/>
+              </a:rPr>
+              <a:t>Challenge</a:t>
             </a:r>
             <a:endParaRPr lang="en-US" sz="1600" dirty="0"/>
           </a:p>
@@ -2485,7 +2508,7 @@
               <a:buNone/>
             </a:pPr>
             <a:r>
-              <a:rPr lang="en-US" sz="1250" dirty="0">
+              <a:rPr lang="en-US" sz="1400" dirty="0">
                 <a:solidFill>
                   <a:srgbClr val="1A2332"/>
                 </a:solidFill>
@@ -2495,20 +2518,20 @@
               </a:rPr>
               <a:t>The International Falcon Reservoir (Mexico–USA, Río Grande/Bravo) operated at critically low storage throughout 2025–2026 — below 12 % of design capacity.</a:t>
             </a:r>
-            <a:endParaRPr lang="en-US" sz="1250" dirty="0"/>
+            <a:endParaRPr lang="en-US" sz="1400" dirty="0"/>
           </a:p>
           <a:p>
             <a:pPr marL="0" indent="0">
               <a:buNone/>
             </a:pPr>
-            <a:endParaRPr lang="en-US" sz="1250" dirty="0"/>
+            <a:endParaRPr lang="en-US" sz="1400" dirty="0"/>
           </a:p>
           <a:p>
             <a:pPr marL="0" indent="0">
               <a:buNone/>
             </a:pPr>
             <a:r>
-              <a:rPr lang="en-US" sz="1250" dirty="0">
+              <a:rPr lang="en-US" sz="1400" dirty="0">
                 <a:solidFill>
                   <a:srgbClr val="1A2332"/>
                 </a:solidFill>
@@ -2518,20 +2541,20 @@
               </a:rPr>
               <a:t>Decision variable: the weekly release adjustment u(t), so that the optimized release is</a:t>
             </a:r>
-            <a:endParaRPr lang="en-US" sz="1250" dirty="0"/>
+            <a:endParaRPr lang="en-US" sz="1400" dirty="0"/>
           </a:p>
           <a:p>
             <a:pPr marL="0" indent="0">
               <a:buNone/>
             </a:pPr>
-            <a:endParaRPr lang="en-US" sz="1250" dirty="0"/>
+            <a:endParaRPr lang="en-US" sz="1400" dirty="0"/>
           </a:p>
           <a:p>
             <a:pPr marL="0" indent="0">
               <a:buNone/>
             </a:pPr>
             <a:r>
-              <a:rPr lang="en-US" sz="1250" dirty="0">
+              <a:rPr lang="en-US" sz="1400" dirty="0">
                 <a:solidFill>
                   <a:srgbClr val="1A2332"/>
                 </a:solidFill>
@@ -2539,22 +2562,44 @@
                 <a:ea typeface="Calibri" pitchFamily="34" charset="-122"/>
                 <a:cs typeface="Calibri" pitchFamily="34" charset="-120"/>
               </a:rPr>
-              <a:t>     R(t) = R_obs(t) + u(t)</a:t>
+              <a:t>     R(t) = </a:t>
             </a:r>
-            <a:endParaRPr lang="en-US" sz="1250" dirty="0"/>
+            <a:r>
+              <a:rPr lang="en-US" sz="1400" dirty="0" err="1">
+                <a:solidFill>
+                  <a:srgbClr val="1A2332"/>
+                </a:solidFill>
+                <a:latin typeface="Calibri" pitchFamily="34" charset="0"/>
+                <a:ea typeface="Calibri" pitchFamily="34" charset="-122"/>
+                <a:cs typeface="Calibri" pitchFamily="34" charset="-120"/>
+              </a:rPr>
+              <a:t>R_obs</a:t>
+            </a:r>
+            <a:r>
+              <a:rPr lang="en-US" sz="1400" dirty="0">
+                <a:solidFill>
+                  <a:srgbClr val="1A2332"/>
+                </a:solidFill>
+                <a:latin typeface="Calibri" pitchFamily="34" charset="0"/>
+                <a:ea typeface="Calibri" pitchFamily="34" charset="-122"/>
+                <a:cs typeface="Calibri" pitchFamily="34" charset="-120"/>
+              </a:rPr>
+              <a:t>(t) + u(t)</a:t>
+            </a:r>
+            <a:endParaRPr lang="en-US" sz="1400" dirty="0"/>
           </a:p>
           <a:p>
             <a:pPr marL="0" indent="0">
               <a:buNone/>
             </a:pPr>
-            <a:endParaRPr lang="en-US" sz="1250" dirty="0"/>
+            <a:endParaRPr lang="en-US" sz="1400" dirty="0"/>
           </a:p>
           <a:p>
             <a:pPr marL="0" indent="0">
               <a:buNone/>
             </a:pPr>
             <a:r>
-              <a:rPr lang="en-US" sz="1250" dirty="0">
+              <a:rPr lang="en-US" sz="1400" dirty="0">
                 <a:solidFill>
                   <a:srgbClr val="1A2332"/>
                 </a:solidFill>
@@ -2564,7 +2609,7 @@
               </a:rPr>
               <a:t>where u(t) = 0 reproduces historical operation.</a:t>
             </a:r>
-            <a:endParaRPr lang="en-US" sz="1250" dirty="0"/>
+            <a:endParaRPr lang="en-US" sz="1400" dirty="0"/>
           </a:p>
         </p:txBody>
       </p:sp>
@@ -2734,7 +2779,7 @@
         </p:nvSpPr>
         <p:spPr>
           <a:xfrm>
-            <a:off x="4709160" y="960120"/>
+            <a:off x="4645152" y="918972"/>
             <a:ext cx="4023360" cy="1261872"/>
           </a:xfrm>
           <a:prstGeom prst="roundRect">
@@ -2859,11 +2904,8 @@
           <a:bodyPr wrap="square" rtlCol="0" anchor="ctr"/>
           <a:lstStyle/>
           <a:p>
-            <a:pPr marL="0" indent="0">
-              <a:buNone/>
-            </a:pPr>
             <a:r>
-              <a:rPr lang="en-US" sz="1150" dirty="0">
+              <a:rPr lang="en-US" sz="1400" dirty="0">
                 <a:solidFill>
                   <a:srgbClr val="1A2332"/>
                 </a:solidFill>
@@ -2873,14 +2915,10 @@
               </a:rPr>
               <a:t>Penalizes weeks where</a:t>
             </a:r>
-            <a:endParaRPr lang="en-US" sz="1150" dirty="0"/>
           </a:p>
           <a:p>
-            <a:pPr marL="0" indent="0">
-              <a:buNone/>
-            </a:pPr>
             <a:r>
-              <a:rPr lang="en-US" sz="1150" dirty="0">
+              <a:rPr lang="en-US" sz="1400" dirty="0">
                 <a:solidFill>
                   <a:srgbClr val="1A2332"/>
                 </a:solidFill>
@@ -2890,14 +2928,10 @@
               </a:rPr>
               <a:t>S(t) &lt; Smin = 25 % Smax</a:t>
             </a:r>
-            <a:endParaRPr lang="en-US" sz="1150" dirty="0"/>
           </a:p>
           <a:p>
-            <a:pPr marL="0" indent="0">
-              <a:buNone/>
-            </a:pPr>
             <a:r>
-              <a:rPr lang="en-US" sz="1150" dirty="0">
+              <a:rPr lang="en-US" sz="1400" dirty="0">
                 <a:solidFill>
                   <a:srgbClr val="1A2332"/>
                 </a:solidFill>
@@ -2907,7 +2941,6 @@
               </a:rPr>
               <a:t>→ prevents depletion</a:t>
             </a:r>
-            <a:endParaRPr lang="en-US" sz="1150" dirty="0"/>
           </a:p>
         </p:txBody>
       </p:sp>
@@ -3044,11 +3077,11 @@
           <a:bodyPr wrap="square" rtlCol="0" anchor="ctr"/>
           <a:lstStyle/>
           <a:p>
-            <a:pPr marL="0" indent="0">
+            <a:pPr indent="0">
               <a:buNone/>
             </a:pPr>
             <a:r>
-              <a:rPr lang="en-US" sz="1150" dirty="0">
+              <a:rPr lang="en-US" sz="1400" dirty="0">
                 <a:solidFill>
                   <a:srgbClr val="1A2332"/>
                 </a:solidFill>
@@ -3058,14 +3091,13 @@
               </a:rPr>
               <a:t>Penalizes large deviations</a:t>
             </a:r>
-            <a:endParaRPr lang="en-US" sz="1150" dirty="0"/>
           </a:p>
           <a:p>
-            <a:pPr marL="0" indent="0">
+            <a:pPr indent="0">
               <a:buNone/>
             </a:pPr>
             <a:r>
-              <a:rPr lang="en-US" sz="1150" dirty="0">
+              <a:rPr lang="en-US" sz="1400" dirty="0">
                 <a:solidFill>
                   <a:srgbClr val="1A2332"/>
                 </a:solidFill>
@@ -3075,14 +3107,13 @@
               </a:rPr>
               <a:t>from historical releases</a:t>
             </a:r>
-            <a:endParaRPr lang="en-US" sz="1150" dirty="0"/>
           </a:p>
           <a:p>
-            <a:pPr marL="0" indent="0">
+            <a:pPr indent="0">
               <a:buNone/>
             </a:pPr>
             <a:r>
-              <a:rPr lang="en-US" sz="1150" dirty="0">
+              <a:rPr lang="en-US" sz="1400" dirty="0">
                 <a:solidFill>
                   <a:srgbClr val="1A2332"/>
                 </a:solidFill>
@@ -3092,7 +3123,6 @@
               </a:rPr>
               <a:t>→ operational realism</a:t>
             </a:r>
-            <a:endParaRPr lang="en-US" sz="1150" dirty="0"/>
           </a:p>
         </p:txBody>
       </p:sp>
@@ -3229,11 +3259,8 @@
           <a:bodyPr wrap="square" rtlCol="0" anchor="ctr"/>
           <a:lstStyle/>
           <a:p>
-            <a:pPr marL="0" indent="0">
-              <a:buNone/>
-            </a:pPr>
             <a:r>
-              <a:rPr lang="en-US" sz="1150" dirty="0">
+              <a:rPr lang="en-US" sz="1400" dirty="0">
                 <a:solidFill>
                   <a:srgbClr val="1A2332"/>
                 </a:solidFill>
@@ -3243,14 +3270,10 @@
               </a:rPr>
               <a:t>Penalizes abrupt week-to-week</a:t>
             </a:r>
-            <a:endParaRPr lang="en-US" sz="1150" dirty="0"/>
           </a:p>
           <a:p>
-            <a:pPr marL="0" indent="0">
-              <a:buNone/>
-            </a:pPr>
             <a:r>
-              <a:rPr lang="en-US" sz="1150" dirty="0">
+              <a:rPr lang="en-US" sz="1400" dirty="0">
                 <a:solidFill>
                   <a:srgbClr val="1A2332"/>
                 </a:solidFill>
@@ -3260,14 +3283,10 @@
               </a:rPr>
               <a:t>changes in the release policy</a:t>
             </a:r>
-            <a:endParaRPr lang="en-US" sz="1150" dirty="0"/>
           </a:p>
           <a:p>
-            <a:pPr marL="0" indent="0">
-              <a:buNone/>
-            </a:pPr>
             <a:r>
-              <a:rPr lang="en-US" sz="1150" dirty="0">
+              <a:rPr lang="en-US" sz="1400" dirty="0">
                 <a:solidFill>
                   <a:srgbClr val="1A2332"/>
                 </a:solidFill>
@@ -3277,7 +3296,6 @@
               </a:rPr>
               <a:t>→ operational smoothness</a:t>
             </a:r>
-            <a:endParaRPr lang="en-US" sz="1150" dirty="0"/>
           </a:p>
         </p:txBody>
       </p:sp>
@@ -3798,7 +3816,7 @@
                 <a:ea typeface="Calibri" pitchFamily="34" charset="-122"/>
                 <a:cs typeface="Calibri" pitchFamily="34" charset="-120"/>
               </a:rPr>
-              <a:t>Discharge in m³/s integrated over 15-min intervals → weekly volume (m³/week)</a:t>
+              <a:t>Discharge in m³/s integrated over 15-min intervals → weekly volume (m³/week).</a:t>
             </a:r>
             <a:endParaRPr lang="en-US" sz="1050" dirty="0"/>
           </a:p>
@@ -3837,7 +3855,7 @@
                 <a:ea typeface="Georgia" pitchFamily="34" charset="-122"/>
                 <a:cs typeface="Georgia" pitchFamily="34" charset="-120"/>
               </a:rPr>
-              <a:t>Official Benchmark — T = 26 weeks, L = 5 levels</a:t>
+              <a:t>Official Benchmark — T = 26 weeks, L = 5 levels.</a:t>
             </a:r>
             <a:endParaRPr lang="en-US" sz="1400" dirty="0"/>
           </a:p>
@@ -3852,14 +3870,14 @@
           <p:nvPr>
             <p:extLst>
               <p:ext uri="{D42A27DB-BD31-4B8C-83A1-F6EECF244321}">
-                <p14:modId xmlns:p14="http://schemas.microsoft.com/office/powerpoint/2010/main" val="1579011935"/>
+                <p14:modId xmlns:p14="http://schemas.microsoft.com/office/powerpoint/2010/main" val="3878570969"/>
               </p:ext>
             </p:extLst>
           </p:nvPr>
         </p:nvGraphicFramePr>
         <p:xfrm>
-          <a:off x="4800600" y="1389888"/>
-          <a:ext cx="4114800" cy="3017520"/>
+          <a:off x="4800600" y="1451086"/>
+          <a:ext cx="4114800" cy="3006262"/>
         </p:xfrm>
         <a:graphic>
           <a:graphicData uri="http://schemas.openxmlformats.org/drawingml/2006/table">
@@ -3881,7 +3899,7 @@
                   </a:extLst>
                 </a:gridCol>
               </a:tblGrid>
-              <a:tr h="301752">
+              <a:tr h="293912">
                 <a:tc>
                   <a:txBody>
                     <a:bodyPr/>
@@ -3891,7 +3909,7 @@
                         <a:buNone/>
                       </a:pPr>
                       <a:r>
-                        <a:rPr lang="en-US" sz="1100" b="1" dirty="0">
+                        <a:rPr lang="en-US" sz="1200" b="1" dirty="0">
                           <a:solidFill>
                             <a:srgbClr val="FFFFFF"/>
                           </a:solidFill>
@@ -3901,7 +3919,7 @@
                         </a:rPr>
                         <a:t>Parameter</a:t>
                       </a:r>
-                      <a:endParaRPr lang="en-US" sz="1100" dirty="0">
+                      <a:endParaRPr lang="en-US" sz="1200" dirty="0">
                         <a:latin typeface="Calibri" charset="0"/>
                         <a:ea typeface="Calibri" charset="0"/>
                         <a:cs typeface="Calibri" charset="0"/>
@@ -3959,7 +3977,7 @@
                         <a:buNone/>
                       </a:pPr>
                       <a:r>
-                        <a:rPr lang="en-US" sz="1100" b="1" dirty="0">
+                        <a:rPr lang="en-US" sz="1200" b="1" dirty="0">
                           <a:solidFill>
                             <a:srgbClr val="FFFFFF"/>
                           </a:solidFill>
@@ -3969,7 +3987,7 @@
                         </a:rPr>
                         <a:t>Value</a:t>
                       </a:r>
-                      <a:endParaRPr lang="en-US" sz="1100" dirty="0">
+                      <a:endParaRPr lang="en-US" sz="1200" dirty="0">
                         <a:latin typeface="Calibri" charset="0"/>
                         <a:ea typeface="Calibri" charset="0"/>
                         <a:cs typeface="Calibri" charset="0"/>
@@ -4024,7 +4042,7 @@
                   </a:ext>
                 </a:extLst>
               </a:tr>
-              <a:tr h="301752">
+              <a:tr h="293912">
                 <a:tc>
                   <a:txBody>
                     <a:bodyPr/>
@@ -4034,7 +4052,7 @@
                         <a:buNone/>
                       </a:pPr>
                       <a:r>
-                        <a:rPr lang="en-US" sz="1100" dirty="0">
+                        <a:rPr lang="en-US" sz="1200" dirty="0">
                           <a:solidFill>
                             <a:srgbClr val="000000"/>
                           </a:solidFill>
@@ -4044,7 +4062,7 @@
                         </a:rPr>
                         <a:t>Smax  (official IBWC)</a:t>
                       </a:r>
-                      <a:endParaRPr lang="en-US" sz="1100" dirty="0">
+                      <a:endParaRPr lang="en-US" sz="1200" dirty="0">
                         <a:latin typeface="Calibri" charset="0"/>
                         <a:ea typeface="Calibri" charset="0"/>
                         <a:cs typeface="Calibri" charset="0"/>
@@ -4102,7 +4120,7 @@
                         <a:buNone/>
                       </a:pPr>
                       <a:r>
-                        <a:rPr lang="en-US" sz="1100" dirty="0">
+                        <a:rPr lang="en-US" sz="1200" dirty="0">
                           <a:solidFill>
                             <a:srgbClr val="000000"/>
                           </a:solidFill>
@@ -4112,7 +4130,7 @@
                         </a:rPr>
                         <a:t>3,288,726,000 m³</a:t>
                       </a:r>
-                      <a:endParaRPr lang="en-US" sz="1100" dirty="0">
+                      <a:endParaRPr lang="en-US" sz="1200" dirty="0">
                         <a:latin typeface="Calibri" charset="0"/>
                         <a:ea typeface="Calibri" charset="0"/>
                         <a:cs typeface="Calibri" charset="0"/>
@@ -4167,7 +4185,7 @@
                   </a:ext>
                 </a:extLst>
               </a:tr>
-              <a:tr h="301752">
+              <a:tr h="293912">
                 <a:tc>
                   <a:txBody>
                     <a:bodyPr/>
@@ -4177,7 +4195,7 @@
                         <a:buNone/>
                       </a:pPr>
                       <a:r>
-                        <a:rPr lang="en-US" sz="1100" dirty="0">
+                        <a:rPr lang="en-US" sz="1200" dirty="0">
                           <a:solidFill>
                             <a:srgbClr val="000000"/>
                           </a:solidFill>
@@ -4187,7 +4205,7 @@
                         </a:rPr>
                         <a:t>Smin  = 0.25 × Smax</a:t>
                       </a:r>
-                      <a:endParaRPr lang="en-US" sz="1100" dirty="0">
+                      <a:endParaRPr lang="en-US" sz="1200" dirty="0">
                         <a:latin typeface="Calibri" charset="0"/>
                         <a:ea typeface="Calibri" charset="0"/>
                         <a:cs typeface="Calibri" charset="0"/>
@@ -4245,7 +4263,7 @@
                         <a:buNone/>
                       </a:pPr>
                       <a:r>
-                        <a:rPr lang="en-US" sz="1100" dirty="0">
+                        <a:rPr lang="en-US" sz="1200" dirty="0">
                           <a:solidFill>
                             <a:srgbClr val="000000"/>
                           </a:solidFill>
@@ -4255,7 +4273,7 @@
                         </a:rPr>
                         <a:t>822,181,500 m³</a:t>
                       </a:r>
-                      <a:endParaRPr lang="en-US" sz="1100" dirty="0">
+                      <a:endParaRPr lang="en-US" sz="1200" dirty="0">
                         <a:latin typeface="Calibri" charset="0"/>
                         <a:ea typeface="Calibri" charset="0"/>
                         <a:cs typeface="Calibri" charset="0"/>
@@ -4310,7 +4328,7 @@
                   </a:ext>
                 </a:extLst>
               </a:tr>
-              <a:tr h="301752">
+              <a:tr h="361054">
                 <a:tc>
                   <a:txBody>
                     <a:bodyPr/>
@@ -4320,7 +4338,7 @@
                         <a:buNone/>
                       </a:pPr>
                       <a:r>
-                        <a:rPr lang="en-US" sz="1100" dirty="0">
+                        <a:rPr lang="en-US" sz="1200" dirty="0">
                           <a:solidFill>
                             <a:srgbClr val="000000"/>
                           </a:solidFill>
@@ -4330,7 +4348,7 @@
                         </a:rPr>
                         <a:t>S₀  (initial)</a:t>
                       </a:r>
-                      <a:endParaRPr lang="en-US" sz="1100" dirty="0">
+                      <a:endParaRPr lang="en-US" sz="1200" dirty="0">
                         <a:latin typeface="Calibri" charset="0"/>
                         <a:ea typeface="Calibri" charset="0"/>
                         <a:cs typeface="Calibri" charset="0"/>
@@ -4388,7 +4406,7 @@
                         <a:buNone/>
                       </a:pPr>
                       <a:r>
-                        <a:rPr lang="en-US" sz="1100" dirty="0">
+                        <a:rPr lang="en-US" sz="1200" dirty="0">
                           <a:solidFill>
                             <a:srgbClr val="000000"/>
                           </a:solidFill>
@@ -4398,7 +4416,7 @@
                         </a:rPr>
                         <a:t>375,611,223 m³  (11.4 % cap.)</a:t>
                       </a:r>
-                      <a:endParaRPr lang="en-US" sz="1100" dirty="0">
+                      <a:endParaRPr lang="en-US" sz="1200" dirty="0">
                         <a:latin typeface="Calibri" charset="0"/>
                         <a:ea typeface="Calibri" charset="0"/>
                         <a:cs typeface="Calibri" charset="0"/>
@@ -4453,7 +4471,7 @@
                   </a:ext>
                 </a:extLst>
               </a:tr>
-              <a:tr h="301752">
+              <a:tr h="293912">
                 <a:tc>
                   <a:txBody>
                     <a:bodyPr/>
@@ -4463,7 +4481,7 @@
                         <a:buNone/>
                       </a:pPr>
                       <a:r>
-                        <a:rPr lang="en-US" sz="1100" dirty="0">
+                        <a:rPr lang="en-US" sz="1200" dirty="0">
                           <a:solidFill>
                             <a:srgbClr val="000000"/>
                           </a:solidFill>
@@ -4473,7 +4491,7 @@
                         </a:rPr>
                         <a:t>Δu  = 0.25 × median(R)</a:t>
                       </a:r>
-                      <a:endParaRPr lang="en-US" sz="1100" dirty="0">
+                      <a:endParaRPr lang="en-US" sz="1200" dirty="0">
                         <a:latin typeface="Calibri" charset="0"/>
                         <a:ea typeface="Calibri" charset="0"/>
                         <a:cs typeface="Calibri" charset="0"/>
@@ -4531,7 +4549,7 @@
                         <a:buNone/>
                       </a:pPr>
                       <a:r>
-                        <a:rPr lang="en-US" sz="1100" dirty="0">
+                        <a:rPr lang="en-US" sz="1200" dirty="0">
                           <a:solidFill>
                             <a:srgbClr val="000000"/>
                           </a:solidFill>
@@ -4541,7 +4559,7 @@
                         </a:rPr>
                         <a:t>2,804,363 m³/week</a:t>
                       </a:r>
-                      <a:endParaRPr lang="en-US" sz="1100" dirty="0">
+                      <a:endParaRPr lang="en-US" sz="1200" dirty="0">
                         <a:latin typeface="Calibri" charset="0"/>
                         <a:ea typeface="Calibri" charset="0"/>
                         <a:cs typeface="Calibri" charset="0"/>
@@ -4596,7 +4614,7 @@
                   </a:ext>
                 </a:extLst>
               </a:tr>
-              <a:tr h="301752">
+              <a:tr h="293912">
                 <a:tc>
                   <a:txBody>
                     <a:bodyPr/>
@@ -4606,7 +4624,7 @@
                         <a:buNone/>
                       </a:pPr>
                       <a:r>
-                        <a:rPr lang="en-US" sz="1100" dirty="0">
+                        <a:rPr lang="en-US" sz="1200" dirty="0">
                           <a:solidFill>
                             <a:srgbClr val="000000"/>
                           </a:solidFill>
@@ -4616,7 +4634,7 @@
                         </a:rPr>
                         <a:t>u_max  = 2Δu</a:t>
                       </a:r>
-                      <a:endParaRPr lang="en-US" sz="1100" dirty="0">
+                      <a:endParaRPr lang="en-US" sz="1200" dirty="0">
                         <a:latin typeface="Calibri" charset="0"/>
                         <a:ea typeface="Calibri" charset="0"/>
                         <a:cs typeface="Calibri" charset="0"/>
@@ -4674,7 +4692,7 @@
                         <a:buNone/>
                       </a:pPr>
                       <a:r>
-                        <a:rPr lang="en-US" sz="1100" dirty="0">
+                        <a:rPr lang="en-US" sz="1200" dirty="0">
                           <a:solidFill>
                             <a:srgbClr val="000000"/>
                           </a:solidFill>
@@ -4684,7 +4702,7 @@
                         </a:rPr>
                         <a:t>5,608,725 m³/week</a:t>
                       </a:r>
-                      <a:endParaRPr lang="en-US" sz="1100" dirty="0">
+                      <a:endParaRPr lang="en-US" sz="1200" dirty="0">
                         <a:latin typeface="Calibri" charset="0"/>
                         <a:ea typeface="Calibri" charset="0"/>
                         <a:cs typeface="Calibri" charset="0"/>
@@ -4739,7 +4757,7 @@
                   </a:ext>
                 </a:extLst>
               </a:tr>
-              <a:tr h="301752">
+              <a:tr h="293912">
                 <a:tc>
                   <a:txBody>
                     <a:bodyPr/>
@@ -4749,7 +4767,7 @@
                         <a:buNone/>
                       </a:pPr>
                       <a:r>
-                        <a:rPr lang="en-US" sz="1100" dirty="0">
+                        <a:rPr lang="en-US" sz="1200" dirty="0">
                           <a:solidFill>
                             <a:srgbClr val="000000"/>
                           </a:solidFill>
@@ -4759,7 +4777,7 @@
                         </a:rPr>
                         <a:t>η  (balance constraint)</a:t>
                       </a:r>
-                      <a:endParaRPr lang="en-US" sz="1100" dirty="0">
+                      <a:endParaRPr lang="en-US" sz="1200" dirty="0">
                         <a:latin typeface="Calibri" charset="0"/>
                         <a:ea typeface="Calibri" charset="0"/>
                         <a:cs typeface="Calibri" charset="0"/>
@@ -4817,7 +4835,7 @@
                         <a:buNone/>
                       </a:pPr>
                       <a:r>
-                        <a:rPr lang="en-US" sz="1100" dirty="0">
+                        <a:rPr lang="en-US" sz="1200" dirty="0">
                           <a:solidFill>
                             <a:srgbClr val="000000"/>
                           </a:solidFill>
@@ -4827,7 +4845,7 @@
                         </a:rPr>
                         <a:t>0.10</a:t>
                       </a:r>
-                      <a:endParaRPr lang="en-US" sz="1100" dirty="0">
+                      <a:endParaRPr lang="en-US" sz="1200" dirty="0">
                         <a:latin typeface="Calibri" charset="0"/>
                         <a:ea typeface="Calibri" charset="0"/>
                         <a:cs typeface="Calibri" charset="0"/>
@@ -4882,7 +4900,7 @@
                   </a:ext>
                 </a:extLst>
               </a:tr>
-              <a:tr h="301752">
+              <a:tr h="293912">
                 <a:tc>
                   <a:txBody>
                     <a:bodyPr/>
@@ -4892,7 +4910,7 @@
                         <a:buNone/>
                       </a:pPr>
                       <a:r>
-                        <a:rPr lang="en-US" sz="1100" dirty="0">
+                        <a:rPr lang="en-US" sz="1200" dirty="0">
                           <a:solidFill>
                             <a:srgbClr val="000000"/>
                           </a:solidFill>
@@ -4902,7 +4920,7 @@
                         </a:rPr>
                         <a:t>w₁</a:t>
                       </a:r>
-                      <a:endParaRPr lang="en-US" sz="1100" dirty="0">
+                      <a:endParaRPr lang="en-US" sz="1200" dirty="0">
                         <a:latin typeface="Calibri" charset="0"/>
                         <a:ea typeface="Calibri" charset="0"/>
                         <a:cs typeface="Calibri" charset="0"/>
@@ -4960,7 +4978,7 @@
                         <a:buNone/>
                       </a:pPr>
                       <a:r>
-                        <a:rPr lang="en-US" sz="1100" dirty="0">
+                        <a:rPr lang="en-US" sz="1200" dirty="0">
                           <a:solidFill>
                             <a:srgbClr val="000000"/>
                           </a:solidFill>
@@ -4970,7 +4988,7 @@
                         </a:rPr>
                         <a:t>5.479 × 10⁻²⁰</a:t>
                       </a:r>
-                      <a:endParaRPr lang="en-US" sz="1100" dirty="0">
+                      <a:endParaRPr lang="en-US" sz="1200" dirty="0">
                         <a:latin typeface="Calibri" charset="0"/>
                         <a:ea typeface="Calibri" charset="0"/>
                         <a:cs typeface="Calibri" charset="0"/>
@@ -5025,7 +5043,7 @@
                   </a:ext>
                 </a:extLst>
               </a:tr>
-              <a:tr h="301752">
+              <a:tr h="293912">
                 <a:tc>
                   <a:txBody>
                     <a:bodyPr/>
@@ -5035,7 +5053,7 @@
                         <a:buNone/>
                       </a:pPr>
                       <a:r>
-                        <a:rPr lang="en-US" sz="1100" dirty="0">
+                        <a:rPr lang="en-US" sz="1200" dirty="0">
                           <a:solidFill>
                             <a:srgbClr val="000000"/>
                           </a:solidFill>
@@ -5045,7 +5063,7 @@
                         </a:rPr>
                         <a:t>w₂</a:t>
                       </a:r>
-                      <a:endParaRPr lang="en-US" sz="1100" dirty="0">
+                      <a:endParaRPr lang="en-US" sz="1200" dirty="0">
                         <a:latin typeface="Calibri" charset="0"/>
                         <a:ea typeface="Calibri" charset="0"/>
                         <a:cs typeface="Calibri" charset="0"/>
@@ -5103,7 +5121,7 @@
                         <a:buNone/>
                       </a:pPr>
                       <a:r>
-                        <a:rPr lang="en-US" sz="1100" dirty="0">
+                        <a:rPr lang="en-US" sz="1200" dirty="0">
                           <a:solidFill>
                             <a:srgbClr val="000000"/>
                           </a:solidFill>
@@ -5113,7 +5131,7 @@
                         </a:rPr>
                         <a:t>1.223 × 10⁻¹⁶</a:t>
                       </a:r>
-                      <a:endParaRPr lang="en-US" sz="1100" dirty="0">
+                      <a:endParaRPr lang="en-US" sz="1200" dirty="0">
                         <a:latin typeface="Calibri" charset="0"/>
                         <a:ea typeface="Calibri" charset="0"/>
                         <a:cs typeface="Calibri" charset="0"/>
@@ -5168,7 +5186,7 @@
                   </a:ext>
                 </a:extLst>
               </a:tr>
-              <a:tr h="301752">
+              <a:tr h="293912">
                 <a:tc>
                   <a:txBody>
                     <a:bodyPr/>
@@ -5178,7 +5196,7 @@
                         <a:buNone/>
                       </a:pPr>
                       <a:r>
-                        <a:rPr lang="en-US" sz="1100" dirty="0">
+                        <a:rPr lang="en-US" sz="1200" dirty="0">
                           <a:solidFill>
                             <a:srgbClr val="000000"/>
                           </a:solidFill>
@@ -5188,7 +5206,7 @@
                         </a:rPr>
                         <a:t>w₃</a:t>
                       </a:r>
-                      <a:endParaRPr lang="en-US" sz="1100" dirty="0">
+                      <a:endParaRPr lang="en-US" sz="1200" dirty="0">
                         <a:latin typeface="Calibri" charset="0"/>
                         <a:ea typeface="Calibri" charset="0"/>
                         <a:cs typeface="Calibri" charset="0"/>
@@ -5246,7 +5264,7 @@
                         <a:buNone/>
                       </a:pPr>
                       <a:r>
-                        <a:rPr lang="en-US" sz="1100" dirty="0">
+                        <a:rPr lang="en-US" sz="1200" dirty="0">
                           <a:solidFill>
                             <a:srgbClr val="000000"/>
                           </a:solidFill>
@@ -5256,7 +5274,7 @@
                         </a:rPr>
                         <a:t>3.179 × 10⁻¹⁷</a:t>
                       </a:r>
-                      <a:endParaRPr lang="en-US" sz="1100" dirty="0">
+                      <a:endParaRPr lang="en-US" sz="1200" dirty="0">
                         <a:latin typeface="Calibri" charset="0"/>
                         <a:ea typeface="Calibri" charset="0"/>
                         <a:cs typeface="Calibri" charset="0"/>
@@ -5323,7 +5341,7 @@
         </p:nvSpPr>
         <p:spPr>
           <a:xfrm>
-            <a:off x="4800600" y="4498848"/>
+            <a:off x="4800600" y="4460162"/>
             <a:ext cx="4114800" cy="658368"/>
           </a:xfrm>
           <a:prstGeom prst="roundRect">
@@ -5357,7 +5375,7 @@
         </p:nvSpPr>
         <p:spPr>
           <a:xfrm>
-            <a:off x="4937760" y="4544568"/>
+            <a:off x="4937760" y="4522060"/>
             <a:ext cx="3840480" cy="548640"/>
           </a:xfrm>
           <a:prstGeom prst="rect">
@@ -5700,7 +5718,7 @@
               <a:buNone/>
             </a:pPr>
             <a:r>
-              <a:rPr lang="en-US" sz="1200" dirty="0">
+              <a:rPr lang="en-US" sz="1400" dirty="0">
                 <a:solidFill>
                   <a:srgbClr val="1A2332"/>
                 </a:solidFill>
@@ -5710,14 +5728,14 @@
               </a:rPr>
               <a:t>Reproduces exact historical operation.</a:t>
             </a:r>
-            <a:endParaRPr lang="en-US" sz="1200" dirty="0"/>
+            <a:endParaRPr lang="en-US" sz="1400" dirty="0"/>
           </a:p>
           <a:p>
             <a:pPr marL="0" indent="0">
               <a:buNone/>
             </a:pPr>
             <a:r>
-              <a:rPr lang="en-US" sz="1200" dirty="0">
+              <a:rPr lang="en-US" sz="1400" dirty="0">
                 <a:solidFill>
                   <a:srgbClr val="1A2332"/>
                 </a:solidFill>
@@ -5727,20 +5745,20 @@
               </a:rPr>
               <a:t>No optimization applied.</a:t>
             </a:r>
-            <a:endParaRPr lang="en-US" sz="1200" dirty="0"/>
+            <a:endParaRPr lang="en-US" sz="1400" dirty="0"/>
           </a:p>
           <a:p>
             <a:pPr marL="0" indent="0">
               <a:buNone/>
             </a:pPr>
-            <a:endParaRPr lang="en-US" sz="1200" dirty="0"/>
+            <a:endParaRPr lang="en-US" sz="1400" dirty="0"/>
           </a:p>
           <a:p>
             <a:pPr marL="0" indent="0">
               <a:buNone/>
             </a:pPr>
             <a:r>
-              <a:rPr lang="en-US" sz="1200" dirty="0">
+              <a:rPr lang="en-US" sz="1400" dirty="0">
                 <a:solidFill>
                   <a:srgbClr val="1A2332"/>
                 </a:solidFill>
@@ -5750,14 +5768,14 @@
               </a:rPr>
               <a:t>SRS  =  −0.311534</a:t>
             </a:r>
-            <a:endParaRPr lang="en-US" sz="1200" dirty="0"/>
+            <a:endParaRPr lang="en-US" sz="1400" dirty="0"/>
           </a:p>
           <a:p>
             <a:pPr marL="0" indent="0">
               <a:buNone/>
             </a:pPr>
             <a:r>
-              <a:rPr lang="en-US" sz="1200" dirty="0">
+              <a:rPr lang="en-US" sz="1400" dirty="0">
                 <a:solidFill>
                   <a:srgbClr val="1A2332"/>
                 </a:solidFill>
@@ -5767,14 +5785,14 @@
               </a:rPr>
               <a:t>27 of 27 weeks below Smin</a:t>
             </a:r>
-            <a:endParaRPr lang="en-US" sz="1200" dirty="0"/>
+            <a:endParaRPr lang="en-US" sz="1400" dirty="0"/>
           </a:p>
           <a:p>
             <a:pPr marL="0" indent="0">
               <a:buNone/>
             </a:pPr>
             <a:r>
-              <a:rPr lang="en-US" sz="1200" dirty="0">
+              <a:rPr lang="en-US" sz="1400" dirty="0">
                 <a:solidFill>
                   <a:srgbClr val="1A2332"/>
                 </a:solidFill>
@@ -5784,7 +5802,7 @@
               </a:rPr>
               <a:t>Ccrit dominates — Cdev = Csmooth = 0</a:t>
             </a:r>
-            <a:endParaRPr lang="en-US" sz="1200" dirty="0"/>
+            <a:endParaRPr lang="en-US" sz="1400" dirty="0"/>
           </a:p>
         </p:txBody>
       </p:sp>
@@ -5981,7 +5999,7 @@
               <a:buNone/>
             </a:pPr>
             <a:r>
-              <a:rPr lang="en-US" sz="1200" dirty="0">
+              <a:rPr lang="en-US" sz="1400" dirty="0">
                 <a:solidFill>
                   <a:srgbClr val="1A2332"/>
                 </a:solidFill>
@@ -5991,20 +6009,20 @@
               </a:rPr>
               <a:t>Deterministic conservation rule.</a:t>
             </a:r>
-            <a:endParaRPr lang="en-US" sz="1200" dirty="0"/>
+            <a:endParaRPr lang="en-US" sz="1400" dirty="0"/>
           </a:p>
           <a:p>
             <a:pPr marL="0" indent="0">
               <a:buNone/>
             </a:pPr>
-            <a:endParaRPr lang="en-US" sz="1200" dirty="0"/>
+            <a:endParaRPr lang="en-US" sz="1400" dirty="0"/>
           </a:p>
           <a:p>
             <a:pPr marL="0" indent="0">
               <a:buNone/>
             </a:pPr>
             <a:r>
-              <a:rPr lang="en-US" sz="1200" dirty="0">
+              <a:rPr lang="en-US" sz="1400" dirty="0">
                 <a:solidFill>
                   <a:srgbClr val="1A2332"/>
                 </a:solidFill>
@@ -6014,14 +6032,14 @@
               </a:rPr>
               <a:t>SRS  =  −0.290423  (balanced)</a:t>
             </a:r>
-            <a:endParaRPr lang="en-US" sz="1200" dirty="0"/>
+            <a:endParaRPr lang="en-US" sz="1400" dirty="0"/>
           </a:p>
           <a:p>
             <a:pPr marL="0" indent="0">
               <a:buNone/>
             </a:pPr>
             <a:r>
-              <a:rPr lang="en-US" sz="1200" dirty="0">
+              <a:rPr lang="en-US" sz="1400" dirty="0">
                 <a:solidFill>
                   <a:srgbClr val="1A2332"/>
                 </a:solidFill>
@@ -6031,14 +6049,14 @@
               </a:rPr>
               <a:t>✓  Feasible  |  ΔSRS = +0.021111</a:t>
             </a:r>
-            <a:endParaRPr lang="en-US" sz="1200" dirty="0"/>
+            <a:endParaRPr lang="en-US" sz="1400" dirty="0"/>
           </a:p>
           <a:p>
             <a:pPr marL="0" indent="0">
               <a:buNone/>
             </a:pPr>
             <a:r>
-              <a:rPr lang="en-US" sz="1200" dirty="0">
+              <a:rPr lang="en-US" sz="1400" dirty="0">
                 <a:solidFill>
                   <a:srgbClr val="1A2332"/>
                 </a:solidFill>
@@ -6048,7 +6066,7 @@
               </a:rPr>
               <a:t>Reduces releases in 11 of 26 weeks</a:t>
             </a:r>
-            <a:endParaRPr lang="en-US" sz="1200" dirty="0"/>
+            <a:endParaRPr lang="en-US" sz="1400" dirty="0"/>
           </a:p>
         </p:txBody>
       </p:sp>
@@ -6368,8 +6386,8 @@
         </p:nvSpPr>
         <p:spPr>
           <a:xfrm>
-            <a:off x="457200" y="1378634"/>
-            <a:ext cx="4114800" cy="2194560"/>
+            <a:off x="457200" y="1793631"/>
+            <a:ext cx="4114800" cy="1849198"/>
           </a:xfrm>
           <a:prstGeom prst="rect">
             <a:avLst/>
@@ -6385,7 +6403,7 @@
               <a:buNone/>
             </a:pPr>
             <a:r>
-              <a:rPr lang="en-US" sz="1200" dirty="0">
+              <a:rPr lang="en-US" sz="1400" dirty="0">
                 <a:solidFill>
                   <a:srgbClr val="1A2332"/>
                 </a:solidFill>
@@ -6395,20 +6413,20 @@
               </a:rPr>
               <a:t>Brute-force is impossible. DP exploits the cumulative structure:</a:t>
             </a:r>
-            <a:endParaRPr lang="en-US" sz="1200" dirty="0"/>
+            <a:endParaRPr lang="en-US" sz="1400" dirty="0"/>
           </a:p>
           <a:p>
             <a:pPr marL="0" indent="0">
               <a:buNone/>
             </a:pPr>
-            <a:endParaRPr lang="en-US" sz="1200" dirty="0"/>
+            <a:endParaRPr lang="en-US" sz="1400" dirty="0"/>
           </a:p>
           <a:p>
             <a:pPr marL="0" indent="0">
               <a:buNone/>
             </a:pPr>
             <a:r>
-              <a:rPr lang="en-US" sz="1200" dirty="0">
+              <a:rPr lang="en-US" sz="1400" dirty="0">
                 <a:solidFill>
                   <a:srgbClr val="1A2332"/>
                 </a:solidFill>
@@ -6418,20 +6436,20 @@
               </a:rPr>
               <a:t>     S_opt(t) = S_hist(t) − q_t · Δu</a:t>
             </a:r>
-            <a:endParaRPr lang="en-US" sz="1200" dirty="0"/>
+            <a:endParaRPr lang="en-US" sz="1400" dirty="0"/>
           </a:p>
           <a:p>
             <a:pPr marL="0" indent="0">
               <a:buNone/>
             </a:pPr>
-            <a:endParaRPr lang="en-US" sz="1200" dirty="0"/>
+            <a:endParaRPr lang="en-US" sz="1400" dirty="0"/>
           </a:p>
           <a:p>
             <a:pPr marL="0" indent="0">
               <a:buNone/>
             </a:pPr>
             <a:r>
-              <a:rPr lang="en-US" sz="1200" dirty="0">
+              <a:rPr lang="en-US" sz="1400" dirty="0">
                 <a:solidFill>
                   <a:srgbClr val="1A2332"/>
                 </a:solidFill>
@@ -6441,14 +6459,14 @@
               </a:rPr>
               <a:t>where q_t = Σ k_τ  (integer sum of adjustment levels).</a:t>
             </a:r>
-            <a:endParaRPr lang="en-US" sz="1200" dirty="0"/>
+            <a:endParaRPr lang="en-US" sz="1400" dirty="0"/>
           </a:p>
           <a:p>
             <a:pPr marL="0" indent="0">
               <a:buNone/>
             </a:pPr>
             <a:r>
-              <a:rPr lang="en-US" sz="1200" dirty="0">
+              <a:rPr lang="en-US" sz="1400" dirty="0">
                 <a:solidFill>
                   <a:srgbClr val="1A2332"/>
                 </a:solidFill>
@@ -6458,14 +6476,14 @@
               </a:rPr>
               <a:t>State space: (t, q_t, k_{t-1}).  DP is optimal within</a:t>
             </a:r>
-            <a:endParaRPr lang="en-US" sz="1200" dirty="0"/>
+            <a:endParaRPr lang="en-US" sz="1400" dirty="0"/>
           </a:p>
           <a:p>
             <a:pPr marL="0" indent="0">
               <a:buNone/>
             </a:pPr>
             <a:r>
-              <a:rPr lang="en-US" sz="1200" dirty="0">
+              <a:rPr lang="en-US" sz="1400" dirty="0">
                 <a:solidFill>
                   <a:srgbClr val="1A2332"/>
                 </a:solidFill>
@@ -6475,7 +6493,7 @@
               </a:rPr>
               <a:t>the discrete level set — verified by brute-force on T=12.</a:t>
             </a:r>
-            <a:endParaRPr lang="en-US" sz="1200" dirty="0"/>
+            <a:endParaRPr lang="en-US" sz="1400" dirty="0"/>
           </a:p>
         </p:txBody>
       </p:sp>
@@ -6487,7 +6505,7 @@
         </p:nvSpPr>
         <p:spPr>
           <a:xfrm>
-            <a:off x="457200" y="3273552"/>
+            <a:off x="411480" y="3892296"/>
             <a:ext cx="4114800" cy="777240"/>
           </a:xfrm>
           <a:prstGeom prst="roundRect">
@@ -6521,7 +6539,7 @@
         </p:nvSpPr>
         <p:spPr>
           <a:xfrm>
-            <a:off x="594360" y="3319272"/>
+            <a:off x="548640" y="3938016"/>
             <a:ext cx="3840480" cy="685800"/>
           </a:xfrm>
           <a:prstGeom prst="rect">
@@ -10561,7 +10579,7 @@
         </p:nvSpPr>
         <p:spPr>
           <a:xfrm>
-            <a:off x="211015" y="4356413"/>
+            <a:off x="211015" y="4669536"/>
             <a:ext cx="4607169" cy="347472"/>
           </a:xfrm>
           <a:prstGeom prst="rect">
@@ -14502,6 +14520,36 @@
 
 <file path=ppt/slides/slide7.xml><?xml version="1.0" encoding="utf-8"?>
 <p:sld xmlns:a="http://schemas.openxmlformats.org/drawingml/2006/main" xmlns:r="http://schemas.openxmlformats.org/officeDocument/2006/relationships" xmlns:p="http://schemas.openxmlformats.org/presentationml/2006/main">
+  <p:cSld>
+    <p:spTree>
+      <p:nvGrpSpPr>
+        <p:cNvPr id="1" name=""/>
+        <p:cNvGrpSpPr/>
+        <p:nvPr/>
+      </p:nvGrpSpPr>
+      <p:grpSpPr>
+        <a:xfrm>
+          <a:off x="0" y="0"/>
+          <a:ext cx="0" cy="0"/>
+          <a:chOff x="0" y="0"/>
+          <a:chExt cx="0" cy="0"/>
+        </a:xfrm>
+      </p:grpSpPr>
+    </p:spTree>
+    <p:extLst>
+      <p:ext uri="{BB962C8B-B14F-4D97-AF65-F5344CB8AC3E}">
+        <p14:creationId xmlns:p14="http://schemas.microsoft.com/office/powerpoint/2010/main" val="3897707828"/>
+      </p:ext>
+    </p:extLst>
+  </p:cSld>
+  <p:clrMapOvr>
+    <a:masterClrMapping/>
+  </p:clrMapOvr>
+</p:sld>
+</file>
+
+<file path=ppt/slides/slide8.xml><?xml version="1.0" encoding="utf-8"?>
+<p:sld xmlns:a="http://schemas.openxmlformats.org/drawingml/2006/main" xmlns:r="http://schemas.openxmlformats.org/officeDocument/2006/relationships" xmlns:p="http://schemas.openxmlformats.org/presentationml/2006/main">
   <p:cSld name="Slide 7">
     <p:bg>
       <p:bgPr>
@@ -14803,7 +14851,7 @@
               <a:buNone/>
             </a:pPr>
             <a:r>
-              <a:rPr lang="en-US" sz="1300" b="1" dirty="0">
+              <a:rPr lang="en-US" sz="1400" b="1" dirty="0">
                 <a:solidFill>
                   <a:srgbClr val="0E7C7B"/>
                 </a:solidFill>
@@ -14813,7 +14861,7 @@
               </a:rPr>
               <a:t>Problem Formulation</a:t>
             </a:r>
-            <a:endParaRPr lang="en-US" sz="1300" dirty="0"/>
+            <a:endParaRPr lang="en-US" sz="1400" dirty="0"/>
           </a:p>
         </p:txBody>
       </p:sp>
@@ -14842,7 +14890,7 @@
               <a:buNone/>
             </a:pPr>
             <a:r>
-              <a:rPr lang="en-US" sz="1150" dirty="0">
+              <a:rPr lang="en-US" sz="1400" dirty="0">
                 <a:solidFill>
                   <a:srgbClr val="CCDAE8"/>
                 </a:solidFill>
@@ -14852,7 +14900,7 @@
               </a:rPr>
               <a:t>Reservoir scheduling encoded as discrete optimization over T=26 weeks × 5 levels. SRS metric with 3 penalty terms, 4 operational constraints verified.</a:t>
             </a:r>
-            <a:endParaRPr lang="en-US" sz="1150" dirty="0"/>
+            <a:endParaRPr lang="en-US" sz="1400" dirty="0"/>
           </a:p>
         </p:txBody>
       </p:sp>
@@ -14954,7 +15002,7 @@
               <a:buNone/>
             </a:pPr>
             <a:r>
-              <a:rPr lang="en-US" sz="1300" b="1" dirty="0">
+              <a:rPr lang="en-US" sz="1400" b="1" dirty="0">
                 <a:solidFill>
                   <a:srgbClr val="4A90C4"/>
                 </a:solidFill>
@@ -14964,7 +15012,7 @@
               </a:rPr>
               <a:t>Classical Optimum</a:t>
             </a:r>
-            <a:endParaRPr lang="en-US" sz="1300" dirty="0"/>
+            <a:endParaRPr lang="en-US" sz="1400" dirty="0"/>
           </a:p>
         </p:txBody>
       </p:sp>
@@ -14993,7 +15041,7 @@
               <a:buNone/>
             </a:pPr>
             <a:r>
-              <a:rPr lang="en-US" sz="1150" dirty="0">
+              <a:rPr lang="en-US" sz="1400" dirty="0">
                 <a:solidFill>
                   <a:srgbClr val="CCDAE8"/>
                 </a:solidFill>
@@ -15003,7 +15051,7 @@
               </a:rPr>
               <a:t>DP finds the exact optimal within the discrete level set: u* = −Δu for 11 weeks then 0. Runtime: 0.020 s. Formally verified by brute-force at T=12.</a:t>
             </a:r>
-            <a:endParaRPr lang="en-US" sz="1150" dirty="0"/>
+            <a:endParaRPr lang="en-US" sz="1400" dirty="0"/>
           </a:p>
         </p:txBody>
       </p:sp>
@@ -15105,7 +15153,7 @@
               <a:buNone/>
             </a:pPr>
             <a:r>
-              <a:rPr lang="en-US" sz="1300" b="1" dirty="0">
+              <a:rPr lang="en-US" sz="1400" b="1" dirty="0">
                 <a:solidFill>
                   <a:srgbClr val="2E5FA3"/>
                 </a:solidFill>
@@ -15115,7 +15163,7 @@
               </a:rPr>
               <a:t>Scalability</a:t>
             </a:r>
-            <a:endParaRPr lang="en-US" sz="1300" dirty="0"/>
+            <a:endParaRPr lang="en-US" sz="1400" dirty="0"/>
           </a:p>
         </p:txBody>
       </p:sp>
@@ -15144,7 +15192,7 @@
               <a:buNone/>
             </a:pPr>
             <a:r>
-              <a:rPr lang="en-US" sz="1150" dirty="0">
+              <a:rPr lang="en-US" sz="1400" dirty="0">
                 <a:solidFill>
                   <a:srgbClr val="CCDAE8"/>
                 </a:solidFill>
@@ -15154,7 +15202,7 @@
               </a:rPr>
               <a:t>DP scales from 5²⁶ ≈ 10¹⁸ to 7⁵² ≈ 10⁴³ in &lt; 1.1 s. Search space grows exponentially; DP keeps runtime polynomial via cumulative-state reduction.</a:t>
             </a:r>
-            <a:endParaRPr lang="en-US" sz="1150" dirty="0"/>
+            <a:endParaRPr lang="en-US" sz="1400" dirty="0"/>
           </a:p>
         </p:txBody>
       </p:sp>
@@ -15256,7 +15304,7 @@
               <a:buNone/>
             </a:pPr>
             <a:r>
-              <a:rPr lang="en-US" sz="1300" b="1" dirty="0">
+              <a:rPr lang="en-US" sz="1400" b="1" dirty="0">
                 <a:solidFill>
                   <a:srgbClr val="5B7FA6"/>
                 </a:solidFill>
@@ -15266,7 +15314,7 @@
               </a:rPr>
               <a:t>Limitations &amp; Next Steps</a:t>
             </a:r>
-            <a:endParaRPr lang="en-US" sz="1300" dirty="0"/>
+            <a:endParaRPr lang="en-US" sz="1400" dirty="0"/>
           </a:p>
         </p:txBody>
       </p:sp>
@@ -15278,7 +15326,7 @@
         </p:nvSpPr>
         <p:spPr>
           <a:xfrm>
-            <a:off x="5010912" y="3666744"/>
+            <a:off x="5010912" y="3632278"/>
             <a:ext cx="3749040" cy="914400"/>
           </a:xfrm>
           <a:prstGeom prst="rect">
@@ -15295,7 +15343,7 @@
               <a:buNone/>
             </a:pPr>
             <a:r>
-              <a:rPr lang="en-US" sz="1150" dirty="0">
+              <a:rPr lang="en-US" sz="1400" dirty="0">
                 <a:solidFill>
                   <a:srgbClr val="CCDAE8"/>
                 </a:solidFill>
@@ -15305,7 +15353,7 @@
               </a:rPr>
               <a:t>Simplified hydrological model. No treaty/legal constraints. Future work: QUBO/QAOA formulation (56 qubits/window) for quantum comparison on QPU.</a:t>
             </a:r>
-            <a:endParaRPr lang="en-US" sz="1150" dirty="0"/>
+            <a:endParaRPr lang="en-US" sz="1400" dirty="0"/>
           </a:p>
         </p:txBody>
       </p:sp>

--- a/Equipo04_FalconChallenge.pptx
+++ b/Equipo04_FalconChallenge.pptx
@@ -5,7 +5,7 @@
     <p:sldMasterId id="2147483648" r:id="rId1"/>
   </p:sldMasterIdLst>
   <p:notesMasterIdLst>
-    <p:notesMasterId r:id="rId10"/>
+    <p:notesMasterId r:id="rId14"/>
   </p:notesMasterIdLst>
   <p:sldIdLst>
     <p:sldId id="256" r:id="rId2"/>
@@ -13,9 +13,13 @@
     <p:sldId id="258" r:id="rId4"/>
     <p:sldId id="259" r:id="rId5"/>
     <p:sldId id="260" r:id="rId6"/>
-    <p:sldId id="261" r:id="rId7"/>
-    <p:sldId id="263" r:id="rId8"/>
-    <p:sldId id="262" r:id="rId9"/>
+    <p:sldId id="263" r:id="rId7"/>
+    <p:sldId id="261" r:id="rId8"/>
+    <p:sldId id="264" r:id="rId9"/>
+    <p:sldId id="265" r:id="rId10"/>
+    <p:sldId id="266" r:id="rId11"/>
+    <p:sldId id="267" r:id="rId12"/>
+    <p:sldId id="262" r:id="rId13"/>
   </p:sldIdLst>
   <p:sldSz cx="9144000" cy="5143500" type="screen16x9"/>
   <p:notesSz cx="5143500" cy="9144000"/>
@@ -128,7 +132,17 @@
   <c:chart>
     <c:autoTitleDeleted val="1"/>
     <c:plotArea>
-      <c:layout/>
+      <c:layout>
+        <c:manualLayout>
+          <c:layoutTarget val="inner"/>
+          <c:xMode val="edge"/>
+          <c:yMode val="edge"/>
+          <c:x val="5.2604205724284467E-2"/>
+          <c:y val="0.2178649237472767"/>
+          <c:w val="0.89479158855143104"/>
+          <c:h val="0.45851345787658898"/>
+        </c:manualLayout>
+      </c:layout>
       <c:barChart>
         <c:barDir val="bar"/>
         <c:grouping val="clustered"/>
@@ -1014,7 +1028,7 @@
           <a:p>
             <a:fld id="{F7021451-1387-4CA6-816F-3879F97B5CBC}" type="slidenum">
               <a:rPr lang="en-US"/>
-              <a:t>6</a:t>
+              <a:t>7</a:t>
             </a:fld>
             <a:endParaRPr lang="en-US"/>
           </a:p>
@@ -1101,7 +1115,7 @@
           <a:p>
             <a:fld id="{F7021451-1387-4CA6-816F-3879F97B5CBC}" type="slidenum">
               <a:rPr lang="en-US"/>
-              <a:t>8</a:t>
+              <a:t>12</a:t>
             </a:fld>
             <a:endParaRPr lang="en-US"/>
           </a:p>
@@ -1457,6 +1471,37 @@
           <a:chExt cx="0" cy="0"/>
         </a:xfrm>
       </p:grpSpPr>
+      <p:pic>
+        <p:nvPicPr>
+          <p:cNvPr id="27" name="Imagen 26">
+            <a:extLst>
+              <a:ext uri="{FF2B5EF4-FFF2-40B4-BE49-F238E27FC236}">
+                <a16:creationId xmlns:a16="http://schemas.microsoft.com/office/drawing/2014/main" id="{6E2AA17B-3D82-E15A-C174-4D4AF3AF0B43}"/>
+              </a:ext>
+            </a:extLst>
+          </p:cNvPr>
+          <p:cNvPicPr>
+            <a:picLocks noChangeAspect="1"/>
+          </p:cNvPicPr>
+          <p:nvPr/>
+        </p:nvPicPr>
+        <p:blipFill>
+          <a:blip r:embed="rId3"/>
+          <a:srcRect l="2140" t="6837" r="2930" b="6878"/>
+          <a:stretch>
+            <a:fillRect/>
+          </a:stretch>
+        </p:blipFill>
+        <p:spPr>
+          <a:xfrm>
+            <a:off x="4617720" y="868680"/>
+            <a:ext cx="4149969" cy="2829013"/>
+          </a:xfrm>
+          <a:prstGeom prst="rect">
+            <a:avLst/>
+          </a:prstGeom>
+        </p:spPr>
+      </p:pic>
       <p:sp>
         <p:nvSpPr>
           <p:cNvPr id="2" name="Shape 0"/>
@@ -2294,6 +2339,2683 @@
               <a:t>Hackathon-Puebla-2026 / Equipo_04</a:t>
             </a:r>
             <a:endParaRPr lang="en-US" sz="900" dirty="0"/>
+          </a:p>
+        </p:txBody>
+      </p:sp>
+    </p:spTree>
+  </p:cSld>
+  <p:clrMapOvr>
+    <a:masterClrMapping/>
+  </p:clrMapOvr>
+</p:sld>
+</file>
+
+<file path=ppt/slides/slide10.xml><?xml version="1.0" encoding="utf-8"?>
+<p:sld xmlns:a="http://schemas.openxmlformats.org/drawingml/2006/main" xmlns:r="http://schemas.openxmlformats.org/officeDocument/2006/relationships" xmlns:p="http://schemas.openxmlformats.org/presentationml/2006/main">
+  <p:cSld>
+    <p:bg>
+      <p:bgPr>
+        <a:solidFill>
+          <a:srgbClr val="F7F9FC"/>
+        </a:solidFill>
+        <a:effectLst/>
+      </p:bgPr>
+    </p:bg>
+    <p:spTree>
+      <p:nvGrpSpPr>
+        <p:cNvPr id="1" name=""/>
+        <p:cNvGrpSpPr/>
+        <p:nvPr/>
+      </p:nvGrpSpPr>
+      <p:grpSpPr>
+        <a:xfrm>
+          <a:off x="0" y="0"/>
+          <a:ext cx="0" cy="0"/>
+          <a:chOff x="0" y="0"/>
+          <a:chExt cx="0" cy="0"/>
+        </a:xfrm>
+      </p:grpSpPr>
+      <p:sp>
+        <p:nvSpPr>
+          <p:cNvPr id="2" name="Rectangle 1"/>
+          <p:cNvSpPr/>
+          <p:nvPr/>
+        </p:nvSpPr>
+        <p:spPr>
+          <a:xfrm>
+            <a:off x="0" y="0"/>
+            <a:ext cx="9144000" cy="868680"/>
+          </a:xfrm>
+          <a:prstGeom prst="rect">
+            <a:avLst/>
+          </a:prstGeom>
+          <a:solidFill>
+            <a:srgbClr val="1B3A6B"/>
+          </a:solidFill>
+          <a:ln>
+            <a:noFill/>
+          </a:ln>
+          <a:effectLst/>
+        </p:spPr>
+        <p:style>
+          <a:lnRef idx="1">
+            <a:schemeClr val="accent1"/>
+          </a:lnRef>
+          <a:fillRef idx="3">
+            <a:schemeClr val="accent1"/>
+          </a:fillRef>
+          <a:effectRef idx="2">
+            <a:schemeClr val="accent1"/>
+          </a:effectRef>
+          <a:fontRef idx="minor">
+            <a:schemeClr val="lt1"/>
+          </a:fontRef>
+        </p:style>
+        <p:txBody>
+          <a:bodyPr rtlCol="0" anchor="ctr"/>
+          <a:lstStyle/>
+          <a:p>
+            <a:pPr algn="ctr"/>
+            <a:endParaRPr/>
+          </a:p>
+        </p:txBody>
+      </p:sp>
+      <p:sp>
+        <p:nvSpPr>
+          <p:cNvPr id="3" name="Rectangle 2"/>
+          <p:cNvSpPr/>
+          <p:nvPr/>
+        </p:nvSpPr>
+        <p:spPr>
+          <a:xfrm>
+            <a:off x="0" y="804672"/>
+            <a:ext cx="9144000" cy="64008"/>
+          </a:xfrm>
+          <a:prstGeom prst="rect">
+            <a:avLst/>
+          </a:prstGeom>
+          <a:solidFill>
+            <a:srgbClr val="2DC9A4"/>
+          </a:solidFill>
+          <a:ln>
+            <a:noFill/>
+          </a:ln>
+          <a:effectLst/>
+        </p:spPr>
+        <p:style>
+          <a:lnRef idx="1">
+            <a:schemeClr val="accent1"/>
+          </a:lnRef>
+          <a:fillRef idx="3">
+            <a:schemeClr val="accent1"/>
+          </a:fillRef>
+          <a:effectRef idx="2">
+            <a:schemeClr val="accent1"/>
+          </a:effectRef>
+          <a:fontRef idx="minor">
+            <a:schemeClr val="lt1"/>
+          </a:fontRef>
+        </p:style>
+        <p:txBody>
+          <a:bodyPr rtlCol="0" anchor="ctr"/>
+          <a:lstStyle/>
+          <a:p>
+            <a:pPr algn="ctr"/>
+            <a:endParaRPr/>
+          </a:p>
+        </p:txBody>
+      </p:sp>
+      <p:sp>
+        <p:nvSpPr>
+          <p:cNvPr id="4" name="TextBox 3"/>
+          <p:cNvSpPr txBox="1"/>
+          <p:nvPr/>
+        </p:nvSpPr>
+        <p:spPr>
+          <a:xfrm>
+            <a:off x="457200" y="0"/>
+            <a:ext cx="7800000" cy="868680"/>
+          </a:xfrm>
+          <a:prstGeom prst="rect">
+            <a:avLst/>
+          </a:prstGeom>
+          <a:noFill/>
+        </p:spPr>
+        <p:txBody>
+          <a:bodyPr wrap="square" lIns="0" tIns="0" rIns="0" bIns="0" anchor="ctr">
+            <a:spAutoFit/>
+          </a:bodyPr>
+          <a:lstStyle/>
+          <a:p>
+            <a:pPr algn="l">
+              <a:spcAft>
+                <a:spcPts val="0"/>
+              </a:spcAft>
+            </a:pPr>
+            <a:r>
+              <a:rPr sz="2200" b="1" i="0">
+                <a:solidFill>
+                  <a:srgbClr val="FFFFFF"/>
+                </a:solidFill>
+                <a:latin typeface="Georgia"/>
+              </a:rPr>
+              <a:t>Quantum Track — QUBO / QAOA Formulation</a:t>
+            </a:r>
+          </a:p>
+        </p:txBody>
+      </p:sp>
+      <p:sp>
+        <p:nvSpPr>
+          <p:cNvPr id="5" name="Rounded Rectangle 4"/>
+          <p:cNvSpPr/>
+          <p:nvPr/>
+        </p:nvSpPr>
+        <p:spPr>
+          <a:xfrm>
+            <a:off x="457200" y="1000000"/>
+            <a:ext cx="4550000" cy="870000"/>
+          </a:xfrm>
+          <a:prstGeom prst="roundRect">
+            <a:avLst>
+              <a:gd name="adj" fmla="val 6000"/>
+            </a:avLst>
+          </a:prstGeom>
+          <a:solidFill>
+            <a:srgbClr val="FFFFFF"/>
+          </a:solidFill>
+          <a:ln w="9525">
+            <a:solidFill>
+              <a:srgbClr val="D0DCE8"/>
+            </a:solidFill>
+          </a:ln>
+          <a:effectLst/>
+        </p:spPr>
+        <p:style>
+          <a:lnRef idx="1">
+            <a:schemeClr val="accent1"/>
+          </a:lnRef>
+          <a:fillRef idx="3">
+            <a:schemeClr val="accent1"/>
+          </a:fillRef>
+          <a:effectRef idx="2">
+            <a:schemeClr val="accent1"/>
+          </a:effectRef>
+          <a:fontRef idx="minor">
+            <a:schemeClr val="lt1"/>
+          </a:fontRef>
+        </p:style>
+        <p:txBody>
+          <a:bodyPr rtlCol="0" anchor="ctr"/>
+          <a:lstStyle/>
+          <a:p>
+            <a:pPr algn="ctr"/>
+            <a:endParaRPr/>
+          </a:p>
+        </p:txBody>
+      </p:sp>
+      <p:sp>
+        <p:nvSpPr>
+          <p:cNvPr id="6" name="TextBox 5"/>
+          <p:cNvSpPr txBox="1"/>
+          <p:nvPr/>
+        </p:nvSpPr>
+        <p:spPr>
+          <a:xfrm>
+            <a:off x="607200" y="1070000"/>
+            <a:ext cx="4250000" cy="260000"/>
+          </a:xfrm>
+          <a:prstGeom prst="rect">
+            <a:avLst/>
+          </a:prstGeom>
+          <a:noFill/>
+        </p:spPr>
+        <p:txBody>
+          <a:bodyPr wrap="square" lIns="0" tIns="0" rIns="0" bIns="0" anchor="t">
+            <a:spAutoFit/>
+          </a:bodyPr>
+          <a:lstStyle/>
+          <a:p>
+            <a:pPr algn="l">
+              <a:spcAft>
+                <a:spcPts val="0"/>
+              </a:spcAft>
+            </a:pPr>
+            <a:r>
+              <a:rPr sz="1150" b="1" i="0">
+                <a:solidFill>
+                  <a:srgbClr val="1B3A6B"/>
+                </a:solidFill>
+                <a:latin typeface="Georgia"/>
+              </a:rPr>
+              <a:t>Encoding</a:t>
+            </a:r>
+          </a:p>
+        </p:txBody>
+      </p:sp>
+      <p:sp>
+        <p:nvSpPr>
+          <p:cNvPr id="7" name="TextBox 6"/>
+          <p:cNvSpPr txBox="1"/>
+          <p:nvPr/>
+        </p:nvSpPr>
+        <p:spPr>
+          <a:xfrm>
+            <a:off x="607200" y="1330000"/>
+            <a:ext cx="4250000" cy="500000"/>
+          </a:xfrm>
+          <a:prstGeom prst="rect">
+            <a:avLst/>
+          </a:prstGeom>
+          <a:noFill/>
+        </p:spPr>
+        <p:txBody>
+          <a:bodyPr wrap="square" lIns="0" tIns="0" rIns="0" bIns="0" anchor="t">
+            <a:spAutoFit/>
+          </a:bodyPr>
+          <a:lstStyle/>
+          <a:p>
+            <a:pPr algn="l">
+              <a:lnSpc>
+                <a:spcPct val="105000"/>
+              </a:lnSpc>
+              <a:spcAft>
+                <a:spcPts val="0"/>
+              </a:spcAft>
+            </a:pPr>
+            <a:r>
+              <a:rPr sz="930" b="0" i="0">
+                <a:solidFill>
+                  <a:srgbClr val="1A2332"/>
+                </a:solidFill>
+                <a:latin typeface="Calibri"/>
+              </a:rPr>
+              <a:t>One-hot:  x(t,ℓ) ∈ {0,1};   u(t) = Δu · Σℓ qℓ·x(t,ℓ);  one-hot rule  Σℓ x(t,ℓ) = 1  per week.</a:t>
+            </a:r>
+          </a:p>
+        </p:txBody>
+      </p:sp>
+      <p:sp>
+        <p:nvSpPr>
+          <p:cNvPr id="8" name="Rounded Rectangle 7"/>
+          <p:cNvSpPr/>
+          <p:nvPr/>
+        </p:nvSpPr>
+        <p:spPr>
+          <a:xfrm>
+            <a:off x="457200" y="1960000"/>
+            <a:ext cx="4550000" cy="870000"/>
+          </a:xfrm>
+          <a:prstGeom prst="roundRect">
+            <a:avLst>
+              <a:gd name="adj" fmla="val 6000"/>
+            </a:avLst>
+          </a:prstGeom>
+          <a:solidFill>
+            <a:srgbClr val="FFFFFF"/>
+          </a:solidFill>
+          <a:ln w="9525">
+            <a:solidFill>
+              <a:srgbClr val="D0DCE8"/>
+            </a:solidFill>
+          </a:ln>
+          <a:effectLst/>
+        </p:spPr>
+        <p:style>
+          <a:lnRef idx="1">
+            <a:schemeClr val="accent1"/>
+          </a:lnRef>
+          <a:fillRef idx="3">
+            <a:schemeClr val="accent1"/>
+          </a:fillRef>
+          <a:effectRef idx="2">
+            <a:schemeClr val="accent1"/>
+          </a:effectRef>
+          <a:fontRef idx="minor">
+            <a:schemeClr val="lt1"/>
+          </a:fontRef>
+        </p:style>
+        <p:txBody>
+          <a:bodyPr rtlCol="0" anchor="ctr"/>
+          <a:lstStyle/>
+          <a:p>
+            <a:pPr algn="ctr"/>
+            <a:endParaRPr/>
+          </a:p>
+        </p:txBody>
+      </p:sp>
+      <p:sp>
+        <p:nvSpPr>
+          <p:cNvPr id="9" name="TextBox 8"/>
+          <p:cNvSpPr txBox="1"/>
+          <p:nvPr/>
+        </p:nvSpPr>
+        <p:spPr>
+          <a:xfrm>
+            <a:off x="607200" y="2030000"/>
+            <a:ext cx="4250000" cy="260000"/>
+          </a:xfrm>
+          <a:prstGeom prst="rect">
+            <a:avLst/>
+          </a:prstGeom>
+          <a:noFill/>
+        </p:spPr>
+        <p:txBody>
+          <a:bodyPr wrap="square" lIns="0" tIns="0" rIns="0" bIns="0" anchor="t">
+            <a:spAutoFit/>
+          </a:bodyPr>
+          <a:lstStyle/>
+          <a:p>
+            <a:pPr algn="l">
+              <a:spcAft>
+                <a:spcPts val="0"/>
+              </a:spcAft>
+            </a:pPr>
+            <a:r>
+              <a:rPr sz="1150" b="1" i="0">
+                <a:solidFill>
+                  <a:srgbClr val="1B3A6B"/>
+                </a:solidFill>
+                <a:latin typeface="Georgia"/>
+              </a:rPr>
+              <a:t>QUBO terms</a:t>
+            </a:r>
+          </a:p>
+        </p:txBody>
+      </p:sp>
+      <p:sp>
+        <p:nvSpPr>
+          <p:cNvPr id="10" name="TextBox 9"/>
+          <p:cNvSpPr txBox="1"/>
+          <p:nvPr/>
+        </p:nvSpPr>
+        <p:spPr>
+          <a:xfrm>
+            <a:off x="607200" y="2290000"/>
+            <a:ext cx="4250000" cy="500000"/>
+          </a:xfrm>
+          <a:prstGeom prst="rect">
+            <a:avLst/>
+          </a:prstGeom>
+          <a:noFill/>
+        </p:spPr>
+        <p:txBody>
+          <a:bodyPr wrap="square" lIns="0" tIns="0" rIns="0" bIns="0" anchor="t">
+            <a:spAutoFit/>
+          </a:bodyPr>
+          <a:lstStyle/>
+          <a:p>
+            <a:pPr algn="l">
+              <a:lnSpc>
+                <a:spcPct val="105000"/>
+              </a:lnSpc>
+              <a:spcAft>
+                <a:spcPts val="0"/>
+              </a:spcAft>
+            </a:pPr>
+            <a:r>
+              <a:rPr sz="930" b="0" i="0">
+                <a:solidFill>
+                  <a:srgbClr val="1A2332"/>
+                </a:solidFill>
+                <a:latin typeface="Calibri"/>
+              </a:rPr>
+              <a:t>C_dev, C_smooth expand exactly (quadratic in bits); C_crit uses a soft penalty for the MVP; storage bounds never bind → dropped (0 extra qubits).</a:t>
+            </a:r>
+          </a:p>
+        </p:txBody>
+      </p:sp>
+      <p:sp>
+        <p:nvSpPr>
+          <p:cNvPr id="11" name="Rounded Rectangle 10"/>
+          <p:cNvSpPr/>
+          <p:nvPr/>
+        </p:nvSpPr>
+        <p:spPr>
+          <a:xfrm>
+            <a:off x="457200" y="2920000"/>
+            <a:ext cx="4550000" cy="870000"/>
+          </a:xfrm>
+          <a:prstGeom prst="roundRect">
+            <a:avLst>
+              <a:gd name="adj" fmla="val 6000"/>
+            </a:avLst>
+          </a:prstGeom>
+          <a:solidFill>
+            <a:srgbClr val="FFFFFF"/>
+          </a:solidFill>
+          <a:ln w="9525">
+            <a:solidFill>
+              <a:srgbClr val="D0DCE8"/>
+            </a:solidFill>
+          </a:ln>
+          <a:effectLst/>
+        </p:spPr>
+        <p:style>
+          <a:lnRef idx="1">
+            <a:schemeClr val="accent1"/>
+          </a:lnRef>
+          <a:fillRef idx="3">
+            <a:schemeClr val="accent1"/>
+          </a:fillRef>
+          <a:effectRef idx="2">
+            <a:schemeClr val="accent1"/>
+          </a:effectRef>
+          <a:fontRef idx="minor">
+            <a:schemeClr val="lt1"/>
+          </a:fontRef>
+        </p:style>
+        <p:txBody>
+          <a:bodyPr rtlCol="0" anchor="ctr"/>
+          <a:lstStyle/>
+          <a:p>
+            <a:pPr algn="ctr"/>
+            <a:endParaRPr/>
+          </a:p>
+        </p:txBody>
+      </p:sp>
+      <p:sp>
+        <p:nvSpPr>
+          <p:cNvPr id="12" name="TextBox 11"/>
+          <p:cNvSpPr txBox="1"/>
+          <p:nvPr/>
+        </p:nvSpPr>
+        <p:spPr>
+          <a:xfrm>
+            <a:off x="607200" y="2990000"/>
+            <a:ext cx="4250000" cy="260000"/>
+          </a:xfrm>
+          <a:prstGeom prst="rect">
+            <a:avLst/>
+          </a:prstGeom>
+          <a:noFill/>
+        </p:spPr>
+        <p:txBody>
+          <a:bodyPr wrap="square" lIns="0" tIns="0" rIns="0" bIns="0" anchor="t">
+            <a:spAutoFit/>
+          </a:bodyPr>
+          <a:lstStyle/>
+          <a:p>
+            <a:pPr algn="l">
+              <a:spcAft>
+                <a:spcPts val="0"/>
+              </a:spcAft>
+            </a:pPr>
+            <a:r>
+              <a:rPr sz="1150" b="1" i="0">
+                <a:solidFill>
+                  <a:srgbClr val="1B3A6B"/>
+                </a:solidFill>
+                <a:latin typeface="Georgia"/>
+              </a:rPr>
+              <a:t>Balance constraint</a:t>
+            </a:r>
+          </a:p>
+        </p:txBody>
+      </p:sp>
+      <p:sp>
+        <p:nvSpPr>
+          <p:cNvPr id="13" name="TextBox 12"/>
+          <p:cNvSpPr txBox="1"/>
+          <p:nvPr/>
+        </p:nvSpPr>
+        <p:spPr>
+          <a:xfrm>
+            <a:off x="607200" y="3250000"/>
+            <a:ext cx="4250000" cy="500000"/>
+          </a:xfrm>
+          <a:prstGeom prst="rect">
+            <a:avLst/>
+          </a:prstGeom>
+          <a:noFill/>
+        </p:spPr>
+        <p:txBody>
+          <a:bodyPr wrap="square" lIns="0" tIns="0" rIns="0" bIns="0" anchor="t">
+            <a:spAutoFit/>
+          </a:bodyPr>
+          <a:lstStyle/>
+          <a:p>
+            <a:pPr algn="l">
+              <a:lnSpc>
+                <a:spcPct val="105000"/>
+              </a:lnSpc>
+              <a:spcAft>
+                <a:spcPts val="0"/>
+              </a:spcAft>
+            </a:pPr>
+            <a:r>
+              <a:rPr sz="930" b="0" i="0">
+                <a:solidFill>
+                  <a:srgbClr val="1A2332"/>
+                </a:solidFill>
+                <a:latin typeface="Calibri"/>
+              </a:rPr>
+              <a:t>1-slack exact encoding, only ≈log₂(0.8T) extra qubits — correct and nearly free vs. a biased soft penalty.</a:t>
+            </a:r>
+          </a:p>
+        </p:txBody>
+      </p:sp>
+      <p:sp>
+        <p:nvSpPr>
+          <p:cNvPr id="14" name="Rounded Rectangle 13"/>
+          <p:cNvSpPr/>
+          <p:nvPr/>
+        </p:nvSpPr>
+        <p:spPr>
+          <a:xfrm>
+            <a:off x="457200" y="3880000"/>
+            <a:ext cx="4550000" cy="870000"/>
+          </a:xfrm>
+          <a:prstGeom prst="roundRect">
+            <a:avLst>
+              <a:gd name="adj" fmla="val 6000"/>
+            </a:avLst>
+          </a:prstGeom>
+          <a:solidFill>
+            <a:srgbClr val="FFFFFF"/>
+          </a:solidFill>
+          <a:ln w="9525">
+            <a:solidFill>
+              <a:srgbClr val="D0DCE8"/>
+            </a:solidFill>
+          </a:ln>
+          <a:effectLst/>
+        </p:spPr>
+        <p:style>
+          <a:lnRef idx="1">
+            <a:schemeClr val="accent1"/>
+          </a:lnRef>
+          <a:fillRef idx="3">
+            <a:schemeClr val="accent1"/>
+          </a:fillRef>
+          <a:effectRef idx="2">
+            <a:schemeClr val="accent1"/>
+          </a:effectRef>
+          <a:fontRef idx="minor">
+            <a:schemeClr val="lt1"/>
+          </a:fontRef>
+        </p:style>
+        <p:txBody>
+          <a:bodyPr rtlCol="0" anchor="ctr"/>
+          <a:lstStyle/>
+          <a:p>
+            <a:pPr algn="ctr"/>
+            <a:endParaRPr/>
+          </a:p>
+        </p:txBody>
+      </p:sp>
+      <p:sp>
+        <p:nvSpPr>
+          <p:cNvPr id="15" name="TextBox 14"/>
+          <p:cNvSpPr txBox="1"/>
+          <p:nvPr/>
+        </p:nvSpPr>
+        <p:spPr>
+          <a:xfrm>
+            <a:off x="607200" y="3950000"/>
+            <a:ext cx="4250000" cy="260000"/>
+          </a:xfrm>
+          <a:prstGeom prst="rect">
+            <a:avLst/>
+          </a:prstGeom>
+          <a:noFill/>
+        </p:spPr>
+        <p:txBody>
+          <a:bodyPr wrap="square" lIns="0" tIns="0" rIns="0" bIns="0" anchor="t">
+            <a:spAutoFit/>
+          </a:bodyPr>
+          <a:lstStyle/>
+          <a:p>
+            <a:pPr algn="l">
+              <a:spcAft>
+                <a:spcPts val="0"/>
+              </a:spcAft>
+            </a:pPr>
+            <a:r>
+              <a:rPr sz="1150" b="1" i="0">
+                <a:solidFill>
+                  <a:srgbClr val="1B3A6B"/>
+                </a:solidFill>
+                <a:latin typeface="Georgia"/>
+              </a:rPr>
+              <a:t>Pluggable encodings</a:t>
+            </a:r>
+          </a:p>
+        </p:txBody>
+      </p:sp>
+      <p:sp>
+        <p:nvSpPr>
+          <p:cNvPr id="16" name="TextBox 15"/>
+          <p:cNvSpPr txBox="1"/>
+          <p:nvPr/>
+        </p:nvSpPr>
+        <p:spPr>
+          <a:xfrm>
+            <a:off x="607200" y="4210000"/>
+            <a:ext cx="4250000" cy="500000"/>
+          </a:xfrm>
+          <a:prstGeom prst="rect">
+            <a:avLst/>
+          </a:prstGeom>
+          <a:noFill/>
+        </p:spPr>
+        <p:txBody>
+          <a:bodyPr wrap="square" lIns="0" tIns="0" rIns="0" bIns="0" anchor="t">
+            <a:spAutoFit/>
+          </a:bodyPr>
+          <a:lstStyle/>
+          <a:p>
+            <a:pPr algn="l">
+              <a:lnSpc>
+                <a:spcPct val="105000"/>
+              </a:lnSpc>
+              <a:spcAft>
+                <a:spcPts val="0"/>
+              </a:spcAft>
+            </a:pPr>
+            <a:r>
+              <a:rPr sz="930" b="0" i="0">
+                <a:solidFill>
+                  <a:srgbClr val="1A2332"/>
+                </a:solidFill>
+                <a:latin typeface="Calibri"/>
+              </a:rPr>
+              <a:t>One-hot / binary(log) / domain-wall are interchangeable — binary cuts T12/L3 from 36 → 24 qubits, fitting a 30-qubit statevector simulator.</a:t>
+            </a:r>
+          </a:p>
+        </p:txBody>
+      </p:sp>
+      <p:sp>
+        <p:nvSpPr>
+          <p:cNvPr id="17" name="Rounded Rectangle 16"/>
+          <p:cNvSpPr/>
+          <p:nvPr/>
+        </p:nvSpPr>
+        <p:spPr>
+          <a:xfrm>
+            <a:off x="5207200" y="1000000"/>
+            <a:ext cx="3479600" cy="2650000"/>
+          </a:xfrm>
+          <a:prstGeom prst="roundRect">
+            <a:avLst>
+              <a:gd name="adj" fmla="val 6000"/>
+            </a:avLst>
+          </a:prstGeom>
+          <a:solidFill>
+            <a:srgbClr val="FFFFFF"/>
+          </a:solidFill>
+          <a:ln w="9525">
+            <a:solidFill>
+              <a:srgbClr val="D0DCE8"/>
+            </a:solidFill>
+          </a:ln>
+          <a:effectLst/>
+        </p:spPr>
+        <p:style>
+          <a:lnRef idx="1">
+            <a:schemeClr val="accent1"/>
+          </a:lnRef>
+          <a:fillRef idx="3">
+            <a:schemeClr val="accent1"/>
+          </a:fillRef>
+          <a:effectRef idx="2">
+            <a:schemeClr val="accent1"/>
+          </a:effectRef>
+          <a:fontRef idx="minor">
+            <a:schemeClr val="lt1"/>
+          </a:fontRef>
+        </p:style>
+        <p:txBody>
+          <a:bodyPr rtlCol="0" anchor="ctr"/>
+          <a:lstStyle/>
+          <a:p>
+            <a:pPr algn="ctr"/>
+            <a:endParaRPr/>
+          </a:p>
+        </p:txBody>
+      </p:sp>
+      <p:pic>
+        <p:nvPicPr>
+          <p:cNvPr id="18" name="Picture 17" descr="qubit_budget.png"/>
+          <p:cNvPicPr>
+            <a:picLocks noChangeAspect="1"/>
+          </p:cNvPicPr>
+          <p:nvPr/>
+        </p:nvPicPr>
+        <p:blipFill>
+          <a:blip r:embed="rId2"/>
+          <a:stretch>
+            <a:fillRect/>
+          </a:stretch>
+        </p:blipFill>
+        <p:spPr>
+          <a:xfrm>
+            <a:off x="5267200" y="1397349"/>
+            <a:ext cx="3359600" cy="1855301"/>
+          </a:xfrm>
+          <a:prstGeom prst="rect">
+            <a:avLst/>
+          </a:prstGeom>
+        </p:spPr>
+      </p:pic>
+      <p:sp>
+        <p:nvSpPr>
+          <p:cNvPr id="19" name="Rounded Rectangle 18"/>
+          <p:cNvSpPr/>
+          <p:nvPr/>
+        </p:nvSpPr>
+        <p:spPr>
+          <a:xfrm>
+            <a:off x="5207200" y="3800000"/>
+            <a:ext cx="3479600" cy="1113500"/>
+          </a:xfrm>
+          <a:prstGeom prst="roundRect">
+            <a:avLst>
+              <a:gd name="adj" fmla="val 6000"/>
+            </a:avLst>
+          </a:prstGeom>
+          <a:solidFill>
+            <a:srgbClr val="FFF4F4"/>
+          </a:solidFill>
+          <a:ln w="9525">
+            <a:solidFill>
+              <a:srgbClr val="F0C7C0"/>
+            </a:solidFill>
+          </a:ln>
+          <a:effectLst/>
+        </p:spPr>
+        <p:style>
+          <a:lnRef idx="1">
+            <a:schemeClr val="accent1"/>
+          </a:lnRef>
+          <a:fillRef idx="3">
+            <a:schemeClr val="accent1"/>
+          </a:fillRef>
+          <a:effectRef idx="2">
+            <a:schemeClr val="accent1"/>
+          </a:effectRef>
+          <a:fontRef idx="minor">
+            <a:schemeClr val="lt1"/>
+          </a:fontRef>
+        </p:style>
+        <p:txBody>
+          <a:bodyPr rtlCol="0" anchor="ctr"/>
+          <a:lstStyle/>
+          <a:p>
+            <a:pPr algn="ctr"/>
+            <a:endParaRPr/>
+          </a:p>
+        </p:txBody>
+      </p:sp>
+      <p:sp>
+        <p:nvSpPr>
+          <p:cNvPr id="20" name="TextBox 19"/>
+          <p:cNvSpPr txBox="1"/>
+          <p:nvPr/>
+        </p:nvSpPr>
+        <p:spPr>
+          <a:xfrm>
+            <a:off x="5357200" y="3860000"/>
+            <a:ext cx="3179600" cy="1013500"/>
+          </a:xfrm>
+          <a:prstGeom prst="rect">
+            <a:avLst/>
+          </a:prstGeom>
+          <a:noFill/>
+        </p:spPr>
+        <p:txBody>
+          <a:bodyPr wrap="square" lIns="0" tIns="0" rIns="0" bIns="0" anchor="t">
+            <a:spAutoFit/>
+          </a:bodyPr>
+          <a:lstStyle/>
+          <a:p>
+            <a:pPr algn="l">
+              <a:lnSpc>
+                <a:spcPct val="105000"/>
+              </a:lnSpc>
+              <a:spcAft>
+                <a:spcPts val="0"/>
+              </a:spcAft>
+            </a:pPr>
+            <a:r>
+              <a:rPr sz="950" b="1" i="0">
+                <a:solidFill>
+                  <a:srgbClr val="C0392B"/>
+                </a:solidFill>
+                <a:latin typeface="Calibri"/>
+              </a:rPr>
+              <a:t>Key finding: </a:t>
+            </a:r>
+            <a:r>
+              <a:rPr sz="930" b="0" i="0">
+                <a:solidFill>
+                  <a:srgbClr val="1A2332"/>
+                </a:solidFill>
+                <a:latin typeface="Calibri"/>
+              </a:rPr>
+              <a:t>official Smin = 822.18 Mm³ (not the team’s earlier 162.2 Mm³ preliminary) puts the 6-year drought-regime reservoir below threshold all year — C_crit ≠ 0, making optimization genuinely non-trivial, especially at L ≥ 5.</a:t>
+            </a:r>
+          </a:p>
+        </p:txBody>
+      </p:sp>
+    </p:spTree>
+  </p:cSld>
+  <p:clrMapOvr>
+    <a:masterClrMapping/>
+  </p:clrMapOvr>
+</p:sld>
+</file>
+
+<file path=ppt/slides/slide11.xml><?xml version="1.0" encoding="utf-8"?>
+<p:sld xmlns:a="http://schemas.openxmlformats.org/drawingml/2006/main" xmlns:r="http://schemas.openxmlformats.org/officeDocument/2006/relationships" xmlns:p="http://schemas.openxmlformats.org/presentationml/2006/main">
+  <p:cSld>
+    <p:bg>
+      <p:bgPr>
+        <a:solidFill>
+          <a:srgbClr val="F7F9FC"/>
+        </a:solidFill>
+        <a:effectLst/>
+      </p:bgPr>
+    </p:bg>
+    <p:spTree>
+      <p:nvGrpSpPr>
+        <p:cNvPr id="1" name=""/>
+        <p:cNvGrpSpPr/>
+        <p:nvPr/>
+      </p:nvGrpSpPr>
+      <p:grpSpPr>
+        <a:xfrm>
+          <a:off x="0" y="0"/>
+          <a:ext cx="0" cy="0"/>
+          <a:chOff x="0" y="0"/>
+          <a:chExt cx="0" cy="0"/>
+        </a:xfrm>
+      </p:grpSpPr>
+      <p:sp>
+        <p:nvSpPr>
+          <p:cNvPr id="2" name="Rectangle 1"/>
+          <p:cNvSpPr/>
+          <p:nvPr/>
+        </p:nvSpPr>
+        <p:spPr>
+          <a:xfrm>
+            <a:off x="0" y="0"/>
+            <a:ext cx="9144000" cy="868680"/>
+          </a:xfrm>
+          <a:prstGeom prst="rect">
+            <a:avLst/>
+          </a:prstGeom>
+          <a:solidFill>
+            <a:srgbClr val="1B3A6B"/>
+          </a:solidFill>
+          <a:ln>
+            <a:noFill/>
+          </a:ln>
+          <a:effectLst/>
+        </p:spPr>
+        <p:style>
+          <a:lnRef idx="1">
+            <a:schemeClr val="accent1"/>
+          </a:lnRef>
+          <a:fillRef idx="3">
+            <a:schemeClr val="accent1"/>
+          </a:fillRef>
+          <a:effectRef idx="2">
+            <a:schemeClr val="accent1"/>
+          </a:effectRef>
+          <a:fontRef idx="minor">
+            <a:schemeClr val="lt1"/>
+          </a:fontRef>
+        </p:style>
+        <p:txBody>
+          <a:bodyPr rtlCol="0" anchor="ctr"/>
+          <a:lstStyle/>
+          <a:p>
+            <a:pPr algn="ctr"/>
+            <a:endParaRPr/>
+          </a:p>
+        </p:txBody>
+      </p:sp>
+      <p:sp>
+        <p:nvSpPr>
+          <p:cNvPr id="3" name="Rectangle 2"/>
+          <p:cNvSpPr/>
+          <p:nvPr/>
+        </p:nvSpPr>
+        <p:spPr>
+          <a:xfrm>
+            <a:off x="0" y="804672"/>
+            <a:ext cx="9144000" cy="64008"/>
+          </a:xfrm>
+          <a:prstGeom prst="rect">
+            <a:avLst/>
+          </a:prstGeom>
+          <a:solidFill>
+            <a:srgbClr val="2DC9A4"/>
+          </a:solidFill>
+          <a:ln>
+            <a:noFill/>
+          </a:ln>
+          <a:effectLst/>
+        </p:spPr>
+        <p:style>
+          <a:lnRef idx="1">
+            <a:schemeClr val="accent1"/>
+          </a:lnRef>
+          <a:fillRef idx="3">
+            <a:schemeClr val="accent1"/>
+          </a:fillRef>
+          <a:effectRef idx="2">
+            <a:schemeClr val="accent1"/>
+          </a:effectRef>
+          <a:fontRef idx="minor">
+            <a:schemeClr val="lt1"/>
+          </a:fontRef>
+        </p:style>
+        <p:txBody>
+          <a:bodyPr rtlCol="0" anchor="ctr"/>
+          <a:lstStyle/>
+          <a:p>
+            <a:pPr algn="ctr"/>
+            <a:endParaRPr/>
+          </a:p>
+        </p:txBody>
+      </p:sp>
+      <p:sp>
+        <p:nvSpPr>
+          <p:cNvPr id="4" name="TextBox 3"/>
+          <p:cNvSpPr txBox="1"/>
+          <p:nvPr/>
+        </p:nvSpPr>
+        <p:spPr>
+          <a:xfrm>
+            <a:off x="457200" y="0"/>
+            <a:ext cx="7800000" cy="868680"/>
+          </a:xfrm>
+          <a:prstGeom prst="rect">
+            <a:avLst/>
+          </a:prstGeom>
+          <a:noFill/>
+        </p:spPr>
+        <p:txBody>
+          <a:bodyPr wrap="square" lIns="0" tIns="0" rIns="0" bIns="0" anchor="ctr">
+            <a:spAutoFit/>
+          </a:bodyPr>
+          <a:lstStyle/>
+          <a:p>
+            <a:pPr algn="l">
+              <a:spcAft>
+                <a:spcPts val="0"/>
+              </a:spcAft>
+            </a:pPr>
+            <a:r>
+              <a:rPr sz="2200" b="1" i="0">
+                <a:solidFill>
+                  <a:srgbClr val="FFFFFF"/>
+                </a:solidFill>
+                <a:latin typeface="Georgia"/>
+              </a:rPr>
+              <a:t>Quantum Track — QAOA Results &amp; Roadmap</a:t>
+            </a:r>
+          </a:p>
+        </p:txBody>
+      </p:sp>
+      <p:graphicFrame>
+        <p:nvGraphicFramePr>
+          <p:cNvPr id="5" name="Table 4"/>
+          <p:cNvGraphicFramePr>
+            <a:graphicFrameLocks noGrp="1"/>
+          </p:cNvGraphicFramePr>
+          <p:nvPr/>
+        </p:nvGraphicFramePr>
+        <p:xfrm>
+          <a:off x="457200" y="1000000"/>
+          <a:ext cx="4550000" cy="2267872"/>
+        </p:xfrm>
+        <a:graphic>
+          <a:graphicData uri="http://schemas.openxmlformats.org/drawingml/2006/table">
+            <a:tbl>
+              <a:tblPr/>
+              <a:tblGrid>
+                <a:gridCol w="1350000">
+                  <a:extLst>
+                    <a:ext uri="{9D8B030D-6E8A-4147-A177-3AD203B41FA5}">
+                      <a16:colId xmlns:a16="http://schemas.microsoft.com/office/drawing/2014/main" val="20000"/>
+                    </a:ext>
+                  </a:extLst>
+                </a:gridCol>
+                <a:gridCol w="1350000">
+                  <a:extLst>
+                    <a:ext uri="{9D8B030D-6E8A-4147-A177-3AD203B41FA5}">
+                      <a16:colId xmlns:a16="http://schemas.microsoft.com/office/drawing/2014/main" val="20001"/>
+                    </a:ext>
+                  </a:extLst>
+                </a:gridCol>
+                <a:gridCol w="750000">
+                  <a:extLst>
+                    <a:ext uri="{9D8B030D-6E8A-4147-A177-3AD203B41FA5}">
+                      <a16:colId xmlns:a16="http://schemas.microsoft.com/office/drawing/2014/main" val="20002"/>
+                    </a:ext>
+                  </a:extLst>
+                </a:gridCol>
+                <a:gridCol w="1100000">
+                  <a:extLst>
+                    <a:ext uri="{9D8B030D-6E8A-4147-A177-3AD203B41FA5}">
+                      <a16:colId xmlns:a16="http://schemas.microsoft.com/office/drawing/2014/main" val="20003"/>
+                    </a:ext>
+                  </a:extLst>
+                </a:gridCol>
+              </a:tblGrid>
+              <a:tr h="512500">
+                <a:tc>
+                  <a:txBody>
+                    <a:bodyPr/>
+                    <a:lstStyle/>
+                    <a:p>
+                      <a:pPr algn="l"/>
+                      <a:r>
+                        <a:rPr sz="1000" b="1">
+                          <a:solidFill>
+                            <a:srgbClr val="FFFFFF"/>
+                          </a:solidFill>
+                          <a:latin typeface="Calibri"/>
+                        </a:rPr>
+                        <a:t>Instance</a:t>
+                      </a:r>
+                    </a:p>
+                  </a:txBody>
+                  <a:tcPr marL="45000" marR="45000" marT="20000" marB="20000" anchor="ctr">
+                    <a:solidFill>
+                      <a:srgbClr val="1B3A6B"/>
+                    </a:solidFill>
+                  </a:tcPr>
+                </a:tc>
+                <a:tc>
+                  <a:txBody>
+                    <a:bodyPr/>
+                    <a:lstStyle/>
+                    <a:p>
+                      <a:pPr algn="ctr"/>
+                      <a:r>
+                        <a:rPr sz="1000" b="1">
+                          <a:solidFill>
+                            <a:srgbClr val="FFFFFF"/>
+                          </a:solidFill>
+                          <a:latin typeface="Calibri"/>
+                        </a:rPr>
+                        <a:t>Encoding</a:t>
+                      </a:r>
+                    </a:p>
+                  </a:txBody>
+                  <a:tcPr marL="45000" marR="45000" marT="20000" marB="20000" anchor="ctr">
+                    <a:solidFill>
+                      <a:srgbClr val="1B3A6B"/>
+                    </a:solidFill>
+                  </a:tcPr>
+                </a:tc>
+                <a:tc>
+                  <a:txBody>
+                    <a:bodyPr/>
+                    <a:lstStyle/>
+                    <a:p>
+                      <a:pPr algn="ctr"/>
+                      <a:r>
+                        <a:rPr sz="1000" b="1">
+                          <a:solidFill>
+                            <a:srgbClr val="FFFFFF"/>
+                          </a:solidFill>
+                          <a:latin typeface="Calibri"/>
+                        </a:rPr>
+                        <a:t>Qubits</a:t>
+                      </a:r>
+                    </a:p>
+                  </a:txBody>
+                  <a:tcPr marL="45000" marR="45000" marT="20000" marB="20000" anchor="ctr">
+                    <a:solidFill>
+                      <a:srgbClr val="1B3A6B"/>
+                    </a:solidFill>
+                  </a:tcPr>
+                </a:tc>
+                <a:tc>
+                  <a:txBody>
+                    <a:bodyPr/>
+                    <a:lstStyle/>
+                    <a:p>
+                      <a:pPr algn="ctr"/>
+                      <a:r>
+                        <a:rPr sz="1000" b="1">
+                          <a:solidFill>
+                            <a:srgbClr val="FFFFFF"/>
+                          </a:solidFill>
+                          <a:latin typeface="Calibri"/>
+                        </a:rPr>
+                        <a:t>Status</a:t>
+                      </a:r>
+                    </a:p>
+                  </a:txBody>
+                  <a:tcPr marL="45000" marR="45000" marT="20000" marB="20000" anchor="ctr">
+                    <a:solidFill>
+                      <a:srgbClr val="1B3A6B"/>
+                    </a:solidFill>
+                  </a:tcPr>
+                </a:tc>
+                <a:extLst>
+                  <a:ext uri="{0D108BD9-81ED-4DB2-BD59-A6C34878D82A}">
+                    <a16:rowId xmlns:a16="http://schemas.microsoft.com/office/drawing/2014/main" val="10000"/>
+                  </a:ext>
+                </a:extLst>
+              </a:tr>
+              <a:tr h="512500">
+                <a:tc>
+                  <a:txBody>
+                    <a:bodyPr/>
+                    <a:lstStyle/>
+                    <a:p>
+                      <a:pPr algn="l"/>
+                      <a:r>
+                        <a:rPr sz="930" b="0">
+                          <a:solidFill>
+                            <a:srgbClr val="1A2332"/>
+                          </a:solidFill>
+                          <a:latin typeface="Calibri"/>
+                        </a:rPr>
+                        <a:t>Debug  T5/L3</a:t>
+                      </a:r>
+                    </a:p>
+                  </a:txBody>
+                  <a:tcPr marL="45000" marR="45000" marT="20000" marB="20000" anchor="ctr">
+                    <a:solidFill>
+                      <a:srgbClr val="FFFFFF"/>
+                    </a:solidFill>
+                  </a:tcPr>
+                </a:tc>
+                <a:tc>
+                  <a:txBody>
+                    <a:bodyPr/>
+                    <a:lstStyle/>
+                    <a:p>
+                      <a:pPr algn="ctr"/>
+                      <a:r>
+                        <a:rPr sz="930" b="0">
+                          <a:solidFill>
+                            <a:srgbClr val="1A2332"/>
+                          </a:solidFill>
+                          <a:latin typeface="Calibri"/>
+                        </a:rPr>
+                        <a:t>one-hot</a:t>
+                      </a:r>
+                    </a:p>
+                  </a:txBody>
+                  <a:tcPr marL="45000" marR="45000" marT="20000" marB="20000" anchor="ctr">
+                    <a:solidFill>
+                      <a:srgbClr val="FFFFFF"/>
+                    </a:solidFill>
+                  </a:tcPr>
+                </a:tc>
+                <a:tc>
+                  <a:txBody>
+                    <a:bodyPr/>
+                    <a:lstStyle/>
+                    <a:p>
+                      <a:pPr algn="ctr"/>
+                      <a:r>
+                        <a:rPr sz="930" b="0">
+                          <a:solidFill>
+                            <a:srgbClr val="1A2332"/>
+                          </a:solidFill>
+                          <a:latin typeface="Calibri"/>
+                        </a:rPr>
+                        <a:t>17</a:t>
+                      </a:r>
+                    </a:p>
+                  </a:txBody>
+                  <a:tcPr marL="45000" marR="45000" marT="20000" marB="20000" anchor="ctr">
+                    <a:solidFill>
+                      <a:srgbClr val="FFFFFF"/>
+                    </a:solidFill>
+                  </a:tcPr>
+                </a:tc>
+                <a:tc>
+                  <a:txBody>
+                    <a:bodyPr/>
+                    <a:lstStyle/>
+                    <a:p>
+                      <a:pPr algn="ctr"/>
+                      <a:r>
+                        <a:rPr sz="930" b="0">
+                          <a:solidFill>
+                            <a:srgbClr val="1A2332"/>
+                          </a:solidFill>
+                          <a:latin typeface="Calibri"/>
+                        </a:rPr>
+                        <a:t>AR = 1.000</a:t>
+                      </a:r>
+                    </a:p>
+                    <a:p>
+                      <a:r>
+                        <a:t>exact ✓</a:t>
+                      </a:r>
+                    </a:p>
+                  </a:txBody>
+                  <a:tcPr marL="45000" marR="45000" marT="20000" marB="20000" anchor="ctr">
+                    <a:solidFill>
+                      <a:srgbClr val="FFFFFF"/>
+                    </a:solidFill>
+                  </a:tcPr>
+                </a:tc>
+                <a:extLst>
+                  <a:ext uri="{0D108BD9-81ED-4DB2-BD59-A6C34878D82A}">
+                    <a16:rowId xmlns:a16="http://schemas.microsoft.com/office/drawing/2014/main" val="10001"/>
+                  </a:ext>
+                </a:extLst>
+              </a:tr>
+              <a:tr h="512500">
+                <a:tc>
+                  <a:txBody>
+                    <a:bodyPr/>
+                    <a:lstStyle/>
+                    <a:p>
+                      <a:pPr algn="l"/>
+                      <a:r>
+                        <a:rPr sz="930" b="0">
+                          <a:solidFill>
+                            <a:srgbClr val="1A2332"/>
+                          </a:solidFill>
+                          <a:latin typeface="Calibri"/>
+                        </a:rPr>
+                        <a:t>Small  T12/L3</a:t>
+                      </a:r>
+                    </a:p>
+                  </a:txBody>
+                  <a:tcPr marL="45000" marR="45000" marT="20000" marB="20000" anchor="ctr">
+                    <a:solidFill>
+                      <a:srgbClr val="FFFFFF"/>
+                    </a:solidFill>
+                  </a:tcPr>
+                </a:tc>
+                <a:tc>
+                  <a:txBody>
+                    <a:bodyPr/>
+                    <a:lstStyle/>
+                    <a:p>
+                      <a:pPr algn="ctr"/>
+                      <a:r>
+                        <a:rPr sz="930" b="0">
+                          <a:solidFill>
+                            <a:srgbClr val="1A2332"/>
+                          </a:solidFill>
+                          <a:latin typeface="Calibri"/>
+                        </a:rPr>
+                        <a:t>binary</a:t>
+                      </a:r>
+                    </a:p>
+                  </a:txBody>
+                  <a:tcPr marL="45000" marR="45000" marT="20000" marB="20000" anchor="ctr">
+                    <a:solidFill>
+                      <a:srgbClr val="FFFFFF"/>
+                    </a:solidFill>
+                  </a:tcPr>
+                </a:tc>
+                <a:tc>
+                  <a:txBody>
+                    <a:bodyPr/>
+                    <a:lstStyle/>
+                    <a:p>
+                      <a:pPr algn="ctr"/>
+                      <a:r>
+                        <a:rPr sz="930" b="0">
+                          <a:solidFill>
+                            <a:srgbClr val="1A2332"/>
+                          </a:solidFill>
+                          <a:latin typeface="Calibri"/>
+                        </a:rPr>
+                        <a:t>24</a:t>
+                      </a:r>
+                    </a:p>
+                  </a:txBody>
+                  <a:tcPr marL="45000" marR="45000" marT="20000" marB="20000" anchor="ctr">
+                    <a:solidFill>
+                      <a:srgbClr val="FFFFFF"/>
+                    </a:solidFill>
+                  </a:tcPr>
+                </a:tc>
+                <a:tc>
+                  <a:txBody>
+                    <a:bodyPr/>
+                    <a:lstStyle/>
+                    <a:p>
+                      <a:pPr algn="ctr"/>
+                      <a:r>
+                        <a:rPr sz="930" b="0">
+                          <a:solidFill>
+                            <a:srgbClr val="1A2332"/>
+                          </a:solidFill>
+                          <a:latin typeface="Calibri"/>
+                        </a:rPr>
+                        <a:t>AR = 1.31</a:t>
+                      </a:r>
+                    </a:p>
+                    <a:p>
+                      <a:r>
+                        <a:t>feasible ✓</a:t>
+                      </a:r>
+                    </a:p>
+                  </a:txBody>
+                  <a:tcPr marL="45000" marR="45000" marT="20000" marB="20000" anchor="ctr">
+                    <a:solidFill>
+                      <a:srgbClr val="FFFFFF"/>
+                    </a:solidFill>
+                  </a:tcPr>
+                </a:tc>
+                <a:extLst>
+                  <a:ext uri="{0D108BD9-81ED-4DB2-BD59-A6C34878D82A}">
+                    <a16:rowId xmlns:a16="http://schemas.microsoft.com/office/drawing/2014/main" val="10002"/>
+                  </a:ext>
+                </a:extLst>
+              </a:tr>
+              <a:tr h="512500">
+                <a:tc>
+                  <a:txBody>
+                    <a:bodyPr/>
+                    <a:lstStyle/>
+                    <a:p>
+                      <a:pPr algn="l"/>
+                      <a:r>
+                        <a:rPr sz="930" b="0">
+                          <a:solidFill>
+                            <a:srgbClr val="1A2332"/>
+                          </a:solidFill>
+                          <a:latin typeface="Calibri"/>
+                        </a:rPr>
+                        <a:t>Medium  T26/L5</a:t>
+                      </a:r>
+                    </a:p>
+                    <a:p>
+                      <a:r>
+                        <a:t>(chunked, 5-wk blk.)</a:t>
+                      </a:r>
+                    </a:p>
+                  </a:txBody>
+                  <a:tcPr marL="45000" marR="45000" marT="20000" marB="20000" anchor="ctr">
+                    <a:solidFill>
+                      <a:srgbClr val="FFFFFF"/>
+                    </a:solidFill>
+                  </a:tcPr>
+                </a:tc>
+                <a:tc>
+                  <a:txBody>
+                    <a:bodyPr/>
+                    <a:lstStyle/>
+                    <a:p>
+                      <a:pPr algn="ctr"/>
+                      <a:r>
+                        <a:rPr sz="930" b="0">
+                          <a:solidFill>
+                            <a:srgbClr val="1A2332"/>
+                          </a:solidFill>
+                          <a:latin typeface="Calibri"/>
+                        </a:rPr>
+                        <a:t>domain-wall</a:t>
+                      </a:r>
+                    </a:p>
+                  </a:txBody>
+                  <a:tcPr marL="45000" marR="45000" marT="20000" marB="20000" anchor="ctr">
+                    <a:solidFill>
+                      <a:srgbClr val="FFFFFF"/>
+                    </a:solidFill>
+                  </a:tcPr>
+                </a:tc>
+                <a:tc>
+                  <a:txBody>
+                    <a:bodyPr/>
+                    <a:lstStyle/>
+                    <a:p>
+                      <a:pPr algn="ctr"/>
+                      <a:r>
+                        <a:rPr sz="930" b="0">
+                          <a:solidFill>
+                            <a:srgbClr val="1A2332"/>
+                          </a:solidFill>
+                          <a:latin typeface="Calibri"/>
+                        </a:rPr>
+                        <a:t>25/blk</a:t>
+                      </a:r>
+                    </a:p>
+                  </a:txBody>
+                  <a:tcPr marL="45000" marR="45000" marT="20000" marB="20000" anchor="ctr">
+                    <a:solidFill>
+                      <a:srgbClr val="FFFFFF"/>
+                    </a:solidFill>
+                  </a:tcPr>
+                </a:tc>
+                <a:tc>
+                  <a:txBody>
+                    <a:bodyPr/>
+                    <a:lstStyle/>
+                    <a:p>
+                      <a:pPr algn="ctr"/>
+                      <a:r>
+                        <a:rPr sz="930" b="0">
+                          <a:solidFill>
+                            <a:srgbClr val="1A2332"/>
+                          </a:solidFill>
+                          <a:latin typeface="Calibri"/>
+                        </a:rPr>
+                        <a:t>SRS −.3563</a:t>
+                      </a:r>
+                    </a:p>
+                    <a:p>
+                      <a:r>
+                        <a:rPr b="1">
+                          <a:solidFill>
+                            <a:srgbClr val="C0392B"/>
+                          </a:solidFill>
+                        </a:rPr>
+                        <a:t>4/6 feasible ✗</a:t>
+                      </a:r>
+                    </a:p>
+                  </a:txBody>
+                  <a:tcPr marL="45000" marR="45000" marT="20000" marB="20000" anchor="ctr">
+                    <a:solidFill>
+                      <a:srgbClr val="FFFFFF"/>
+                    </a:solidFill>
+                  </a:tcPr>
+                </a:tc>
+                <a:extLst>
+                  <a:ext uri="{0D108BD9-81ED-4DB2-BD59-A6C34878D82A}">
+                    <a16:rowId xmlns:a16="http://schemas.microsoft.com/office/drawing/2014/main" val="10003"/>
+                  </a:ext>
+                </a:extLst>
+              </a:tr>
+            </a:tbl>
+          </a:graphicData>
+        </a:graphic>
+      </p:graphicFrame>
+      <p:sp>
+        <p:nvSpPr>
+          <p:cNvPr id="6" name="Rounded Rectangle 5"/>
+          <p:cNvSpPr/>
+          <p:nvPr/>
+        </p:nvSpPr>
+        <p:spPr>
+          <a:xfrm>
+            <a:off x="457200" y="3200000"/>
+            <a:ext cx="4550000" cy="1713500"/>
+          </a:xfrm>
+          <a:prstGeom prst="roundRect">
+            <a:avLst>
+              <a:gd name="adj" fmla="val 6000"/>
+            </a:avLst>
+          </a:prstGeom>
+          <a:solidFill>
+            <a:srgbClr val="FFFFFF"/>
+          </a:solidFill>
+          <a:ln w="9525">
+            <a:solidFill>
+              <a:srgbClr val="D0DCE8"/>
+            </a:solidFill>
+          </a:ln>
+          <a:effectLst/>
+        </p:spPr>
+        <p:style>
+          <a:lnRef idx="1">
+            <a:schemeClr val="accent1"/>
+          </a:lnRef>
+          <a:fillRef idx="3">
+            <a:schemeClr val="accent1"/>
+          </a:fillRef>
+          <a:effectRef idx="2">
+            <a:schemeClr val="accent1"/>
+          </a:effectRef>
+          <a:fontRef idx="minor">
+            <a:schemeClr val="lt1"/>
+          </a:fontRef>
+        </p:style>
+        <p:txBody>
+          <a:bodyPr rtlCol="0" anchor="ctr"/>
+          <a:lstStyle/>
+          <a:p>
+            <a:pPr algn="ctr"/>
+            <a:endParaRPr/>
+          </a:p>
+        </p:txBody>
+      </p:sp>
+      <p:sp>
+        <p:nvSpPr>
+          <p:cNvPr id="7" name="TextBox 6"/>
+          <p:cNvSpPr txBox="1"/>
+          <p:nvPr/>
+        </p:nvSpPr>
+        <p:spPr>
+          <a:xfrm>
+            <a:off x="607200" y="3270000"/>
+            <a:ext cx="4250000" cy="1593500"/>
+          </a:xfrm>
+          <a:prstGeom prst="rect">
+            <a:avLst/>
+          </a:prstGeom>
+          <a:noFill/>
+        </p:spPr>
+        <p:txBody>
+          <a:bodyPr wrap="square" lIns="0" tIns="0" rIns="0" bIns="0" anchor="t">
+            <a:spAutoFit/>
+          </a:bodyPr>
+          <a:lstStyle/>
+          <a:p>
+            <a:pPr algn="l">
+              <a:lnSpc>
+                <a:spcPct val="112000"/>
+              </a:lnSpc>
+              <a:spcAft>
+                <a:spcPts val="300"/>
+              </a:spcAft>
+            </a:pPr>
+            <a:r>
+              <a:rPr sz="960" b="1" i="0">
+                <a:solidFill>
+                  <a:srgbClr val="1B3A6B"/>
+                </a:solidFill>
+                <a:latin typeface="Calibri"/>
+              </a:rPr>
+              <a:t>Gap vs. full DP (0.066 total):  </a:t>
+            </a:r>
+          </a:p>
+          <a:p>
+            <a:pPr algn="l">
+              <a:lnSpc>
+                <a:spcPct val="112000"/>
+              </a:lnSpc>
+              <a:spcAft>
+                <a:spcPts val="300"/>
+              </a:spcAft>
+            </a:pPr>
+            <a:r>
+              <a:rPr sz="930" b="0" i="0">
+                <a:solidFill>
+                  <a:srgbClr val="1A2332"/>
+                </a:solidFill>
+                <a:latin typeface="Calibri"/>
+              </a:rPr>
+              <a:t>• 0.021 from temporal chunking (blocks can’t redistribute across boundaries)</a:t>
+            </a:r>
+          </a:p>
+          <a:p>
+            <a:pPr algn="l">
+              <a:lnSpc>
+                <a:spcPct val="112000"/>
+              </a:lnSpc>
+              <a:spcAft>
+                <a:spcPts val="300"/>
+              </a:spcAft>
+            </a:pPr>
+            <a:r>
+              <a:rPr sz="930" b="0" i="0">
+                <a:solidFill>
+                  <a:srgbClr val="1A2332"/>
+                </a:solidFill>
+                <a:latin typeface="Calibri"/>
+              </a:rPr>
+              <a:t>• 0.045 from QAOA itself (p = 1 depth, soft per-block balance)</a:t>
+            </a:r>
+          </a:p>
+          <a:p>
+            <a:pPr algn="l">
+              <a:lnSpc>
+                <a:spcPct val="112000"/>
+              </a:lnSpc>
+              <a:spcAft>
+                <a:spcPts val="300"/>
+              </a:spcAft>
+            </a:pPr>
+            <a:r>
+              <a:rPr sz="960" b="1" i="0">
+                <a:solidFill>
+                  <a:srgbClr val="1B3A6B"/>
+                </a:solidFill>
+                <a:latin typeface="Calibri"/>
+              </a:rPr>
+              <a:t>IBM Qiskit Runtime plan: </a:t>
+            </a:r>
+          </a:p>
+          <a:p>
+            <a:pPr algn="l">
+              <a:lnSpc>
+                <a:spcPct val="112000"/>
+              </a:lnSpc>
+              <a:spcAft>
+                <a:spcPts val="300"/>
+              </a:spcAft>
+            </a:pPr>
+            <a:r>
+              <a:rPr sz="930" b="0" i="0">
+                <a:solidFill>
+                  <a:srgbClr val="1A2332"/>
+                </a:solidFill>
+                <a:latin typeface="Calibri"/>
+              </a:rPr>
+              <a:t>domain-wall, 4 qubits/week, 7-week blocks (28q ≤ 30q budget), T=26 split 7+7+7+5.</a:t>
+            </a:r>
+          </a:p>
+        </p:txBody>
+      </p:sp>
+      <p:sp>
+        <p:nvSpPr>
+          <p:cNvPr id="8" name="Rounded Rectangle 7"/>
+          <p:cNvSpPr/>
+          <p:nvPr/>
+        </p:nvSpPr>
+        <p:spPr>
+          <a:xfrm>
+            <a:off x="5207200" y="1000000"/>
+            <a:ext cx="3479600" cy="2900000"/>
+          </a:xfrm>
+          <a:prstGeom prst="roundRect">
+            <a:avLst>
+              <a:gd name="adj" fmla="val 6000"/>
+            </a:avLst>
+          </a:prstGeom>
+          <a:solidFill>
+            <a:srgbClr val="FFFFFF"/>
+          </a:solidFill>
+          <a:ln w="9525">
+            <a:solidFill>
+              <a:srgbClr val="D0DCE8"/>
+            </a:solidFill>
+          </a:ln>
+          <a:effectLst/>
+        </p:spPr>
+        <p:style>
+          <a:lnRef idx="1">
+            <a:schemeClr val="accent1"/>
+          </a:lnRef>
+          <a:fillRef idx="3">
+            <a:schemeClr val="accent1"/>
+          </a:fillRef>
+          <a:effectRef idx="2">
+            <a:schemeClr val="accent1"/>
+          </a:effectRef>
+          <a:fontRef idx="minor">
+            <a:schemeClr val="lt1"/>
+          </a:fontRef>
+        </p:style>
+        <p:txBody>
+          <a:bodyPr rtlCol="0" anchor="ctr"/>
+          <a:lstStyle/>
+          <a:p>
+            <a:pPr algn="ctr"/>
+            <a:endParaRPr/>
+          </a:p>
+        </p:txBody>
+      </p:sp>
+      <p:pic>
+        <p:nvPicPr>
+          <p:cNvPr id="9" name="Picture 8" descr="quantum_srs_comparison.png"/>
+          <p:cNvPicPr>
+            <a:picLocks noChangeAspect="1"/>
+          </p:cNvPicPr>
+          <p:nvPr/>
+        </p:nvPicPr>
+        <p:blipFill>
+          <a:blip r:embed="rId2"/>
+          <a:stretch>
+            <a:fillRect/>
+          </a:stretch>
+        </p:blipFill>
+        <p:spPr>
+          <a:xfrm>
+            <a:off x="5267200" y="1522349"/>
+            <a:ext cx="3359600" cy="1855301"/>
+          </a:xfrm>
+          <a:prstGeom prst="rect">
+            <a:avLst/>
+          </a:prstGeom>
+        </p:spPr>
+      </p:pic>
+      <p:sp>
+        <p:nvSpPr>
+          <p:cNvPr id="10" name="Rounded Rectangle 9"/>
+          <p:cNvSpPr/>
+          <p:nvPr/>
+        </p:nvSpPr>
+        <p:spPr>
+          <a:xfrm>
+            <a:off x="5207200" y="4050000"/>
+            <a:ext cx="3479600" cy="863500"/>
+          </a:xfrm>
+          <a:prstGeom prst="roundRect">
+            <a:avLst>
+              <a:gd name="adj" fmla="val 6000"/>
+            </a:avLst>
+          </a:prstGeom>
+          <a:solidFill>
+            <a:srgbClr val="F0FBF8"/>
+          </a:solidFill>
+          <a:ln w="9525">
+            <a:solidFill>
+              <a:srgbClr val="BFE9DC"/>
+            </a:solidFill>
+          </a:ln>
+          <a:effectLst/>
+        </p:spPr>
+        <p:style>
+          <a:lnRef idx="1">
+            <a:schemeClr val="accent1"/>
+          </a:lnRef>
+          <a:fillRef idx="3">
+            <a:schemeClr val="accent1"/>
+          </a:fillRef>
+          <a:effectRef idx="2">
+            <a:schemeClr val="accent1"/>
+          </a:effectRef>
+          <a:fontRef idx="minor">
+            <a:schemeClr val="lt1"/>
+          </a:fontRef>
+        </p:style>
+        <p:txBody>
+          <a:bodyPr rtlCol="0" anchor="ctr"/>
+          <a:lstStyle/>
+          <a:p>
+            <a:pPr algn="ctr"/>
+            <a:endParaRPr/>
+          </a:p>
+        </p:txBody>
+      </p:sp>
+      <p:sp>
+        <p:nvSpPr>
+          <p:cNvPr id="11" name="TextBox 10"/>
+          <p:cNvSpPr txBox="1"/>
+          <p:nvPr/>
+        </p:nvSpPr>
+        <p:spPr>
+          <a:xfrm>
+            <a:off x="5347200" y="4105000"/>
+            <a:ext cx="3199600" cy="763500"/>
+          </a:xfrm>
+          <a:prstGeom prst="rect">
+            <a:avLst/>
+          </a:prstGeom>
+          <a:noFill/>
+        </p:spPr>
+        <p:txBody>
+          <a:bodyPr wrap="square" lIns="0" tIns="0" rIns="0" bIns="0" anchor="t">
+            <a:spAutoFit/>
+          </a:bodyPr>
+          <a:lstStyle/>
+          <a:p>
+            <a:pPr algn="l">
+              <a:lnSpc>
+                <a:spcPct val="105000"/>
+              </a:lnSpc>
+              <a:spcAft>
+                <a:spcPts val="0"/>
+              </a:spcAft>
+            </a:pPr>
+            <a:r>
+              <a:rPr sz="940" b="1" i="0">
+                <a:solidFill>
+                  <a:srgbClr val="0E7C7B"/>
+                </a:solidFill>
+                <a:latin typeface="Calibri"/>
+              </a:rPr>
+              <a:t>Honest conclusion: </a:t>
+            </a:r>
+            <a:r>
+              <a:rPr sz="919" b="0" i="0">
+                <a:solidFill>
+                  <a:srgbClr val="1A2332"/>
+                </a:solidFill>
+                <a:latin typeface="Calibri"/>
+              </a:rPr>
+              <a:t>no quantum advantage yet on this benchmark. Next: XY-mixer (drop one-hot penalty), deeper QAOA (p&gt;1, INTERP init), hard per-block balance.</a:t>
+            </a:r>
+          </a:p>
+        </p:txBody>
+      </p:sp>
+    </p:spTree>
+  </p:cSld>
+  <p:clrMapOvr>
+    <a:masterClrMapping/>
+  </p:clrMapOvr>
+</p:sld>
+</file>
+
+<file path=ppt/slides/slide12.xml><?xml version="1.0" encoding="utf-8"?>
+<p:sld xmlns:a="http://schemas.openxmlformats.org/drawingml/2006/main" xmlns:r="http://schemas.openxmlformats.org/officeDocument/2006/relationships" xmlns:p="http://schemas.openxmlformats.org/presentationml/2006/main">
+  <p:cSld name="Slide 7">
+    <p:bg>
+      <p:bgPr>
+        <a:solidFill>
+          <a:srgbClr val="0A1628"/>
+        </a:solidFill>
+        <a:effectLst/>
+      </p:bgPr>
+    </p:bg>
+    <p:spTree>
+      <p:nvGrpSpPr>
+        <p:cNvPr id="1" name=""/>
+        <p:cNvGrpSpPr/>
+        <p:nvPr/>
+      </p:nvGrpSpPr>
+      <p:grpSpPr>
+        <a:xfrm>
+          <a:off x="0" y="0"/>
+          <a:ext cx="0" cy="0"/>
+          <a:chOff x="0" y="0"/>
+          <a:chExt cx="0" cy="0"/>
+        </a:xfrm>
+      </p:grpSpPr>
+      <p:sp>
+        <p:nvSpPr>
+          <p:cNvPr id="2" name="Shape 0"/>
+          <p:cNvSpPr/>
+          <p:nvPr/>
+        </p:nvSpPr>
+        <p:spPr>
+          <a:xfrm>
+            <a:off x="0" y="0"/>
+            <a:ext cx="9144000" cy="54864"/>
+          </a:xfrm>
+          <a:prstGeom prst="rect">
+            <a:avLst/>
+          </a:prstGeom>
+          <a:solidFill>
+            <a:srgbClr val="2DC9A4"/>
+          </a:solidFill>
+          <a:ln w="12700">
+            <a:solidFill>
+              <a:srgbClr val="2DC9A4"/>
+            </a:solidFill>
+            <a:prstDash val="solid"/>
+          </a:ln>
+        </p:spPr>
+        <p:txBody>
+          <a:bodyPr/>
+          <a:lstStyle/>
+          <a:p>
+            <a:endParaRPr lang="es-MX"/>
+          </a:p>
+        </p:txBody>
+      </p:sp>
+      <p:sp>
+        <p:nvSpPr>
+          <p:cNvPr id="3" name="Shape 1"/>
+          <p:cNvSpPr/>
+          <p:nvPr/>
+        </p:nvSpPr>
+        <p:spPr>
+          <a:xfrm>
+            <a:off x="0" y="109728"/>
+            <a:ext cx="9144000" cy="27432"/>
+          </a:xfrm>
+          <a:prstGeom prst="rect">
+            <a:avLst/>
+          </a:prstGeom>
+          <a:solidFill>
+            <a:srgbClr val="2E5FA3">
+              <a:alpha val="50000"/>
+            </a:srgbClr>
+          </a:solidFill>
+          <a:ln w="12700">
+            <a:solidFill>
+              <a:srgbClr val="2E5FA3"/>
+            </a:solidFill>
+            <a:prstDash val="solid"/>
+          </a:ln>
+        </p:spPr>
+        <p:txBody>
+          <a:bodyPr/>
+          <a:lstStyle/>
+          <a:p>
+            <a:endParaRPr lang="es-MX"/>
+          </a:p>
+        </p:txBody>
+      </p:sp>
+      <p:sp>
+        <p:nvSpPr>
+          <p:cNvPr id="4" name="Text 2"/>
+          <p:cNvSpPr/>
+          <p:nvPr/>
+        </p:nvSpPr>
+        <p:spPr>
+          <a:xfrm>
+            <a:off x="457200" y="256032"/>
+            <a:ext cx="8229600" cy="658368"/>
+          </a:xfrm>
+          <a:prstGeom prst="rect">
+            <a:avLst/>
+          </a:prstGeom>
+          <a:noFill/>
+          <a:ln/>
+        </p:spPr>
+        <p:txBody>
+          <a:bodyPr wrap="square" rtlCol="0" anchor="ctr"/>
+          <a:lstStyle/>
+          <a:p>
+            <a:pPr marL="0" indent="0">
+              <a:buNone/>
+            </a:pPr>
+            <a:r>
+              <a:rPr lang="en-US" sz="3600" b="1" dirty="0">
+                <a:solidFill>
+                  <a:srgbClr val="FFFFFF"/>
+                </a:solidFill>
+                <a:latin typeface="Georgia" pitchFamily="34" charset="0"/>
+                <a:ea typeface="Georgia" pitchFamily="34" charset="-122"/>
+                <a:cs typeface="Georgia" pitchFamily="34" charset="-120"/>
+              </a:rPr>
+              <a:t>Conclusions</a:t>
+            </a:r>
+            <a:endParaRPr lang="en-US" sz="3600" dirty="0"/>
+          </a:p>
+        </p:txBody>
+      </p:sp>
+      <p:sp>
+        <p:nvSpPr>
+          <p:cNvPr id="5" name="Shape 3"/>
+          <p:cNvSpPr/>
+          <p:nvPr/>
+        </p:nvSpPr>
+        <p:spPr>
+          <a:xfrm>
+            <a:off x="457200" y="987552"/>
+            <a:ext cx="8229600" cy="621792"/>
+          </a:xfrm>
+          <a:prstGeom prst="roundRect">
+            <a:avLst>
+              <a:gd name="adj" fmla="val 14706"/>
+            </a:avLst>
+          </a:prstGeom>
+          <a:solidFill>
+            <a:srgbClr val="2DC9A4">
+              <a:alpha val="15000"/>
+            </a:srgbClr>
+          </a:solidFill>
+          <a:ln w="19050">
+            <a:solidFill>
+              <a:srgbClr val="2DC9A4"/>
+            </a:solidFill>
+            <a:prstDash val="solid"/>
+          </a:ln>
+        </p:spPr>
+        <p:txBody>
+          <a:bodyPr/>
+          <a:lstStyle/>
+          <a:p>
+            <a:endParaRPr lang="es-MX"/>
+          </a:p>
+        </p:txBody>
+      </p:sp>
+      <p:sp>
+        <p:nvSpPr>
+          <p:cNvPr id="6" name="Text 4"/>
+          <p:cNvSpPr/>
+          <p:nvPr/>
+        </p:nvSpPr>
+        <p:spPr>
+          <a:xfrm>
+            <a:off x="594360" y="1024128"/>
+            <a:ext cx="7955280" cy="548640"/>
+          </a:xfrm>
+          <a:prstGeom prst="rect">
+            <a:avLst/>
+          </a:prstGeom>
+          <a:noFill/>
+          <a:ln/>
+        </p:spPr>
+        <p:txBody>
+          <a:bodyPr wrap="square" rtlCol="0" anchor="ctr"/>
+          <a:lstStyle/>
+          <a:p>
+            <a:pPr marL="0" indent="0" algn="ctr">
+              <a:buNone/>
+            </a:pPr>
+            <a:r>
+              <a:rPr lang="en-US" sz="1300" b="1" dirty="0">
+                <a:solidFill>
+                  <a:srgbClr val="FFFFFF"/>
+                </a:solidFill>
+                <a:latin typeface="Georgia" pitchFamily="34" charset="0"/>
+                <a:ea typeface="Georgia" pitchFamily="34" charset="-122"/>
+                <a:cs typeface="Georgia" pitchFamily="34" charset="-120"/>
+              </a:rPr>
+              <a:t>Best feasible result:  ΔSRS = +0.021111  (DP &amp; Threshold Rule)  —  6.78 % reduction in total penalized cost</a:t>
+            </a:r>
+            <a:endParaRPr lang="en-US" sz="1300" dirty="0"/>
+          </a:p>
+        </p:txBody>
+      </p:sp>
+      <p:sp>
+        <p:nvSpPr>
+          <p:cNvPr id="7" name="Shape 5"/>
+          <p:cNvSpPr/>
+          <p:nvPr/>
+        </p:nvSpPr>
+        <p:spPr>
+          <a:xfrm>
+            <a:off x="457200" y="1737360"/>
+            <a:ext cx="4114800" cy="1371600"/>
+          </a:xfrm>
+          <a:prstGeom prst="roundRect">
+            <a:avLst>
+              <a:gd name="adj" fmla="val 8000"/>
+            </a:avLst>
+          </a:prstGeom>
+          <a:solidFill>
+            <a:srgbClr val="0D2035"/>
+          </a:solidFill>
+          <a:ln w="19050">
+            <a:solidFill>
+              <a:srgbClr val="0E7C7B"/>
+            </a:solidFill>
+            <a:prstDash val="solid"/>
+          </a:ln>
+          <a:effectLst>
+            <a:outerShdw blurRad="76200" dist="25400" dir="2700000" algn="bl" rotWithShape="0">
+              <a:srgbClr val="000000">
+                <a:alpha val="10000"/>
+              </a:srgbClr>
+            </a:outerShdw>
+          </a:effectLst>
+        </p:spPr>
+        <p:txBody>
+          <a:bodyPr/>
+          <a:lstStyle/>
+          <a:p>
+            <a:endParaRPr lang="es-MX"/>
+          </a:p>
+        </p:txBody>
+      </p:sp>
+      <p:sp>
+        <p:nvSpPr>
+          <p:cNvPr id="8" name="Shape 6"/>
+          <p:cNvSpPr/>
+          <p:nvPr/>
+        </p:nvSpPr>
+        <p:spPr>
+          <a:xfrm>
+            <a:off x="457200" y="1737360"/>
+            <a:ext cx="54864" cy="1371600"/>
+          </a:xfrm>
+          <a:prstGeom prst="rect">
+            <a:avLst/>
+          </a:prstGeom>
+          <a:solidFill>
+            <a:srgbClr val="0E7C7B"/>
+          </a:solidFill>
+          <a:ln w="12700">
+            <a:solidFill>
+              <a:srgbClr val="0E7C7B"/>
+            </a:solidFill>
+            <a:prstDash val="solid"/>
+          </a:ln>
+        </p:spPr>
+        <p:txBody>
+          <a:bodyPr/>
+          <a:lstStyle/>
+          <a:p>
+            <a:endParaRPr lang="es-MX"/>
+          </a:p>
+        </p:txBody>
+      </p:sp>
+      <p:sp>
+        <p:nvSpPr>
+          <p:cNvPr id="9" name="Text 7"/>
+          <p:cNvSpPr/>
+          <p:nvPr/>
+        </p:nvSpPr>
+        <p:spPr>
+          <a:xfrm>
+            <a:off x="621792" y="1828800"/>
+            <a:ext cx="3749040" cy="292608"/>
+          </a:xfrm>
+          <a:prstGeom prst="rect">
+            <a:avLst/>
+          </a:prstGeom>
+          <a:noFill/>
+          <a:ln/>
+        </p:spPr>
+        <p:txBody>
+          <a:bodyPr wrap="square" rtlCol="0" anchor="ctr"/>
+          <a:lstStyle/>
+          <a:p>
+            <a:pPr marL="0" indent="0">
+              <a:buNone/>
+            </a:pPr>
+            <a:r>
+              <a:rPr lang="en-US" sz="1400" b="1" dirty="0">
+                <a:solidFill>
+                  <a:srgbClr val="0E7C7B"/>
+                </a:solidFill>
+                <a:latin typeface="Georgia" pitchFamily="34" charset="0"/>
+                <a:ea typeface="Georgia" pitchFamily="34" charset="-122"/>
+                <a:cs typeface="Georgia" pitchFamily="34" charset="-120"/>
+              </a:rPr>
+              <a:t>Problem Formulation</a:t>
+            </a:r>
+            <a:endParaRPr lang="en-US" sz="1400" dirty="0"/>
+          </a:p>
+        </p:txBody>
+      </p:sp>
+      <p:sp>
+        <p:nvSpPr>
+          <p:cNvPr id="10" name="Text 8"/>
+          <p:cNvSpPr/>
+          <p:nvPr/>
+        </p:nvSpPr>
+        <p:spPr>
+          <a:xfrm>
+            <a:off x="621792" y="2157984"/>
+            <a:ext cx="3749040" cy="914400"/>
+          </a:xfrm>
+          <a:prstGeom prst="rect">
+            <a:avLst/>
+          </a:prstGeom>
+          <a:noFill/>
+          <a:ln/>
+        </p:spPr>
+        <p:txBody>
+          <a:bodyPr wrap="square" rtlCol="0" anchor="ctr"/>
+          <a:lstStyle/>
+          <a:p>
+            <a:pPr marL="0" indent="0">
+              <a:buNone/>
+            </a:pPr>
+            <a:r>
+              <a:rPr lang="en-US" sz="1400" dirty="0">
+                <a:solidFill>
+                  <a:srgbClr val="CCDAE8"/>
+                </a:solidFill>
+                <a:latin typeface="Calibri" pitchFamily="34" charset="0"/>
+                <a:ea typeface="Calibri" pitchFamily="34" charset="-122"/>
+                <a:cs typeface="Calibri" pitchFamily="34" charset="-120"/>
+              </a:rPr>
+              <a:t>Reservoir scheduling encoded as discrete optimization over T=26 weeks × 5 levels. SRS metric with 3 penalty terms, 4 operational constraints verified.</a:t>
+            </a:r>
+            <a:endParaRPr lang="en-US" sz="1400" dirty="0"/>
+          </a:p>
+        </p:txBody>
+      </p:sp>
+      <p:sp>
+        <p:nvSpPr>
+          <p:cNvPr id="11" name="Shape 9"/>
+          <p:cNvSpPr/>
+          <p:nvPr/>
+        </p:nvSpPr>
+        <p:spPr>
+          <a:xfrm>
+            <a:off x="4846320" y="1737360"/>
+            <a:ext cx="4114800" cy="1371600"/>
+          </a:xfrm>
+          <a:prstGeom prst="roundRect">
+            <a:avLst>
+              <a:gd name="adj" fmla="val 8000"/>
+            </a:avLst>
+          </a:prstGeom>
+          <a:solidFill>
+            <a:srgbClr val="0D2035"/>
+          </a:solidFill>
+          <a:ln w="19050">
+            <a:solidFill>
+              <a:srgbClr val="4A90C4"/>
+            </a:solidFill>
+            <a:prstDash val="solid"/>
+          </a:ln>
+          <a:effectLst>
+            <a:outerShdw blurRad="76200" dist="25400" dir="2700000" algn="bl" rotWithShape="0">
+              <a:srgbClr val="000000">
+                <a:alpha val="10000"/>
+              </a:srgbClr>
+            </a:outerShdw>
+          </a:effectLst>
+        </p:spPr>
+        <p:txBody>
+          <a:bodyPr/>
+          <a:lstStyle/>
+          <a:p>
+            <a:endParaRPr lang="es-MX"/>
+          </a:p>
+        </p:txBody>
+      </p:sp>
+      <p:sp>
+        <p:nvSpPr>
+          <p:cNvPr id="12" name="Shape 10"/>
+          <p:cNvSpPr/>
+          <p:nvPr/>
+        </p:nvSpPr>
+        <p:spPr>
+          <a:xfrm>
+            <a:off x="4846320" y="1737360"/>
+            <a:ext cx="54864" cy="1371600"/>
+          </a:xfrm>
+          <a:prstGeom prst="rect">
+            <a:avLst/>
+          </a:prstGeom>
+          <a:solidFill>
+            <a:srgbClr val="4A90C4"/>
+          </a:solidFill>
+          <a:ln w="12700">
+            <a:solidFill>
+              <a:srgbClr val="4A90C4"/>
+            </a:solidFill>
+            <a:prstDash val="solid"/>
+          </a:ln>
+        </p:spPr>
+        <p:txBody>
+          <a:bodyPr/>
+          <a:lstStyle/>
+          <a:p>
+            <a:endParaRPr lang="es-MX"/>
+          </a:p>
+        </p:txBody>
+      </p:sp>
+      <p:sp>
+        <p:nvSpPr>
+          <p:cNvPr id="13" name="Text 11"/>
+          <p:cNvSpPr/>
+          <p:nvPr/>
+        </p:nvSpPr>
+        <p:spPr>
+          <a:xfrm>
+            <a:off x="5010912" y="1828800"/>
+            <a:ext cx="3749040" cy="292608"/>
+          </a:xfrm>
+          <a:prstGeom prst="rect">
+            <a:avLst/>
+          </a:prstGeom>
+          <a:noFill/>
+          <a:ln/>
+        </p:spPr>
+        <p:txBody>
+          <a:bodyPr wrap="square" rtlCol="0" anchor="ctr"/>
+          <a:lstStyle/>
+          <a:p>
+            <a:pPr marL="0" indent="0">
+              <a:buNone/>
+            </a:pPr>
+            <a:r>
+              <a:rPr lang="en-US" sz="1400" b="1" dirty="0">
+                <a:solidFill>
+                  <a:srgbClr val="4A90C4"/>
+                </a:solidFill>
+                <a:latin typeface="Georgia" pitchFamily="34" charset="0"/>
+                <a:ea typeface="Georgia" pitchFamily="34" charset="-122"/>
+                <a:cs typeface="Georgia" pitchFamily="34" charset="-120"/>
+              </a:rPr>
+              <a:t>Classical Optimum</a:t>
+            </a:r>
+            <a:endParaRPr lang="en-US" sz="1400" dirty="0"/>
+          </a:p>
+        </p:txBody>
+      </p:sp>
+      <p:sp>
+        <p:nvSpPr>
+          <p:cNvPr id="14" name="Text 12"/>
+          <p:cNvSpPr/>
+          <p:nvPr/>
+        </p:nvSpPr>
+        <p:spPr>
+          <a:xfrm>
+            <a:off x="5010912" y="2157984"/>
+            <a:ext cx="3749040" cy="914400"/>
+          </a:xfrm>
+          <a:prstGeom prst="rect">
+            <a:avLst/>
+          </a:prstGeom>
+          <a:noFill/>
+          <a:ln/>
+        </p:spPr>
+        <p:txBody>
+          <a:bodyPr wrap="square" rtlCol="0" anchor="ctr"/>
+          <a:lstStyle/>
+          <a:p>
+            <a:pPr marL="0" indent="0">
+              <a:buNone/>
+            </a:pPr>
+            <a:r>
+              <a:rPr lang="en-US" sz="1400" dirty="0">
+                <a:solidFill>
+                  <a:srgbClr val="CCDAE8"/>
+                </a:solidFill>
+                <a:latin typeface="Calibri" pitchFamily="34" charset="0"/>
+                <a:ea typeface="Calibri" pitchFamily="34" charset="-122"/>
+                <a:cs typeface="Calibri" pitchFamily="34" charset="-120"/>
+              </a:rPr>
+              <a:t>DP finds the exact optimal within the discrete level set: u* = −Δu for 11 weeks then 0. Runtime: 0.020 s. Formally verified by brute-force at T=12.</a:t>
+            </a:r>
+            <a:endParaRPr lang="en-US" sz="1400" dirty="0"/>
+          </a:p>
+        </p:txBody>
+      </p:sp>
+      <p:sp>
+        <p:nvSpPr>
+          <p:cNvPr id="15" name="Shape 13"/>
+          <p:cNvSpPr/>
+          <p:nvPr/>
+        </p:nvSpPr>
+        <p:spPr>
+          <a:xfrm>
+            <a:off x="457200" y="3246120"/>
+            <a:ext cx="4114800" cy="1371600"/>
+          </a:xfrm>
+          <a:prstGeom prst="roundRect">
+            <a:avLst>
+              <a:gd name="adj" fmla="val 8000"/>
+            </a:avLst>
+          </a:prstGeom>
+          <a:solidFill>
+            <a:srgbClr val="0D2035"/>
+          </a:solidFill>
+          <a:ln w="19050">
+            <a:solidFill>
+              <a:srgbClr val="2E5FA3"/>
+            </a:solidFill>
+            <a:prstDash val="solid"/>
+          </a:ln>
+          <a:effectLst>
+            <a:outerShdw blurRad="76200" dist="25400" dir="2700000" algn="bl" rotWithShape="0">
+              <a:srgbClr val="000000">
+                <a:alpha val="10000"/>
+              </a:srgbClr>
+            </a:outerShdw>
+          </a:effectLst>
+        </p:spPr>
+        <p:txBody>
+          <a:bodyPr/>
+          <a:lstStyle/>
+          <a:p>
+            <a:endParaRPr lang="es-MX"/>
+          </a:p>
+        </p:txBody>
+      </p:sp>
+      <p:sp>
+        <p:nvSpPr>
+          <p:cNvPr id="16" name="Shape 14"/>
+          <p:cNvSpPr/>
+          <p:nvPr/>
+        </p:nvSpPr>
+        <p:spPr>
+          <a:xfrm>
+            <a:off x="457200" y="3246120"/>
+            <a:ext cx="54864" cy="1371600"/>
+          </a:xfrm>
+          <a:prstGeom prst="rect">
+            <a:avLst/>
+          </a:prstGeom>
+          <a:solidFill>
+            <a:srgbClr val="2E5FA3"/>
+          </a:solidFill>
+          <a:ln w="12700">
+            <a:solidFill>
+              <a:srgbClr val="2E5FA3"/>
+            </a:solidFill>
+            <a:prstDash val="solid"/>
+          </a:ln>
+        </p:spPr>
+        <p:txBody>
+          <a:bodyPr/>
+          <a:lstStyle/>
+          <a:p>
+            <a:endParaRPr lang="es-MX"/>
+          </a:p>
+        </p:txBody>
+      </p:sp>
+      <p:sp>
+        <p:nvSpPr>
+          <p:cNvPr id="17" name="Text 15"/>
+          <p:cNvSpPr/>
+          <p:nvPr/>
+        </p:nvSpPr>
+        <p:spPr>
+          <a:xfrm>
+            <a:off x="621792" y="3337560"/>
+            <a:ext cx="3749040" cy="292608"/>
+          </a:xfrm>
+          <a:prstGeom prst="rect">
+            <a:avLst/>
+          </a:prstGeom>
+          <a:noFill/>
+          <a:ln/>
+        </p:spPr>
+        <p:txBody>
+          <a:bodyPr wrap="square" rtlCol="0" anchor="ctr"/>
+          <a:lstStyle/>
+          <a:p>
+            <a:pPr marL="0" indent="0">
+              <a:buNone/>
+            </a:pPr>
+            <a:r>
+              <a:rPr lang="en-US" sz="1400" b="1" dirty="0">
+                <a:solidFill>
+                  <a:srgbClr val="2E5FA3"/>
+                </a:solidFill>
+                <a:latin typeface="Georgia" pitchFamily="34" charset="0"/>
+                <a:ea typeface="Georgia" pitchFamily="34" charset="-122"/>
+                <a:cs typeface="Georgia" pitchFamily="34" charset="-120"/>
+              </a:rPr>
+              <a:t>Scalability</a:t>
+            </a:r>
+            <a:endParaRPr lang="en-US" sz="1400" dirty="0"/>
+          </a:p>
+        </p:txBody>
+      </p:sp>
+      <p:sp>
+        <p:nvSpPr>
+          <p:cNvPr id="18" name="Text 16"/>
+          <p:cNvSpPr/>
+          <p:nvPr/>
+        </p:nvSpPr>
+        <p:spPr>
+          <a:xfrm>
+            <a:off x="621792" y="3666744"/>
+            <a:ext cx="3749040" cy="914400"/>
+          </a:xfrm>
+          <a:prstGeom prst="rect">
+            <a:avLst/>
+          </a:prstGeom>
+          <a:noFill/>
+          <a:ln/>
+        </p:spPr>
+        <p:txBody>
+          <a:bodyPr wrap="square" rtlCol="0" anchor="ctr"/>
+          <a:lstStyle/>
+          <a:p>
+            <a:pPr marL="0" indent="0">
+              <a:buNone/>
+            </a:pPr>
+            <a:r>
+              <a:rPr lang="en-US" sz="1400" dirty="0">
+                <a:solidFill>
+                  <a:srgbClr val="CCDAE8"/>
+                </a:solidFill>
+                <a:latin typeface="Calibri" pitchFamily="34" charset="0"/>
+                <a:ea typeface="Calibri" pitchFamily="34" charset="-122"/>
+                <a:cs typeface="Calibri" pitchFamily="34" charset="-120"/>
+              </a:rPr>
+              <a:t>DP scales from 5²⁶ ≈ 10¹⁸ to 7⁵² ≈ 10⁴³ in &lt; 1.1 s. Search space grows exponentially; DP keeps runtime polynomial via cumulative-state reduction.</a:t>
+            </a:r>
+            <a:endParaRPr lang="en-US" sz="1400" dirty="0"/>
+          </a:p>
+        </p:txBody>
+      </p:sp>
+      <p:sp>
+        <p:nvSpPr>
+          <p:cNvPr id="19" name="Shape 17"/>
+          <p:cNvSpPr/>
+          <p:nvPr/>
+        </p:nvSpPr>
+        <p:spPr>
+          <a:xfrm>
+            <a:off x="4846320" y="3246120"/>
+            <a:ext cx="4114800" cy="1371600"/>
+          </a:xfrm>
+          <a:prstGeom prst="roundRect">
+            <a:avLst>
+              <a:gd name="adj" fmla="val 8000"/>
+            </a:avLst>
+          </a:prstGeom>
+          <a:solidFill>
+            <a:srgbClr val="0D2035"/>
+          </a:solidFill>
+          <a:ln w="19050">
+            <a:solidFill>
+              <a:srgbClr val="5B7FA6"/>
+            </a:solidFill>
+            <a:prstDash val="solid"/>
+          </a:ln>
+          <a:effectLst>
+            <a:outerShdw blurRad="76200" dist="25400" dir="2700000" algn="bl" rotWithShape="0">
+              <a:srgbClr val="000000">
+                <a:alpha val="10000"/>
+              </a:srgbClr>
+            </a:outerShdw>
+          </a:effectLst>
+        </p:spPr>
+        <p:txBody>
+          <a:bodyPr/>
+          <a:lstStyle/>
+          <a:p>
+            <a:endParaRPr lang="es-MX"/>
+          </a:p>
+        </p:txBody>
+      </p:sp>
+      <p:sp>
+        <p:nvSpPr>
+          <p:cNvPr id="20" name="Shape 18"/>
+          <p:cNvSpPr/>
+          <p:nvPr/>
+        </p:nvSpPr>
+        <p:spPr>
+          <a:xfrm>
+            <a:off x="4846320" y="3246120"/>
+            <a:ext cx="54864" cy="1371600"/>
+          </a:xfrm>
+          <a:prstGeom prst="rect">
+            <a:avLst/>
+          </a:prstGeom>
+          <a:solidFill>
+            <a:srgbClr val="5B7FA6"/>
+          </a:solidFill>
+          <a:ln w="12700">
+            <a:solidFill>
+              <a:srgbClr val="5B7FA6"/>
+            </a:solidFill>
+            <a:prstDash val="solid"/>
+          </a:ln>
+        </p:spPr>
+        <p:txBody>
+          <a:bodyPr/>
+          <a:lstStyle/>
+          <a:p>
+            <a:endParaRPr lang="es-MX"/>
+          </a:p>
+        </p:txBody>
+      </p:sp>
+      <p:sp>
+        <p:nvSpPr>
+          <p:cNvPr id="21" name="Text 19"/>
+          <p:cNvSpPr/>
+          <p:nvPr/>
+        </p:nvSpPr>
+        <p:spPr>
+          <a:xfrm>
+            <a:off x="5010912" y="3337560"/>
+            <a:ext cx="3749040" cy="292608"/>
+          </a:xfrm>
+          <a:prstGeom prst="rect">
+            <a:avLst/>
+          </a:prstGeom>
+          <a:noFill/>
+          <a:ln/>
+        </p:spPr>
+        <p:txBody>
+          <a:bodyPr wrap="square" rtlCol="0" anchor="ctr"/>
+          <a:lstStyle/>
+          <a:p>
+            <a:pPr marL="0" indent="0">
+              <a:buNone/>
+            </a:pPr>
+            <a:r>
+              <a:rPr lang="en-US" sz="1400" b="1" dirty="0">
+                <a:solidFill>
+                  <a:srgbClr val="5B7FA6"/>
+                </a:solidFill>
+                <a:latin typeface="Georgia" pitchFamily="34" charset="0"/>
+                <a:ea typeface="Georgia" pitchFamily="34" charset="-122"/>
+                <a:cs typeface="Georgia" pitchFamily="34" charset="-120"/>
+              </a:rPr>
+              <a:t>Limitations &amp; Next Steps</a:t>
+            </a:r>
+            <a:endParaRPr lang="en-US" sz="1400" dirty="0"/>
+          </a:p>
+        </p:txBody>
+      </p:sp>
+      <p:sp>
+        <p:nvSpPr>
+          <p:cNvPr id="22" name="Text 20"/>
+          <p:cNvSpPr/>
+          <p:nvPr/>
+        </p:nvSpPr>
+        <p:spPr>
+          <a:xfrm>
+            <a:off x="5010912" y="3632278"/>
+            <a:ext cx="3749040" cy="914400"/>
+          </a:xfrm>
+          <a:prstGeom prst="rect">
+            <a:avLst/>
+          </a:prstGeom>
+          <a:noFill/>
+          <a:ln/>
+        </p:spPr>
+        <p:txBody>
+          <a:bodyPr wrap="square" rtlCol="0" anchor="ctr"/>
+          <a:lstStyle/>
+          <a:p>
+            <a:pPr marL="0" indent="0">
+              <a:buNone/>
+            </a:pPr>
+            <a:r>
+              <a:rPr lang="en-US" sz="1400" dirty="0">
+                <a:solidFill>
+                  <a:srgbClr val="CCDAE8"/>
+                </a:solidFill>
+                <a:latin typeface="Calibri" pitchFamily="34" charset="0"/>
+                <a:ea typeface="Calibri" pitchFamily="34" charset="-122"/>
+                <a:cs typeface="Calibri" pitchFamily="34" charset="-120"/>
+              </a:rPr>
+              <a:t>Simplified hydrological model; no treaty/legal constraints. QAOA now implemented: exact at debug scale, chunked at T26/L5 (25 qubits/block) — not yet beating DP.</a:t>
+            </a:r>
+            <a:endParaRPr lang="en-US" sz="1400" dirty="0"/>
+          </a:p>
+        </p:txBody>
+      </p:sp>
+      <p:sp>
+        <p:nvSpPr>
+          <p:cNvPr id="23" name="Shape 21"/>
+          <p:cNvSpPr/>
+          <p:nvPr/>
+        </p:nvSpPr>
+        <p:spPr>
+          <a:xfrm>
+            <a:off x="0" y="4937760"/>
+            <a:ext cx="9144000" cy="320040"/>
+          </a:xfrm>
+          <a:prstGeom prst="rect">
+            <a:avLst/>
+          </a:prstGeom>
+          <a:solidFill>
+            <a:srgbClr val="050E1A"/>
+          </a:solidFill>
+          <a:ln w="12700">
+            <a:solidFill>
+              <a:srgbClr val="050E1A"/>
+            </a:solidFill>
+            <a:prstDash val="solid"/>
+          </a:ln>
+        </p:spPr>
+        <p:txBody>
+          <a:bodyPr/>
+          <a:lstStyle/>
+          <a:p>
+            <a:endParaRPr lang="es-MX"/>
           </a:p>
         </p:txBody>
       </p:sp>
@@ -2491,7 +5213,7 @@
         </p:nvSpPr>
         <p:spPr>
           <a:xfrm>
-            <a:off x="457200" y="1389888"/>
+            <a:off x="457200" y="1325880"/>
             <a:ext cx="3977640" cy="2377440"/>
           </a:xfrm>
           <a:prstGeom prst="rect">
@@ -6078,7 +8800,7 @@
         </p:nvSpPr>
         <p:spPr>
           <a:xfrm>
-            <a:off x="457200" y="3337560"/>
+            <a:off x="457200" y="3364992"/>
             <a:ext cx="8229600" cy="274320"/>
           </a:xfrm>
           <a:prstGeom prst="rect">
@@ -6113,7 +8835,13 @@
         <p:nvGraphicFramePr>
           <p:cNvPr id="17" name="Chart 0"/>
           <p:cNvGraphicFramePr/>
-          <p:nvPr/>
+          <p:nvPr>
+            <p:extLst>
+              <p:ext uri="{D42A27DB-BD31-4B8C-83A1-F6EECF244321}">
+                <p14:modId xmlns:p14="http://schemas.microsoft.com/office/powerpoint/2010/main" val="3432510800"/>
+              </p:ext>
+            </p:extLst>
+          </p:nvPr>
         </p:nvGraphicFramePr>
         <p:xfrm>
           <a:off x="1371600" y="3639312"/>
@@ -6125,45 +8853,6 @@
           </a:graphicData>
         </a:graphic>
       </p:graphicFrame>
-      <p:sp>
-        <p:nvSpPr>
-          <p:cNvPr id="18" name="Text 15"/>
-          <p:cNvSpPr/>
-          <p:nvPr/>
-        </p:nvSpPr>
-        <p:spPr>
-          <a:xfrm>
-            <a:off x="457200" y="4709160"/>
-            <a:ext cx="8229600" cy="274320"/>
-          </a:xfrm>
-          <a:prstGeom prst="rect">
-            <a:avLst/>
-          </a:prstGeom>
-          <a:noFill/>
-          <a:ln/>
-        </p:spPr>
-        <p:txBody>
-          <a:bodyPr wrap="square" rtlCol="0" anchor="ctr"/>
-          <a:lstStyle/>
-          <a:p>
-            <a:pPr marL="0" indent="0" algn="ctr">
-              <a:buNone/>
-            </a:pPr>
-            <a:r>
-              <a:rPr lang="en-US" sz="900" i="1" dirty="0">
-                <a:solidFill>
-                  <a:srgbClr val="6B7A8D"/>
-                </a:solidFill>
-                <a:latin typeface="Calibri" pitchFamily="34" charset="0"/>
-                <a:ea typeface="Calibri" pitchFamily="34" charset="-122"/>
-                <a:cs typeface="Calibri" pitchFamily="34" charset="-120"/>
-              </a:rPr>
-              <a:t>Note — AI tools: Claude (Anthropic) supported QUBO derivation, code scaffolding, and documentation. Algorithms and results are the team's.</a:t>
-            </a:r>
-            <a:endParaRPr lang="en-US" sz="900" dirty="0"/>
-          </a:p>
-        </p:txBody>
-      </p:sp>
     </p:spTree>
   </p:cSld>
   <p:clrMapOvr>
@@ -10636,6 +13325,734 @@
 </file>
 
 <file path=ppt/slides/slide6.xml><?xml version="1.0" encoding="utf-8"?>
+<p:sld xmlns:a="http://schemas.openxmlformats.org/drawingml/2006/main" xmlns:r="http://schemas.openxmlformats.org/officeDocument/2006/relationships" xmlns:p="http://schemas.openxmlformats.org/presentationml/2006/main">
+  <p:cSld>
+    <p:bg>
+      <p:bgPr>
+        <a:solidFill>
+          <a:srgbClr val="F7F9FC"/>
+        </a:solidFill>
+        <a:effectLst/>
+      </p:bgPr>
+    </p:bg>
+    <p:spTree>
+      <p:nvGrpSpPr>
+        <p:cNvPr id="1" name=""/>
+        <p:cNvGrpSpPr/>
+        <p:nvPr/>
+      </p:nvGrpSpPr>
+      <p:grpSpPr>
+        <a:xfrm>
+          <a:off x="0" y="0"/>
+          <a:ext cx="0" cy="0"/>
+          <a:chOff x="0" y="0"/>
+          <a:chExt cx="0" cy="0"/>
+        </a:xfrm>
+      </p:grpSpPr>
+      <p:sp>
+        <p:nvSpPr>
+          <p:cNvPr id="2" name="Rectangle 1"/>
+          <p:cNvSpPr/>
+          <p:nvPr/>
+        </p:nvSpPr>
+        <p:spPr>
+          <a:xfrm>
+            <a:off x="0" y="0"/>
+            <a:ext cx="9144000" cy="868680"/>
+          </a:xfrm>
+          <a:prstGeom prst="rect">
+            <a:avLst/>
+          </a:prstGeom>
+          <a:solidFill>
+            <a:srgbClr val="1B3A6B"/>
+          </a:solidFill>
+          <a:ln>
+            <a:noFill/>
+          </a:ln>
+          <a:effectLst/>
+        </p:spPr>
+        <p:style>
+          <a:lnRef idx="1">
+            <a:schemeClr val="accent1"/>
+          </a:lnRef>
+          <a:fillRef idx="3">
+            <a:schemeClr val="accent1"/>
+          </a:fillRef>
+          <a:effectRef idx="2">
+            <a:schemeClr val="accent1"/>
+          </a:effectRef>
+          <a:fontRef idx="minor">
+            <a:schemeClr val="lt1"/>
+          </a:fontRef>
+        </p:style>
+        <p:txBody>
+          <a:bodyPr rtlCol="0" anchor="ctr"/>
+          <a:lstStyle/>
+          <a:p>
+            <a:pPr algn="ctr"/>
+            <a:endParaRPr/>
+          </a:p>
+        </p:txBody>
+      </p:sp>
+      <p:sp>
+        <p:nvSpPr>
+          <p:cNvPr id="3" name="Rectangle 2"/>
+          <p:cNvSpPr/>
+          <p:nvPr/>
+        </p:nvSpPr>
+        <p:spPr>
+          <a:xfrm>
+            <a:off x="0" y="804672"/>
+            <a:ext cx="9144000" cy="64008"/>
+          </a:xfrm>
+          <a:prstGeom prst="rect">
+            <a:avLst/>
+          </a:prstGeom>
+          <a:solidFill>
+            <a:srgbClr val="2DC9A4"/>
+          </a:solidFill>
+          <a:ln>
+            <a:noFill/>
+          </a:ln>
+          <a:effectLst/>
+        </p:spPr>
+        <p:style>
+          <a:lnRef idx="1">
+            <a:schemeClr val="accent1"/>
+          </a:lnRef>
+          <a:fillRef idx="3">
+            <a:schemeClr val="accent1"/>
+          </a:fillRef>
+          <a:effectRef idx="2">
+            <a:schemeClr val="accent1"/>
+          </a:effectRef>
+          <a:fontRef idx="minor">
+            <a:schemeClr val="lt1"/>
+          </a:fontRef>
+        </p:style>
+        <p:txBody>
+          <a:bodyPr rtlCol="0" anchor="ctr"/>
+          <a:lstStyle/>
+          <a:p>
+            <a:pPr algn="ctr"/>
+            <a:endParaRPr/>
+          </a:p>
+        </p:txBody>
+      </p:sp>
+      <p:sp>
+        <p:nvSpPr>
+          <p:cNvPr id="4" name="TextBox 3"/>
+          <p:cNvSpPr txBox="1"/>
+          <p:nvPr/>
+        </p:nvSpPr>
+        <p:spPr>
+          <a:xfrm>
+            <a:off x="457200" y="0"/>
+            <a:ext cx="7800000" cy="868680"/>
+          </a:xfrm>
+          <a:prstGeom prst="rect">
+            <a:avLst/>
+          </a:prstGeom>
+          <a:noFill/>
+        </p:spPr>
+        <p:txBody>
+          <a:bodyPr wrap="square" lIns="0" tIns="0" rIns="0" bIns="0" anchor="ctr">
+            <a:spAutoFit/>
+          </a:bodyPr>
+          <a:lstStyle/>
+          <a:p>
+            <a:pPr algn="l">
+              <a:spcAft>
+                <a:spcPts val="0"/>
+              </a:spcAft>
+            </a:pPr>
+            <a:r>
+              <a:rPr sz="2200" b="1" i="0">
+                <a:solidFill>
+                  <a:srgbClr val="FFFFFF"/>
+                </a:solidFill>
+                <a:latin typeface="Georgia"/>
+              </a:rPr>
+              <a:t>Optimized Policy — Results Visualized</a:t>
+            </a:r>
+          </a:p>
+        </p:txBody>
+      </p:sp>
+      <p:sp>
+        <p:nvSpPr>
+          <p:cNvPr id="5" name="TextBox 4"/>
+          <p:cNvSpPr txBox="1"/>
+          <p:nvPr/>
+        </p:nvSpPr>
+        <p:spPr>
+          <a:xfrm>
+            <a:off x="7000000" y="0"/>
+            <a:ext cx="1700000" cy="868680"/>
+          </a:xfrm>
+          <a:prstGeom prst="rect">
+            <a:avLst/>
+          </a:prstGeom>
+          <a:noFill/>
+        </p:spPr>
+        <p:txBody>
+          <a:bodyPr wrap="square" lIns="0" tIns="0" rIns="0" bIns="0" anchor="ctr">
+            <a:spAutoFit/>
+          </a:bodyPr>
+          <a:lstStyle/>
+          <a:p>
+            <a:pPr algn="r">
+              <a:spcAft>
+                <a:spcPts val="0"/>
+              </a:spcAft>
+            </a:pPr>
+            <a:r>
+              <a:rPr sz="1100" b="1" i="0">
+                <a:solidFill>
+                  <a:srgbClr val="CADCFC"/>
+                </a:solidFill>
+                <a:latin typeface="Calibri"/>
+              </a:rPr>
+              <a:t>T = 26  ·  L = 5</a:t>
+            </a:r>
+          </a:p>
+        </p:txBody>
+      </p:sp>
+      <p:sp>
+        <p:nvSpPr>
+          <p:cNvPr id="6" name="Rounded Rectangle 5"/>
+          <p:cNvSpPr/>
+          <p:nvPr/>
+        </p:nvSpPr>
+        <p:spPr>
+          <a:xfrm>
+            <a:off x="457200" y="1000000"/>
+            <a:ext cx="2649866" cy="620000"/>
+          </a:xfrm>
+          <a:prstGeom prst="roundRect">
+            <a:avLst>
+              <a:gd name="adj" fmla="val 6000"/>
+            </a:avLst>
+          </a:prstGeom>
+          <a:solidFill>
+            <a:srgbClr val="FFFFFF"/>
+          </a:solidFill>
+          <a:ln w="9525">
+            <a:solidFill>
+              <a:srgbClr val="D0DCE8"/>
+            </a:solidFill>
+          </a:ln>
+          <a:effectLst/>
+        </p:spPr>
+        <p:style>
+          <a:lnRef idx="1">
+            <a:schemeClr val="accent1"/>
+          </a:lnRef>
+          <a:fillRef idx="3">
+            <a:schemeClr val="accent1"/>
+          </a:fillRef>
+          <a:effectRef idx="2">
+            <a:schemeClr val="accent1"/>
+          </a:effectRef>
+          <a:fontRef idx="minor">
+            <a:schemeClr val="lt1"/>
+          </a:fontRef>
+        </p:style>
+        <p:txBody>
+          <a:bodyPr rtlCol="0" anchor="ctr"/>
+          <a:lstStyle/>
+          <a:p>
+            <a:pPr algn="ctr"/>
+            <a:endParaRPr/>
+          </a:p>
+        </p:txBody>
+      </p:sp>
+      <p:sp>
+        <p:nvSpPr>
+          <p:cNvPr id="7" name="TextBox 6"/>
+          <p:cNvSpPr txBox="1"/>
+          <p:nvPr/>
+        </p:nvSpPr>
+        <p:spPr>
+          <a:xfrm>
+            <a:off x="597200" y="1070000"/>
+            <a:ext cx="2369866" cy="320000"/>
+          </a:xfrm>
+          <a:prstGeom prst="rect">
+            <a:avLst/>
+          </a:prstGeom>
+          <a:noFill/>
+        </p:spPr>
+        <p:txBody>
+          <a:bodyPr wrap="square" lIns="0" tIns="0" rIns="0" bIns="0" anchor="t">
+            <a:spAutoFit/>
+          </a:bodyPr>
+          <a:lstStyle/>
+          <a:p>
+            <a:pPr algn="l">
+              <a:spcAft>
+                <a:spcPts val="0"/>
+              </a:spcAft>
+            </a:pPr>
+            <a:r>
+              <a:rPr sz="1800" b="1" i="0">
+                <a:solidFill>
+                  <a:srgbClr val="0E7C7B"/>
+                </a:solidFill>
+                <a:latin typeface="Georgia"/>
+              </a:rPr>
+              <a:t>311.5 → 280.7 Mm³</a:t>
+            </a:r>
+          </a:p>
+        </p:txBody>
+      </p:sp>
+      <p:sp>
+        <p:nvSpPr>
+          <p:cNvPr id="8" name="TextBox 7"/>
+          <p:cNvSpPr txBox="1"/>
+          <p:nvPr/>
+        </p:nvSpPr>
+        <p:spPr>
+          <a:xfrm>
+            <a:off x="597200" y="1370000"/>
+            <a:ext cx="2369866" cy="220000"/>
+          </a:xfrm>
+          <a:prstGeom prst="rect">
+            <a:avLst/>
+          </a:prstGeom>
+          <a:noFill/>
+        </p:spPr>
+        <p:txBody>
+          <a:bodyPr wrap="square" lIns="0" tIns="0" rIns="0" bIns="0" anchor="t">
+            <a:spAutoFit/>
+          </a:bodyPr>
+          <a:lstStyle/>
+          <a:p>
+            <a:pPr algn="l">
+              <a:spcAft>
+                <a:spcPts val="0"/>
+              </a:spcAft>
+            </a:pPr>
+            <a:r>
+              <a:rPr sz="950" b="0" i="0">
+                <a:solidFill>
+                  <a:srgbClr val="6B7A8D"/>
+                </a:solidFill>
+                <a:latin typeface="Calibri"/>
+              </a:rPr>
+              <a:t>Total volume released (−9.9%)</a:t>
+            </a:r>
+          </a:p>
+        </p:txBody>
+      </p:sp>
+      <p:sp>
+        <p:nvSpPr>
+          <p:cNvPr id="9" name="Rounded Rectangle 8"/>
+          <p:cNvSpPr/>
+          <p:nvPr/>
+        </p:nvSpPr>
+        <p:spPr>
+          <a:xfrm>
+            <a:off x="3247066" y="1000000"/>
+            <a:ext cx="2649866" cy="620000"/>
+          </a:xfrm>
+          <a:prstGeom prst="roundRect">
+            <a:avLst>
+              <a:gd name="adj" fmla="val 6000"/>
+            </a:avLst>
+          </a:prstGeom>
+          <a:solidFill>
+            <a:srgbClr val="FFFFFF"/>
+          </a:solidFill>
+          <a:ln w="9525">
+            <a:solidFill>
+              <a:srgbClr val="D0DCE8"/>
+            </a:solidFill>
+          </a:ln>
+          <a:effectLst/>
+        </p:spPr>
+        <p:style>
+          <a:lnRef idx="1">
+            <a:schemeClr val="accent1"/>
+          </a:lnRef>
+          <a:fillRef idx="3">
+            <a:schemeClr val="accent1"/>
+          </a:fillRef>
+          <a:effectRef idx="2">
+            <a:schemeClr val="accent1"/>
+          </a:effectRef>
+          <a:fontRef idx="minor">
+            <a:schemeClr val="lt1"/>
+          </a:fontRef>
+        </p:style>
+        <p:txBody>
+          <a:bodyPr rtlCol="0" anchor="ctr"/>
+          <a:lstStyle/>
+          <a:p>
+            <a:pPr algn="ctr"/>
+            <a:endParaRPr/>
+          </a:p>
+        </p:txBody>
+      </p:sp>
+      <p:sp>
+        <p:nvSpPr>
+          <p:cNvPr id="10" name="TextBox 9"/>
+          <p:cNvSpPr txBox="1"/>
+          <p:nvPr/>
+        </p:nvSpPr>
+        <p:spPr>
+          <a:xfrm>
+            <a:off x="3387066" y="1070000"/>
+            <a:ext cx="2369866" cy="320000"/>
+          </a:xfrm>
+          <a:prstGeom prst="rect">
+            <a:avLst/>
+          </a:prstGeom>
+          <a:noFill/>
+        </p:spPr>
+        <p:txBody>
+          <a:bodyPr wrap="square" lIns="0" tIns="0" rIns="0" bIns="0" anchor="t">
+            <a:spAutoFit/>
+          </a:bodyPr>
+          <a:lstStyle/>
+          <a:p>
+            <a:pPr algn="l">
+              <a:spcAft>
+                <a:spcPts val="0"/>
+              </a:spcAft>
+            </a:pPr>
+            <a:r>
+              <a:rPr sz="1800" b="1" i="0">
+                <a:solidFill>
+                  <a:srgbClr val="0E7C7B"/>
+                </a:solidFill>
+                <a:latin typeface="Georgia"/>
+              </a:rPr>
+              <a:t>9.65% → 10.59%</a:t>
+            </a:r>
+          </a:p>
+        </p:txBody>
+      </p:sp>
+      <p:sp>
+        <p:nvSpPr>
+          <p:cNvPr id="11" name="TextBox 10"/>
+          <p:cNvSpPr txBox="1"/>
+          <p:nvPr/>
+        </p:nvSpPr>
+        <p:spPr>
+          <a:xfrm>
+            <a:off x="3387066" y="1370000"/>
+            <a:ext cx="2369866" cy="220000"/>
+          </a:xfrm>
+          <a:prstGeom prst="rect">
+            <a:avLst/>
+          </a:prstGeom>
+          <a:noFill/>
+        </p:spPr>
+        <p:txBody>
+          <a:bodyPr wrap="square" lIns="0" tIns="0" rIns="0" bIns="0" anchor="t">
+            <a:spAutoFit/>
+          </a:bodyPr>
+          <a:lstStyle/>
+          <a:p>
+            <a:pPr algn="l">
+              <a:spcAft>
+                <a:spcPts val="0"/>
+              </a:spcAft>
+            </a:pPr>
+            <a:r>
+              <a:rPr sz="950" b="0" i="0">
+                <a:solidFill>
+                  <a:srgbClr val="6B7A8D"/>
+                </a:solidFill>
+                <a:latin typeface="Calibri"/>
+              </a:rPr>
+              <a:t>Minimum storage vs. capacity</a:t>
+            </a:r>
+          </a:p>
+        </p:txBody>
+      </p:sp>
+      <p:sp>
+        <p:nvSpPr>
+          <p:cNvPr id="12" name="Rounded Rectangle 11"/>
+          <p:cNvSpPr/>
+          <p:nvPr/>
+        </p:nvSpPr>
+        <p:spPr>
+          <a:xfrm>
+            <a:off x="6036932" y="1000000"/>
+            <a:ext cx="2649866" cy="620000"/>
+          </a:xfrm>
+          <a:prstGeom prst="roundRect">
+            <a:avLst>
+              <a:gd name="adj" fmla="val 6000"/>
+            </a:avLst>
+          </a:prstGeom>
+          <a:solidFill>
+            <a:srgbClr val="FFFFFF"/>
+          </a:solidFill>
+          <a:ln w="9525">
+            <a:solidFill>
+              <a:srgbClr val="D0DCE8"/>
+            </a:solidFill>
+          </a:ln>
+          <a:effectLst/>
+        </p:spPr>
+        <p:style>
+          <a:lnRef idx="1">
+            <a:schemeClr val="accent1"/>
+          </a:lnRef>
+          <a:fillRef idx="3">
+            <a:schemeClr val="accent1"/>
+          </a:fillRef>
+          <a:effectRef idx="2">
+            <a:schemeClr val="accent1"/>
+          </a:effectRef>
+          <a:fontRef idx="minor">
+            <a:schemeClr val="lt1"/>
+          </a:fontRef>
+        </p:style>
+        <p:txBody>
+          <a:bodyPr rtlCol="0" anchor="ctr"/>
+          <a:lstStyle/>
+          <a:p>
+            <a:pPr algn="ctr"/>
+            <a:endParaRPr/>
+          </a:p>
+        </p:txBody>
+      </p:sp>
+      <p:sp>
+        <p:nvSpPr>
+          <p:cNvPr id="13" name="TextBox 12"/>
+          <p:cNvSpPr txBox="1"/>
+          <p:nvPr/>
+        </p:nvSpPr>
+        <p:spPr>
+          <a:xfrm>
+            <a:off x="6176932" y="1070000"/>
+            <a:ext cx="2369866" cy="320000"/>
+          </a:xfrm>
+          <a:prstGeom prst="rect">
+            <a:avLst/>
+          </a:prstGeom>
+          <a:noFill/>
+        </p:spPr>
+        <p:txBody>
+          <a:bodyPr wrap="square" lIns="0" tIns="0" rIns="0" bIns="0" anchor="t">
+            <a:spAutoFit/>
+          </a:bodyPr>
+          <a:lstStyle/>
+          <a:p>
+            <a:pPr algn="l">
+              <a:spcAft>
+                <a:spcPts val="0"/>
+              </a:spcAft>
+            </a:pPr>
+            <a:r>
+              <a:rPr sz="1800" b="1" i="0">
+                <a:solidFill>
+                  <a:srgbClr val="0E7C7B"/>
+                </a:solidFill>
+                <a:latin typeface="Georgia"/>
+              </a:rPr>
+              <a:t>30.85 / 31.15 Mm³</a:t>
+            </a:r>
+          </a:p>
+        </p:txBody>
+      </p:sp>
+      <p:sp>
+        <p:nvSpPr>
+          <p:cNvPr id="14" name="TextBox 13"/>
+          <p:cNvSpPr txBox="1"/>
+          <p:nvPr/>
+        </p:nvSpPr>
+        <p:spPr>
+          <a:xfrm>
+            <a:off x="6176932" y="1370000"/>
+            <a:ext cx="2369866" cy="220000"/>
+          </a:xfrm>
+          <a:prstGeom prst="rect">
+            <a:avLst/>
+          </a:prstGeom>
+          <a:noFill/>
+        </p:spPr>
+        <p:txBody>
+          <a:bodyPr wrap="square" lIns="0" tIns="0" rIns="0" bIns="0" anchor="t">
+            <a:spAutoFit/>
+          </a:bodyPr>
+          <a:lstStyle/>
+          <a:p>
+            <a:pPr algn="l">
+              <a:spcAft>
+                <a:spcPts val="0"/>
+              </a:spcAft>
+            </a:pPr>
+            <a:r>
+              <a:rPr sz="950" b="0" i="0">
+                <a:solidFill>
+                  <a:srgbClr val="6B7A8D"/>
+                </a:solidFill>
+                <a:latin typeface="Calibri"/>
+              </a:rPr>
+              <a:t>Cumulative balance budget used (99.0%)</a:t>
+            </a:r>
+          </a:p>
+        </p:txBody>
+      </p:sp>
+      <p:sp>
+        <p:nvSpPr>
+          <p:cNvPr id="15" name="Rounded Rectangle 14"/>
+          <p:cNvSpPr/>
+          <p:nvPr/>
+        </p:nvSpPr>
+        <p:spPr>
+          <a:xfrm>
+            <a:off x="457200" y="1770000"/>
+            <a:ext cx="4024800" cy="3143500"/>
+          </a:xfrm>
+          <a:prstGeom prst="roundRect">
+            <a:avLst>
+              <a:gd name="adj" fmla="val 6000"/>
+            </a:avLst>
+          </a:prstGeom>
+          <a:solidFill>
+            <a:srgbClr val="FFFFFF"/>
+          </a:solidFill>
+          <a:ln w="9525">
+            <a:solidFill>
+              <a:srgbClr val="D0DCE8"/>
+            </a:solidFill>
+          </a:ln>
+          <a:effectLst/>
+        </p:spPr>
+        <p:style>
+          <a:lnRef idx="1">
+            <a:schemeClr val="accent1"/>
+          </a:lnRef>
+          <a:fillRef idx="3">
+            <a:schemeClr val="accent1"/>
+          </a:fillRef>
+          <a:effectRef idx="2">
+            <a:schemeClr val="accent1"/>
+          </a:effectRef>
+          <a:fontRef idx="minor">
+            <a:schemeClr val="lt1"/>
+          </a:fontRef>
+        </p:style>
+        <p:txBody>
+          <a:bodyPr rtlCol="0" anchor="ctr"/>
+          <a:lstStyle/>
+          <a:p>
+            <a:pPr algn="ctr"/>
+            <a:endParaRPr/>
+          </a:p>
+        </p:txBody>
+      </p:sp>
+      <p:sp>
+        <p:nvSpPr>
+          <p:cNvPr id="16" name="Rounded Rectangle 15"/>
+          <p:cNvSpPr/>
+          <p:nvPr/>
+        </p:nvSpPr>
+        <p:spPr>
+          <a:xfrm>
+            <a:off x="4662000" y="1770000"/>
+            <a:ext cx="4024800" cy="3143500"/>
+          </a:xfrm>
+          <a:prstGeom prst="roundRect">
+            <a:avLst>
+              <a:gd name="adj" fmla="val 6000"/>
+            </a:avLst>
+          </a:prstGeom>
+          <a:solidFill>
+            <a:srgbClr val="FFFFFF"/>
+          </a:solidFill>
+          <a:ln w="9525">
+            <a:solidFill>
+              <a:srgbClr val="D0DCE8"/>
+            </a:solidFill>
+          </a:ln>
+          <a:effectLst/>
+        </p:spPr>
+        <p:style>
+          <a:lnRef idx="1">
+            <a:schemeClr val="accent1"/>
+          </a:lnRef>
+          <a:fillRef idx="3">
+            <a:schemeClr val="accent1"/>
+          </a:fillRef>
+          <a:effectRef idx="2">
+            <a:schemeClr val="accent1"/>
+          </a:effectRef>
+          <a:fontRef idx="minor">
+            <a:schemeClr val="lt1"/>
+          </a:fontRef>
+        </p:style>
+        <p:txBody>
+          <a:bodyPr rtlCol="0" anchor="ctr"/>
+          <a:lstStyle/>
+          <a:p>
+            <a:pPr algn="ctr"/>
+            <a:endParaRPr/>
+          </a:p>
+        </p:txBody>
+      </p:sp>
+      <p:pic>
+        <p:nvPicPr>
+          <p:cNvPr id="17" name="Picture 16" descr="storage_trajectory_sbs.png"/>
+          <p:cNvPicPr>
+            <a:picLocks noChangeAspect="1"/>
+          </p:cNvPicPr>
+          <p:nvPr/>
+        </p:nvPicPr>
+        <p:blipFill>
+          <a:blip r:embed="rId2"/>
+          <a:stretch>
+            <a:fillRect/>
+          </a:stretch>
+        </p:blipFill>
+        <p:spPr>
+          <a:xfrm>
+            <a:off x="517200" y="1981393"/>
+            <a:ext cx="3904800" cy="2720714"/>
+          </a:xfrm>
+          <a:prstGeom prst="rect">
+            <a:avLst/>
+          </a:prstGeom>
+        </p:spPr>
+      </p:pic>
+      <p:pic>
+        <p:nvPicPr>
+          <p:cNvPr id="18" name="Picture 17" descr="weekly_discharge_sbs.png"/>
+          <p:cNvPicPr>
+            <a:picLocks noChangeAspect="1"/>
+          </p:cNvPicPr>
+          <p:nvPr/>
+        </p:nvPicPr>
+        <p:blipFill>
+          <a:blip r:embed="rId3"/>
+          <a:stretch>
+            <a:fillRect/>
+          </a:stretch>
+        </p:blipFill>
+        <p:spPr>
+          <a:xfrm>
+            <a:off x="4722000" y="1981393"/>
+            <a:ext cx="3904800" cy="2720714"/>
+          </a:xfrm>
+          <a:prstGeom prst="rect">
+            <a:avLst/>
+          </a:prstGeom>
+        </p:spPr>
+      </p:pic>
+    </p:spTree>
+  </p:cSld>
+  <p:clrMapOvr>
+    <a:masterClrMapping/>
+  </p:clrMapOvr>
+</p:sld>
+</file>
+
+<file path=ppt/slides/slide7.xml><?xml version="1.0" encoding="utf-8"?>
 <p:sld xmlns:a="http://schemas.openxmlformats.org/drawingml/2006/main" xmlns:r="http://schemas.openxmlformats.org/officeDocument/2006/relationships" xmlns:p="http://schemas.openxmlformats.org/presentationml/2006/main">
   <p:cSld name="Slide 6">
     <p:bg>
@@ -14518,43 +17935,13 @@
 </p:sld>
 </file>
 
-<file path=ppt/slides/slide7.xml><?xml version="1.0" encoding="utf-8"?>
+<file path=ppt/slides/slide8.xml><?xml version="1.0" encoding="utf-8"?>
 <p:sld xmlns:a="http://schemas.openxmlformats.org/drawingml/2006/main" xmlns:r="http://schemas.openxmlformats.org/officeDocument/2006/relationships" xmlns:p="http://schemas.openxmlformats.org/presentationml/2006/main">
   <p:cSld>
-    <p:spTree>
-      <p:nvGrpSpPr>
-        <p:cNvPr id="1" name=""/>
-        <p:cNvGrpSpPr/>
-        <p:nvPr/>
-      </p:nvGrpSpPr>
-      <p:grpSpPr>
-        <a:xfrm>
-          <a:off x="0" y="0"/>
-          <a:ext cx="0" cy="0"/>
-          <a:chOff x="0" y="0"/>
-          <a:chExt cx="0" cy="0"/>
-        </a:xfrm>
-      </p:grpSpPr>
-    </p:spTree>
-    <p:extLst>
-      <p:ext uri="{BB962C8B-B14F-4D97-AF65-F5344CB8AC3E}">
-        <p14:creationId xmlns:p14="http://schemas.microsoft.com/office/powerpoint/2010/main" val="3897707828"/>
-      </p:ext>
-    </p:extLst>
-  </p:cSld>
-  <p:clrMapOvr>
-    <a:masterClrMapping/>
-  </p:clrMapOvr>
-</p:sld>
-</file>
-
-<file path=ppt/slides/slide8.xml><?xml version="1.0" encoding="utf-8"?>
-<p:sld xmlns:a="http://schemas.openxmlformats.org/drawingml/2006/main" xmlns:r="http://schemas.openxmlformats.org/officeDocument/2006/relationships" xmlns:p="http://schemas.openxmlformats.org/presentationml/2006/main">
-  <p:cSld name="Slide 7">
     <p:bg>
       <p:bgPr>
         <a:solidFill>
-          <a:srgbClr val="0A1628"/>
+          <a:srgbClr val="F7F9FC"/>
         </a:solidFill>
         <a:effectLst/>
       </p:bgPr>
@@ -14575,14 +17962,59 @@
       </p:grpSpPr>
       <p:sp>
         <p:nvSpPr>
-          <p:cNvPr id="2" name="Shape 0"/>
+          <p:cNvPr id="2" name="Rectangle 1"/>
           <p:cNvSpPr/>
           <p:nvPr/>
         </p:nvSpPr>
         <p:spPr>
           <a:xfrm>
             <a:off x="0" y="0"/>
-            <a:ext cx="9144000" cy="54864"/>
+            <a:ext cx="9144000" cy="868680"/>
+          </a:xfrm>
+          <a:prstGeom prst="rect">
+            <a:avLst/>
+          </a:prstGeom>
+          <a:solidFill>
+            <a:srgbClr val="1B3A6B"/>
+          </a:solidFill>
+          <a:ln>
+            <a:noFill/>
+          </a:ln>
+          <a:effectLst/>
+        </p:spPr>
+        <p:style>
+          <a:lnRef idx="1">
+            <a:schemeClr val="accent1"/>
+          </a:lnRef>
+          <a:fillRef idx="3">
+            <a:schemeClr val="accent1"/>
+          </a:fillRef>
+          <a:effectRef idx="2">
+            <a:schemeClr val="accent1"/>
+          </a:effectRef>
+          <a:fontRef idx="minor">
+            <a:schemeClr val="lt1"/>
+          </a:fontRef>
+        </p:style>
+        <p:txBody>
+          <a:bodyPr rtlCol="0" anchor="ctr"/>
+          <a:lstStyle/>
+          <a:p>
+            <a:pPr algn="ctr"/>
+            <a:endParaRPr/>
+          </a:p>
+        </p:txBody>
+      </p:sp>
+      <p:sp>
+        <p:nvSpPr>
+          <p:cNvPr id="3" name="Rectangle 2"/>
+          <p:cNvSpPr/>
+          <p:nvPr/>
+        </p:nvSpPr>
+        <p:spPr>
+          <a:xfrm>
+            <a:off x="0" y="804672"/>
+            <a:ext cx="9144000" cy="64008"/>
           </a:xfrm>
           <a:prstGeom prst="rect">
             <a:avLst/>
@@ -14590,802 +18022,1775 @@
           <a:solidFill>
             <a:srgbClr val="2DC9A4"/>
           </a:solidFill>
-          <a:ln w="12700">
-            <a:solidFill>
-              <a:srgbClr val="2DC9A4"/>
-            </a:solidFill>
-            <a:prstDash val="solid"/>
+          <a:ln>
+            <a:noFill/>
           </a:ln>
+          <a:effectLst/>
         </p:spPr>
+        <p:style>
+          <a:lnRef idx="1">
+            <a:schemeClr val="accent1"/>
+          </a:lnRef>
+          <a:fillRef idx="3">
+            <a:schemeClr val="accent1"/>
+          </a:fillRef>
+          <a:effectRef idx="2">
+            <a:schemeClr val="accent1"/>
+          </a:effectRef>
+          <a:fontRef idx="minor">
+            <a:schemeClr val="lt1"/>
+          </a:fontRef>
+        </p:style>
         <p:txBody>
-          <a:bodyPr/>
+          <a:bodyPr rtlCol="0" anchor="ctr"/>
           <a:lstStyle/>
           <a:p>
-            <a:endParaRPr lang="es-MX"/>
+            <a:pPr algn="ctr"/>
+            <a:endParaRPr/>
           </a:p>
         </p:txBody>
       </p:sp>
       <p:sp>
         <p:nvSpPr>
-          <p:cNvPr id="3" name="Shape 1"/>
+          <p:cNvPr id="4" name="TextBox 3"/>
+          <p:cNvSpPr txBox="1"/>
+          <p:nvPr/>
+        </p:nvSpPr>
+        <p:spPr>
+          <a:xfrm>
+            <a:off x="457200" y="0"/>
+            <a:ext cx="7800000" cy="868680"/>
+          </a:xfrm>
+          <a:prstGeom prst="rect">
+            <a:avLst/>
+          </a:prstGeom>
+          <a:noFill/>
+        </p:spPr>
+        <p:txBody>
+          <a:bodyPr wrap="square" lIns="0" tIns="0" rIns="0" bIns="0" anchor="ctr">
+            <a:spAutoFit/>
+          </a:bodyPr>
+          <a:lstStyle/>
+          <a:p>
+            <a:pPr algn="l">
+              <a:spcAft>
+                <a:spcPts val="0"/>
+              </a:spcAft>
+            </a:pPr>
+            <a:r>
+              <a:rPr sz="2200" b="1" i="0">
+                <a:solidFill>
+                  <a:srgbClr val="FFFFFF"/>
+                </a:solidFill>
+                <a:latin typeface="Georgia"/>
+              </a:rPr>
+              <a:t>Extended Benchmark Comparison</a:t>
+            </a:r>
+          </a:p>
+        </p:txBody>
+      </p:sp>
+      <p:sp>
+        <p:nvSpPr>
+          <p:cNvPr id="5" name="TextBox 4"/>
+          <p:cNvSpPr txBox="1"/>
+          <p:nvPr/>
+        </p:nvSpPr>
+        <p:spPr>
+          <a:xfrm>
+            <a:off x="7000000" y="0"/>
+            <a:ext cx="1700000" cy="868680"/>
+          </a:xfrm>
+          <a:prstGeom prst="rect">
+            <a:avLst/>
+          </a:prstGeom>
+          <a:noFill/>
+        </p:spPr>
+        <p:txBody>
+          <a:bodyPr wrap="square" lIns="0" tIns="0" rIns="0" bIns="0" anchor="ctr">
+            <a:spAutoFit/>
+          </a:bodyPr>
+          <a:lstStyle/>
+          <a:p>
+            <a:pPr algn="r">
+              <a:spcAft>
+                <a:spcPts val="0"/>
+              </a:spcAft>
+            </a:pPr>
+            <a:r>
+              <a:rPr sz="1100" b="1" i="0">
+                <a:solidFill>
+                  <a:srgbClr val="CADCFC"/>
+                </a:solidFill>
+                <a:latin typeface="Calibri"/>
+              </a:rPr>
+              <a:t>T = 26  ·  L = 5  ·  all methods</a:t>
+            </a:r>
+          </a:p>
+        </p:txBody>
+      </p:sp>
+      <p:graphicFrame>
+        <p:nvGraphicFramePr>
+          <p:cNvPr id="6" name="Table 5"/>
+          <p:cNvGraphicFramePr>
+            <a:graphicFrameLocks noGrp="1"/>
+          </p:cNvGraphicFramePr>
+          <p:nvPr/>
+        </p:nvGraphicFramePr>
+        <p:xfrm>
+          <a:off x="457200" y="1000000"/>
+          <a:ext cx="8230000" cy="2150000"/>
+        </p:xfrm>
+        <a:graphic>
+          <a:graphicData uri="http://schemas.openxmlformats.org/drawingml/2006/table">
+            <a:tbl>
+              <a:tblPr/>
+              <a:tblGrid>
+                <a:gridCol w="2650000">
+                  <a:extLst>
+                    <a:ext uri="{9D8B030D-6E8A-4147-A177-3AD203B41FA5}">
+                      <a16:colId xmlns:a16="http://schemas.microsoft.com/office/drawing/2014/main" val="20000"/>
+                    </a:ext>
+                  </a:extLst>
+                </a:gridCol>
+                <a:gridCol w="1150000">
+                  <a:extLst>
+                    <a:ext uri="{9D8B030D-6E8A-4147-A177-3AD203B41FA5}">
+                      <a16:colId xmlns:a16="http://schemas.microsoft.com/office/drawing/2014/main" val="20001"/>
+                    </a:ext>
+                  </a:extLst>
+                </a:gridCol>
+                <a:gridCol w="1300000">
+                  <a:extLst>
+                    <a:ext uri="{9D8B030D-6E8A-4147-A177-3AD203B41FA5}">
+                      <a16:colId xmlns:a16="http://schemas.microsoft.com/office/drawing/2014/main" val="20002"/>
+                    </a:ext>
+                  </a:extLst>
+                </a:gridCol>
+                <a:gridCol w="1550000">
+                  <a:extLst>
+                    <a:ext uri="{9D8B030D-6E8A-4147-A177-3AD203B41FA5}">
+                      <a16:colId xmlns:a16="http://schemas.microsoft.com/office/drawing/2014/main" val="20003"/>
+                    </a:ext>
+                  </a:extLst>
+                </a:gridCol>
+                <a:gridCol w="1580000">
+                  <a:extLst>
+                    <a:ext uri="{9D8B030D-6E8A-4147-A177-3AD203B41FA5}">
+                      <a16:colId xmlns:a16="http://schemas.microsoft.com/office/drawing/2014/main" val="20004"/>
+                    </a:ext>
+                  </a:extLst>
+                </a:gridCol>
+              </a:tblGrid>
+              <a:tr h="358333">
+                <a:tc>
+                  <a:txBody>
+                    <a:bodyPr/>
+                    <a:lstStyle/>
+                    <a:p>
+                      <a:pPr algn="l"/>
+                      <a:r>
+                        <a:rPr sz="1050" b="1">
+                          <a:solidFill>
+                            <a:srgbClr val="FFFFFF"/>
+                          </a:solidFill>
+                          <a:latin typeface="Calibri"/>
+                        </a:rPr>
+                        <a:t>Method</a:t>
+                      </a:r>
+                    </a:p>
+                  </a:txBody>
+                  <a:tcPr marL="45000" marR="45000" marT="20000" marB="20000" anchor="ctr">
+                    <a:solidFill>
+                      <a:srgbClr val="1B3A6B"/>
+                    </a:solidFill>
+                  </a:tcPr>
+                </a:tc>
+                <a:tc>
+                  <a:txBody>
+                    <a:bodyPr/>
+                    <a:lstStyle/>
+                    <a:p>
+                      <a:pPr algn="r"/>
+                      <a:r>
+                        <a:rPr sz="1050" b="1">
+                          <a:solidFill>
+                            <a:srgbClr val="FFFFFF"/>
+                          </a:solidFill>
+                          <a:latin typeface="Calibri"/>
+                        </a:rPr>
+                        <a:t>SRS</a:t>
+                      </a:r>
+                    </a:p>
+                  </a:txBody>
+                  <a:tcPr marL="45000" marR="45000" marT="20000" marB="20000" anchor="ctr">
+                    <a:solidFill>
+                      <a:srgbClr val="1B3A6B"/>
+                    </a:solidFill>
+                  </a:tcPr>
+                </a:tc>
+                <a:tc>
+                  <a:txBody>
+                    <a:bodyPr/>
+                    <a:lstStyle/>
+                    <a:p>
+                      <a:pPr algn="r"/>
+                      <a:r>
+                        <a:rPr sz="1050" b="1">
+                          <a:solidFill>
+                            <a:srgbClr val="FFFFFF"/>
+                          </a:solidFill>
+                          <a:latin typeface="Calibri"/>
+                        </a:rPr>
+                        <a:t>ΔSRS vs hist.</a:t>
+                      </a:r>
+                    </a:p>
+                  </a:txBody>
+                  <a:tcPr marL="45000" marR="45000" marT="20000" marB="20000" anchor="ctr">
+                    <a:solidFill>
+                      <a:srgbClr val="1B3A6B"/>
+                    </a:solidFill>
+                  </a:tcPr>
+                </a:tc>
+                <a:tc>
+                  <a:txBody>
+                    <a:bodyPr/>
+                    <a:lstStyle/>
+                    <a:p>
+                      <a:pPr algn="ctr"/>
+                      <a:r>
+                        <a:rPr sz="1050" b="1">
+                          <a:solidFill>
+                            <a:srgbClr val="FFFFFF"/>
+                          </a:solidFill>
+                          <a:latin typeface="Calibri"/>
+                        </a:rPr>
+                        <a:t>Feasible</a:t>
+                      </a:r>
+                    </a:p>
+                  </a:txBody>
+                  <a:tcPr marL="45000" marR="45000" marT="20000" marB="20000" anchor="ctr">
+                    <a:solidFill>
+                      <a:srgbClr val="1B3A6B"/>
+                    </a:solidFill>
+                  </a:tcPr>
+                </a:tc>
+                <a:tc>
+                  <a:txBody>
+                    <a:bodyPr/>
+                    <a:lstStyle/>
+                    <a:p>
+                      <a:pPr algn="r"/>
+                      <a:r>
+                        <a:rPr sz="1050" b="1">
+                          <a:solidFill>
+                            <a:srgbClr val="FFFFFF"/>
+                          </a:solidFill>
+                          <a:latin typeface="Calibri"/>
+                        </a:rPr>
+                        <a:t>Runtime</a:t>
+                      </a:r>
+                    </a:p>
+                  </a:txBody>
+                  <a:tcPr marL="45000" marR="45000" marT="20000" marB="20000" anchor="ctr">
+                    <a:solidFill>
+                      <a:srgbClr val="1B3A6B"/>
+                    </a:solidFill>
+                  </a:tcPr>
+                </a:tc>
+                <a:extLst>
+                  <a:ext uri="{0D108BD9-81ED-4DB2-BD59-A6C34878D82A}">
+                    <a16:rowId xmlns:a16="http://schemas.microsoft.com/office/drawing/2014/main" val="10000"/>
+                  </a:ext>
+                </a:extLst>
+              </a:tr>
+              <a:tr h="358333">
+                <a:tc>
+                  <a:txBody>
+                    <a:bodyPr/>
+                    <a:lstStyle/>
+                    <a:p>
+                      <a:pPr algn="l"/>
+                      <a:r>
+                        <a:rPr sz="1050" b="0">
+                          <a:solidFill>
+                            <a:srgbClr val="1A2332"/>
+                          </a:solidFill>
+                          <a:latin typeface="Calibri"/>
+                        </a:rPr>
+                        <a:t>Historical  (u = 0)</a:t>
+                      </a:r>
+                    </a:p>
+                  </a:txBody>
+                  <a:tcPr marL="45000" marR="45000" marT="20000" marB="20000" anchor="ctr">
+                    <a:solidFill>
+                      <a:srgbClr val="FFFFFF"/>
+                    </a:solidFill>
+                  </a:tcPr>
+                </a:tc>
+                <a:tc>
+                  <a:txBody>
+                    <a:bodyPr/>
+                    <a:lstStyle/>
+                    <a:p>
+                      <a:pPr algn="r"/>
+                      <a:r>
+                        <a:rPr sz="1050" b="0">
+                          <a:solidFill>
+                            <a:srgbClr val="1A2332"/>
+                          </a:solidFill>
+                          <a:latin typeface="Calibri"/>
+                        </a:rPr>
+                        <a:t>−0.311534</a:t>
+                      </a:r>
+                    </a:p>
+                  </a:txBody>
+                  <a:tcPr marL="45000" marR="45000" marT="20000" marB="20000" anchor="ctr">
+                    <a:solidFill>
+                      <a:srgbClr val="FFFFFF"/>
+                    </a:solidFill>
+                  </a:tcPr>
+                </a:tc>
+                <a:tc>
+                  <a:txBody>
+                    <a:bodyPr/>
+                    <a:lstStyle/>
+                    <a:p>
+                      <a:pPr algn="r"/>
+                      <a:r>
+                        <a:rPr sz="1050" b="0">
+                          <a:solidFill>
+                            <a:srgbClr val="1A2332"/>
+                          </a:solidFill>
+                          <a:latin typeface="Calibri"/>
+                        </a:rPr>
+                        <a:t>+0.000000</a:t>
+                      </a:r>
+                    </a:p>
+                  </a:txBody>
+                  <a:tcPr marL="45000" marR="45000" marT="20000" marB="20000" anchor="ctr">
+                    <a:solidFill>
+                      <a:srgbClr val="FFFFFF"/>
+                    </a:solidFill>
+                  </a:tcPr>
+                </a:tc>
+                <a:tc>
+                  <a:txBody>
+                    <a:bodyPr/>
+                    <a:lstStyle/>
+                    <a:p>
+                      <a:pPr algn="ctr"/>
+                      <a:r>
+                        <a:rPr sz="1050" b="1">
+                          <a:solidFill>
+                            <a:srgbClr val="0E7C7B"/>
+                          </a:solidFill>
+                          <a:latin typeface="Calibri"/>
+                        </a:rPr>
+                        <a:t>✓</a:t>
+                      </a:r>
+                    </a:p>
+                  </a:txBody>
+                  <a:tcPr marL="45000" marR="45000" marT="20000" marB="20000" anchor="ctr">
+                    <a:solidFill>
+                      <a:srgbClr val="FFFFFF"/>
+                    </a:solidFill>
+                  </a:tcPr>
+                </a:tc>
+                <a:tc>
+                  <a:txBody>
+                    <a:bodyPr/>
+                    <a:lstStyle/>
+                    <a:p>
+                      <a:pPr algn="r"/>
+                      <a:r>
+                        <a:rPr sz="1050" b="0">
+                          <a:solidFill>
+                            <a:srgbClr val="1A2332"/>
+                          </a:solidFill>
+                          <a:latin typeface="Calibri"/>
+                        </a:rPr>
+                        <a:t>—</a:t>
+                      </a:r>
+                    </a:p>
+                  </a:txBody>
+                  <a:tcPr marL="45000" marR="45000" marT="20000" marB="20000" anchor="ctr">
+                    <a:solidFill>
+                      <a:srgbClr val="FFFFFF"/>
+                    </a:solidFill>
+                  </a:tcPr>
+                </a:tc>
+                <a:extLst>
+                  <a:ext uri="{0D108BD9-81ED-4DB2-BD59-A6C34878D82A}">
+                    <a16:rowId xmlns:a16="http://schemas.microsoft.com/office/drawing/2014/main" val="10001"/>
+                  </a:ext>
+                </a:extLst>
+              </a:tr>
+              <a:tr h="358333">
+                <a:tc>
+                  <a:txBody>
+                    <a:bodyPr/>
+                    <a:lstStyle/>
+                    <a:p>
+                      <a:pPr algn="l"/>
+                      <a:r>
+                        <a:rPr sz="1050" b="0">
+                          <a:solidFill>
+                            <a:srgbClr val="1A2332"/>
+                          </a:solidFill>
+                          <a:latin typeface="Calibri"/>
+                        </a:rPr>
+                        <a:t>Threshold Rule  (literal, Eq. 18)</a:t>
+                      </a:r>
+                    </a:p>
+                  </a:txBody>
+                  <a:tcPr marL="45000" marR="45000" marT="20000" marB="20000" anchor="ctr">
+                    <a:solidFill>
+                      <a:srgbClr val="FFF4F4"/>
+                    </a:solidFill>
+                  </a:tcPr>
+                </a:tc>
+                <a:tc>
+                  <a:txBody>
+                    <a:bodyPr/>
+                    <a:lstStyle/>
+                    <a:p>
+                      <a:pPr algn="r"/>
+                      <a:r>
+                        <a:rPr sz="1050" b="0">
+                          <a:solidFill>
+                            <a:srgbClr val="1A2332"/>
+                          </a:solidFill>
+                          <a:latin typeface="Calibri"/>
+                        </a:rPr>
+                        <a:t>−0.288934</a:t>
+                      </a:r>
+                    </a:p>
+                  </a:txBody>
+                  <a:tcPr marL="45000" marR="45000" marT="20000" marB="20000" anchor="ctr">
+                    <a:solidFill>
+                      <a:srgbClr val="FFF4F4"/>
+                    </a:solidFill>
+                  </a:tcPr>
+                </a:tc>
+                <a:tc>
+                  <a:txBody>
+                    <a:bodyPr/>
+                    <a:lstStyle/>
+                    <a:p>
+                      <a:pPr algn="r"/>
+                      <a:r>
+                        <a:rPr sz="1050" b="0">
+                          <a:solidFill>
+                            <a:srgbClr val="1A2332"/>
+                          </a:solidFill>
+                          <a:latin typeface="Calibri"/>
+                        </a:rPr>
+                        <a:t>+0.022600</a:t>
+                      </a:r>
+                    </a:p>
+                  </a:txBody>
+                  <a:tcPr marL="45000" marR="45000" marT="20000" marB="20000" anchor="ctr">
+                    <a:solidFill>
+                      <a:srgbClr val="FFF4F4"/>
+                    </a:solidFill>
+                  </a:tcPr>
+                </a:tc>
+                <a:tc>
+                  <a:txBody>
+                    <a:bodyPr/>
+                    <a:lstStyle/>
+                    <a:p>
+                      <a:pPr algn="ctr"/>
+                      <a:r>
+                        <a:rPr sz="1050" b="1">
+                          <a:solidFill>
+                            <a:srgbClr val="C0392B"/>
+                          </a:solidFill>
+                          <a:latin typeface="Calibri"/>
+                        </a:rPr>
+                        <a:t>✗  balance violated</a:t>
+                      </a:r>
+                    </a:p>
+                  </a:txBody>
+                  <a:tcPr marL="45000" marR="45000" marT="20000" marB="20000" anchor="ctr">
+                    <a:solidFill>
+                      <a:srgbClr val="FFF4F4"/>
+                    </a:solidFill>
+                  </a:tcPr>
+                </a:tc>
+                <a:tc>
+                  <a:txBody>
+                    <a:bodyPr/>
+                    <a:lstStyle/>
+                    <a:p>
+                      <a:pPr algn="r"/>
+                      <a:r>
+                        <a:rPr sz="1050" b="0">
+                          <a:solidFill>
+                            <a:srgbClr val="1A2332"/>
+                          </a:solidFill>
+                          <a:latin typeface="Calibri"/>
+                        </a:rPr>
+                        <a:t>&lt; 0.001 s</a:t>
+                      </a:r>
+                    </a:p>
+                  </a:txBody>
+                  <a:tcPr marL="45000" marR="45000" marT="20000" marB="20000" anchor="ctr">
+                    <a:solidFill>
+                      <a:srgbClr val="FFF4F4"/>
+                    </a:solidFill>
+                  </a:tcPr>
+                </a:tc>
+                <a:extLst>
+                  <a:ext uri="{0D108BD9-81ED-4DB2-BD59-A6C34878D82A}">
+                    <a16:rowId xmlns:a16="http://schemas.microsoft.com/office/drawing/2014/main" val="10002"/>
+                  </a:ext>
+                </a:extLst>
+              </a:tr>
+              <a:tr h="358333">
+                <a:tc>
+                  <a:txBody>
+                    <a:bodyPr/>
+                    <a:lstStyle/>
+                    <a:p>
+                      <a:pPr algn="l"/>
+                      <a:r>
+                        <a:rPr sz="1050" b="0">
+                          <a:solidFill>
+                            <a:srgbClr val="1A2332"/>
+                          </a:solidFill>
+                          <a:latin typeface="Calibri"/>
+                        </a:rPr>
+                        <a:t>Threshold Rule  (balanced)</a:t>
+                      </a:r>
+                    </a:p>
+                  </a:txBody>
+                  <a:tcPr marL="45000" marR="45000" marT="20000" marB="20000" anchor="ctr">
+                    <a:solidFill>
+                      <a:srgbClr val="FFFFFF"/>
+                    </a:solidFill>
+                  </a:tcPr>
+                </a:tc>
+                <a:tc>
+                  <a:txBody>
+                    <a:bodyPr/>
+                    <a:lstStyle/>
+                    <a:p>
+                      <a:pPr algn="r"/>
+                      <a:r>
+                        <a:rPr sz="1050" b="0">
+                          <a:solidFill>
+                            <a:srgbClr val="1A2332"/>
+                          </a:solidFill>
+                          <a:latin typeface="Calibri"/>
+                        </a:rPr>
+                        <a:t>−0.290423</a:t>
+                      </a:r>
+                    </a:p>
+                  </a:txBody>
+                  <a:tcPr marL="45000" marR="45000" marT="20000" marB="20000" anchor="ctr">
+                    <a:solidFill>
+                      <a:srgbClr val="FFFFFF"/>
+                    </a:solidFill>
+                  </a:tcPr>
+                </a:tc>
+                <a:tc>
+                  <a:txBody>
+                    <a:bodyPr/>
+                    <a:lstStyle/>
+                    <a:p>
+                      <a:pPr algn="r"/>
+                      <a:r>
+                        <a:rPr sz="1050" b="0">
+                          <a:solidFill>
+                            <a:srgbClr val="1A2332"/>
+                          </a:solidFill>
+                          <a:latin typeface="Calibri"/>
+                        </a:rPr>
+                        <a:t>+0.021111</a:t>
+                      </a:r>
+                    </a:p>
+                  </a:txBody>
+                  <a:tcPr marL="45000" marR="45000" marT="20000" marB="20000" anchor="ctr">
+                    <a:solidFill>
+                      <a:srgbClr val="FFFFFF"/>
+                    </a:solidFill>
+                  </a:tcPr>
+                </a:tc>
+                <a:tc>
+                  <a:txBody>
+                    <a:bodyPr/>
+                    <a:lstStyle/>
+                    <a:p>
+                      <a:pPr algn="ctr"/>
+                      <a:r>
+                        <a:rPr sz="1050" b="1">
+                          <a:solidFill>
+                            <a:srgbClr val="0E7C7B"/>
+                          </a:solidFill>
+                          <a:latin typeface="Calibri"/>
+                        </a:rPr>
+                        <a:t>✓</a:t>
+                      </a:r>
+                    </a:p>
+                  </a:txBody>
+                  <a:tcPr marL="45000" marR="45000" marT="20000" marB="20000" anchor="ctr">
+                    <a:solidFill>
+                      <a:srgbClr val="FFFFFF"/>
+                    </a:solidFill>
+                  </a:tcPr>
+                </a:tc>
+                <a:tc>
+                  <a:txBody>
+                    <a:bodyPr/>
+                    <a:lstStyle/>
+                    <a:p>
+                      <a:pPr algn="r"/>
+                      <a:r>
+                        <a:rPr sz="1050" b="0">
+                          <a:solidFill>
+                            <a:srgbClr val="1A2332"/>
+                          </a:solidFill>
+                          <a:latin typeface="Calibri"/>
+                        </a:rPr>
+                        <a:t>&lt; 0.001 s</a:t>
+                      </a:r>
+                    </a:p>
+                  </a:txBody>
+                  <a:tcPr marL="45000" marR="45000" marT="20000" marB="20000" anchor="ctr">
+                    <a:solidFill>
+                      <a:srgbClr val="FFFFFF"/>
+                    </a:solidFill>
+                  </a:tcPr>
+                </a:tc>
+                <a:extLst>
+                  <a:ext uri="{0D108BD9-81ED-4DB2-BD59-A6C34878D82A}">
+                    <a16:rowId xmlns:a16="http://schemas.microsoft.com/office/drawing/2014/main" val="10003"/>
+                  </a:ext>
+                </a:extLst>
+              </a:tr>
+              <a:tr h="358333">
+                <a:tc>
+                  <a:txBody>
+                    <a:bodyPr/>
+                    <a:lstStyle/>
+                    <a:p>
+                      <a:pPr algn="l"/>
+                      <a:r>
+                        <a:rPr sz="1050" b="0">
+                          <a:solidFill>
+                            <a:srgbClr val="1A2332"/>
+                          </a:solidFill>
+                          <a:latin typeface="Calibri"/>
+                        </a:rPr>
+                        <a:t>Dynamic Programming  (exact)</a:t>
+                      </a:r>
+                    </a:p>
+                  </a:txBody>
+                  <a:tcPr marL="45000" marR="45000" marT="20000" marB="20000" anchor="ctr">
+                    <a:solidFill>
+                      <a:srgbClr val="FFFFFF"/>
+                    </a:solidFill>
+                  </a:tcPr>
+                </a:tc>
+                <a:tc>
+                  <a:txBody>
+                    <a:bodyPr/>
+                    <a:lstStyle/>
+                    <a:p>
+                      <a:pPr algn="r"/>
+                      <a:r>
+                        <a:rPr sz="1050" b="0">
+                          <a:solidFill>
+                            <a:srgbClr val="1A2332"/>
+                          </a:solidFill>
+                          <a:latin typeface="Calibri"/>
+                        </a:rPr>
+                        <a:t>−0.290423</a:t>
+                      </a:r>
+                    </a:p>
+                  </a:txBody>
+                  <a:tcPr marL="45000" marR="45000" marT="20000" marB="20000" anchor="ctr">
+                    <a:solidFill>
+                      <a:srgbClr val="FFFFFF"/>
+                    </a:solidFill>
+                  </a:tcPr>
+                </a:tc>
+                <a:tc>
+                  <a:txBody>
+                    <a:bodyPr/>
+                    <a:lstStyle/>
+                    <a:p>
+                      <a:pPr algn="r"/>
+                      <a:r>
+                        <a:rPr sz="1050" b="0">
+                          <a:solidFill>
+                            <a:srgbClr val="1A2332"/>
+                          </a:solidFill>
+                          <a:latin typeface="Calibri"/>
+                        </a:rPr>
+                        <a:t>+0.021111</a:t>
+                      </a:r>
+                    </a:p>
+                  </a:txBody>
+                  <a:tcPr marL="45000" marR="45000" marT="20000" marB="20000" anchor="ctr">
+                    <a:solidFill>
+                      <a:srgbClr val="FFFFFF"/>
+                    </a:solidFill>
+                  </a:tcPr>
+                </a:tc>
+                <a:tc>
+                  <a:txBody>
+                    <a:bodyPr/>
+                    <a:lstStyle/>
+                    <a:p>
+                      <a:pPr algn="ctr"/>
+                      <a:r>
+                        <a:rPr sz="1050" b="1">
+                          <a:solidFill>
+                            <a:srgbClr val="0E7C7B"/>
+                          </a:solidFill>
+                          <a:latin typeface="Calibri"/>
+                        </a:rPr>
+                        <a:t>✓</a:t>
+                      </a:r>
+                    </a:p>
+                  </a:txBody>
+                  <a:tcPr marL="45000" marR="45000" marT="20000" marB="20000" anchor="ctr">
+                    <a:solidFill>
+                      <a:srgbClr val="FFFFFF"/>
+                    </a:solidFill>
+                  </a:tcPr>
+                </a:tc>
+                <a:tc>
+                  <a:txBody>
+                    <a:bodyPr/>
+                    <a:lstStyle/>
+                    <a:p>
+                      <a:pPr algn="r"/>
+                      <a:r>
+                        <a:rPr sz="1050" b="0">
+                          <a:solidFill>
+                            <a:srgbClr val="1A2332"/>
+                          </a:solidFill>
+                          <a:latin typeface="Calibri"/>
+                        </a:rPr>
+                        <a:t>0.020 s</a:t>
+                      </a:r>
+                    </a:p>
+                  </a:txBody>
+                  <a:tcPr marL="45000" marR="45000" marT="20000" marB="20000" anchor="ctr">
+                    <a:solidFill>
+                      <a:srgbClr val="FFFFFF"/>
+                    </a:solidFill>
+                  </a:tcPr>
+                </a:tc>
+                <a:extLst>
+                  <a:ext uri="{0D108BD9-81ED-4DB2-BD59-A6C34878D82A}">
+                    <a16:rowId xmlns:a16="http://schemas.microsoft.com/office/drawing/2014/main" val="10004"/>
+                  </a:ext>
+                </a:extLst>
+              </a:tr>
+              <a:tr h="358335">
+                <a:tc>
+                  <a:txBody>
+                    <a:bodyPr/>
+                    <a:lstStyle/>
+                    <a:p>
+                      <a:pPr algn="l"/>
+                      <a:r>
+                        <a:rPr sz="1050" b="0">
+                          <a:solidFill>
+                            <a:srgbClr val="1A2332"/>
+                          </a:solidFill>
+                          <a:latin typeface="Calibri"/>
+                        </a:rPr>
+                        <a:t>Simulated Annealing  (quantum-inspired)</a:t>
+                      </a:r>
+                    </a:p>
+                  </a:txBody>
+                  <a:tcPr marL="45000" marR="45000" marT="20000" marB="20000" anchor="ctr">
+                    <a:solidFill>
+                      <a:srgbClr val="FFFFFF"/>
+                    </a:solidFill>
+                  </a:tcPr>
+                </a:tc>
+                <a:tc>
+                  <a:txBody>
+                    <a:bodyPr/>
+                    <a:lstStyle/>
+                    <a:p>
+                      <a:pPr algn="r"/>
+                      <a:r>
+                        <a:rPr sz="1050" b="0">
+                          <a:solidFill>
+                            <a:srgbClr val="1A2332"/>
+                          </a:solidFill>
+                          <a:latin typeface="Calibri"/>
+                        </a:rPr>
+                        <a:t>−0.291188</a:t>
+                      </a:r>
+                    </a:p>
+                  </a:txBody>
+                  <a:tcPr marL="45000" marR="45000" marT="20000" marB="20000" anchor="ctr">
+                    <a:solidFill>
+                      <a:srgbClr val="FFFFFF"/>
+                    </a:solidFill>
+                  </a:tcPr>
+                </a:tc>
+                <a:tc>
+                  <a:txBody>
+                    <a:bodyPr/>
+                    <a:lstStyle/>
+                    <a:p>
+                      <a:pPr algn="r"/>
+                      <a:r>
+                        <a:rPr sz="1050" b="0">
+                          <a:solidFill>
+                            <a:srgbClr val="1A2332"/>
+                          </a:solidFill>
+                          <a:latin typeface="Calibri"/>
+                        </a:rPr>
+                        <a:t>+0.020346</a:t>
+                      </a:r>
+                    </a:p>
+                  </a:txBody>
+                  <a:tcPr marL="45000" marR="45000" marT="20000" marB="20000" anchor="ctr">
+                    <a:solidFill>
+                      <a:srgbClr val="FFFFFF"/>
+                    </a:solidFill>
+                  </a:tcPr>
+                </a:tc>
+                <a:tc>
+                  <a:txBody>
+                    <a:bodyPr/>
+                    <a:lstStyle/>
+                    <a:p>
+                      <a:pPr algn="ctr"/>
+                      <a:r>
+                        <a:rPr sz="1050" b="1">
+                          <a:solidFill>
+                            <a:srgbClr val="0E7C7B"/>
+                          </a:solidFill>
+                          <a:latin typeface="Calibri"/>
+                        </a:rPr>
+                        <a:t>✓</a:t>
+                      </a:r>
+                    </a:p>
+                  </a:txBody>
+                  <a:tcPr marL="45000" marR="45000" marT="20000" marB="20000" anchor="ctr">
+                    <a:solidFill>
+                      <a:srgbClr val="FFFFFF"/>
+                    </a:solidFill>
+                  </a:tcPr>
+                </a:tc>
+                <a:tc>
+                  <a:txBody>
+                    <a:bodyPr/>
+                    <a:lstStyle/>
+                    <a:p>
+                      <a:pPr algn="r"/>
+                      <a:r>
+                        <a:rPr sz="1050" b="0">
+                          <a:solidFill>
+                            <a:srgbClr val="1A2332"/>
+                          </a:solidFill>
+                          <a:latin typeface="Calibri"/>
+                        </a:rPr>
+                        <a:t>6.594 s</a:t>
+                      </a:r>
+                    </a:p>
+                  </a:txBody>
+                  <a:tcPr marL="45000" marR="45000" marT="20000" marB="20000" anchor="ctr">
+                    <a:solidFill>
+                      <a:srgbClr val="FFFFFF"/>
+                    </a:solidFill>
+                  </a:tcPr>
+                </a:tc>
+                <a:extLst>
+                  <a:ext uri="{0D108BD9-81ED-4DB2-BD59-A6C34878D82A}">
+                    <a16:rowId xmlns:a16="http://schemas.microsoft.com/office/drawing/2014/main" val="10005"/>
+                  </a:ext>
+                </a:extLst>
+              </a:tr>
+            </a:tbl>
+          </a:graphicData>
+        </a:graphic>
+      </p:graphicFrame>
+      <p:sp>
+        <p:nvSpPr>
+          <p:cNvPr id="7" name="Rounded Rectangle 6"/>
           <p:cNvSpPr/>
           <p:nvPr/>
         </p:nvSpPr>
         <p:spPr>
           <a:xfrm>
-            <a:off x="0" y="109728"/>
-            <a:ext cx="9144000" cy="27432"/>
+            <a:off x="457200" y="3310000"/>
+            <a:ext cx="8229600" cy="720000"/>
+          </a:xfrm>
+          <a:prstGeom prst="roundRect">
+            <a:avLst>
+              <a:gd name="adj" fmla="val 6000"/>
+            </a:avLst>
+          </a:prstGeom>
+          <a:solidFill>
+            <a:srgbClr val="FFF4F4"/>
+          </a:solidFill>
+          <a:ln w="9525">
+            <a:solidFill>
+              <a:srgbClr val="F0C7C0"/>
+            </a:solidFill>
+          </a:ln>
+          <a:effectLst/>
+        </p:spPr>
+        <p:style>
+          <a:lnRef idx="1">
+            <a:schemeClr val="accent1"/>
+          </a:lnRef>
+          <a:fillRef idx="3">
+            <a:schemeClr val="accent1"/>
+          </a:fillRef>
+          <a:effectRef idx="2">
+            <a:schemeClr val="accent1"/>
+          </a:effectRef>
+          <a:fontRef idx="minor">
+            <a:schemeClr val="lt1"/>
+          </a:fontRef>
+        </p:style>
+        <p:txBody>
+          <a:bodyPr rtlCol="0" anchor="ctr"/>
+          <a:lstStyle/>
+          <a:p>
+            <a:pPr algn="ctr"/>
+            <a:endParaRPr/>
+          </a:p>
+        </p:txBody>
+      </p:sp>
+      <p:sp>
+        <p:nvSpPr>
+          <p:cNvPr id="8" name="TextBox 7"/>
+          <p:cNvSpPr txBox="1"/>
+          <p:nvPr/>
+        </p:nvSpPr>
+        <p:spPr>
+          <a:xfrm>
+            <a:off x="607200" y="3370000"/>
+            <a:ext cx="7929600" cy="600000"/>
+          </a:xfrm>
+          <a:prstGeom prst="rect">
+            <a:avLst/>
+          </a:prstGeom>
+          <a:noFill/>
+        </p:spPr>
+        <p:txBody>
+          <a:bodyPr wrap="square" lIns="0" tIns="0" rIns="0" bIns="0" anchor="t">
+            <a:spAutoFit/>
+          </a:bodyPr>
+          <a:lstStyle/>
+          <a:p>
+            <a:pPr algn="l">
+              <a:lnSpc>
+                <a:spcPct val="108000"/>
+              </a:lnSpc>
+              <a:spcAft>
+                <a:spcPts val="0"/>
+              </a:spcAft>
+            </a:pPr>
+            <a:r>
+              <a:rPr sz="1050" b="1" i="0">
+                <a:solidFill>
+                  <a:srgbClr val="C0392B"/>
+                </a:solidFill>
+                <a:latin typeface="Calibri"/>
+              </a:rPr>
+              <a:t>Why not report the literal threshold rule as the winner?  </a:t>
+            </a:r>
+            <a:r>
+              <a:rPr sz="1050" b="0" i="0">
+                <a:solidFill>
+                  <a:srgbClr val="1A2332"/>
+                </a:solidFill>
+                <a:latin typeface="Calibri"/>
+              </a:rPr>
+              <a:t>Its SRS is nominally higher, but it reduces releases by 72.9 Mm³ — far beyond the ±31.15 Mm³ cumulative-balance budget — so it is inadmissible under the official constraints.</a:t>
+            </a:r>
+          </a:p>
+        </p:txBody>
+      </p:sp>
+      <p:sp>
+        <p:nvSpPr>
+          <p:cNvPr id="9" name="Rounded Rectangle 8"/>
+          <p:cNvSpPr/>
+          <p:nvPr/>
+        </p:nvSpPr>
+        <p:spPr>
+          <a:xfrm>
+            <a:off x="457200" y="4180000"/>
+            <a:ext cx="4024800" cy="733500"/>
+          </a:xfrm>
+          <a:prstGeom prst="roundRect">
+            <a:avLst>
+              <a:gd name="adj" fmla="val 6000"/>
+            </a:avLst>
+          </a:prstGeom>
+          <a:solidFill>
+            <a:srgbClr val="FFFFFF"/>
+          </a:solidFill>
+          <a:ln w="9525">
+            <a:solidFill>
+              <a:srgbClr val="D0DCE8"/>
+            </a:solidFill>
+          </a:ln>
+          <a:effectLst/>
+        </p:spPr>
+        <p:style>
+          <a:lnRef idx="1">
+            <a:schemeClr val="accent1"/>
+          </a:lnRef>
+          <a:fillRef idx="3">
+            <a:schemeClr val="accent1"/>
+          </a:fillRef>
+          <a:effectRef idx="2">
+            <a:schemeClr val="accent1"/>
+          </a:effectRef>
+          <a:fontRef idx="minor">
+            <a:schemeClr val="lt1"/>
+          </a:fontRef>
+        </p:style>
+        <p:txBody>
+          <a:bodyPr rtlCol="0" anchor="ctr"/>
+          <a:lstStyle/>
+          <a:p>
+            <a:pPr algn="ctr"/>
+            <a:endParaRPr/>
+          </a:p>
+        </p:txBody>
+      </p:sp>
+      <p:sp>
+        <p:nvSpPr>
+          <p:cNvPr id="10" name="TextBox 9"/>
+          <p:cNvSpPr txBox="1"/>
+          <p:nvPr/>
+        </p:nvSpPr>
+        <p:spPr>
+          <a:xfrm>
+            <a:off x="597200" y="4240000"/>
+            <a:ext cx="3744800" cy="260000"/>
+          </a:xfrm>
+          <a:prstGeom prst="rect">
+            <a:avLst/>
+          </a:prstGeom>
+          <a:noFill/>
+        </p:spPr>
+        <p:txBody>
+          <a:bodyPr wrap="square" lIns="0" tIns="0" rIns="0" bIns="0" anchor="t">
+            <a:spAutoFit/>
+          </a:bodyPr>
+          <a:lstStyle/>
+          <a:p>
+            <a:pPr algn="l">
+              <a:spcAft>
+                <a:spcPts val="0"/>
+              </a:spcAft>
+            </a:pPr>
+            <a:r>
+              <a:rPr sz="1300" b="1" i="0">
+                <a:solidFill>
+                  <a:srgbClr val="1B3A6B"/>
+                </a:solidFill>
+                <a:latin typeface="Georgia"/>
+              </a:rPr>
+              <a:t>−0.290423 = −0.290423</a:t>
+            </a:r>
+          </a:p>
+        </p:txBody>
+      </p:sp>
+      <p:sp>
+        <p:nvSpPr>
+          <p:cNvPr id="11" name="TextBox 10"/>
+          <p:cNvSpPr txBox="1"/>
+          <p:nvPr/>
+        </p:nvSpPr>
+        <p:spPr>
+          <a:xfrm>
+            <a:off x="597200" y="4500000"/>
+            <a:ext cx="3744800" cy="353500"/>
+          </a:xfrm>
+          <a:prstGeom prst="rect">
+            <a:avLst/>
+          </a:prstGeom>
+          <a:noFill/>
+        </p:spPr>
+        <p:txBody>
+          <a:bodyPr wrap="square" lIns="0" tIns="0" rIns="0" bIns="0" anchor="t">
+            <a:spAutoFit/>
+          </a:bodyPr>
+          <a:lstStyle/>
+          <a:p>
+            <a:pPr algn="l">
+              <a:lnSpc>
+                <a:spcPct val="105000"/>
+              </a:lnSpc>
+              <a:spcAft>
+                <a:spcPts val="0"/>
+              </a:spcAft>
+            </a:pPr>
+            <a:r>
+              <a:rPr sz="950" b="0" i="0">
+                <a:solidFill>
+                  <a:srgbClr val="6B7A8D"/>
+                </a:solidFill>
+                <a:latin typeface="Calibri"/>
+              </a:rPr>
+              <a:t>DP-exact matches the balanced threshold rule exactly — confirms both find the true optimum within the discrete level set.</a:t>
+            </a:r>
+          </a:p>
+        </p:txBody>
+      </p:sp>
+      <p:sp>
+        <p:nvSpPr>
+          <p:cNvPr id="12" name="Rounded Rectangle 11"/>
+          <p:cNvSpPr/>
+          <p:nvPr/>
+        </p:nvSpPr>
+        <p:spPr>
+          <a:xfrm>
+            <a:off x="4662000" y="4180000"/>
+            <a:ext cx="4024800" cy="733500"/>
+          </a:xfrm>
+          <a:prstGeom prst="roundRect">
+            <a:avLst>
+              <a:gd name="adj" fmla="val 6000"/>
+            </a:avLst>
+          </a:prstGeom>
+          <a:solidFill>
+            <a:srgbClr val="FFFFFF"/>
+          </a:solidFill>
+          <a:ln w="9525">
+            <a:solidFill>
+              <a:srgbClr val="D0DCE8"/>
+            </a:solidFill>
+          </a:ln>
+          <a:effectLst/>
+        </p:spPr>
+        <p:style>
+          <a:lnRef idx="1">
+            <a:schemeClr val="accent1"/>
+          </a:lnRef>
+          <a:fillRef idx="3">
+            <a:schemeClr val="accent1"/>
+          </a:fillRef>
+          <a:effectRef idx="2">
+            <a:schemeClr val="accent1"/>
+          </a:effectRef>
+          <a:fontRef idx="minor">
+            <a:schemeClr val="lt1"/>
+          </a:fontRef>
+        </p:style>
+        <p:txBody>
+          <a:bodyPr rtlCol="0" anchor="ctr"/>
+          <a:lstStyle/>
+          <a:p>
+            <a:pPr algn="ctr"/>
+            <a:endParaRPr/>
+          </a:p>
+        </p:txBody>
+      </p:sp>
+      <p:sp>
+        <p:nvSpPr>
+          <p:cNvPr id="13" name="TextBox 12"/>
+          <p:cNvSpPr txBox="1"/>
+          <p:nvPr/>
+        </p:nvSpPr>
+        <p:spPr>
+          <a:xfrm>
+            <a:off x="4802000" y="4240000"/>
+            <a:ext cx="3744800" cy="260000"/>
+          </a:xfrm>
+          <a:prstGeom prst="rect">
+            <a:avLst/>
+          </a:prstGeom>
+          <a:noFill/>
+        </p:spPr>
+        <p:txBody>
+          <a:bodyPr wrap="square" lIns="0" tIns="0" rIns="0" bIns="0" anchor="t">
+            <a:spAutoFit/>
+          </a:bodyPr>
+          <a:lstStyle/>
+          <a:p>
+            <a:pPr algn="l">
+              <a:spcAft>
+                <a:spcPts val="0"/>
+              </a:spcAft>
+            </a:pPr>
+            <a:r>
+              <a:rPr sz="1300" b="1" i="0">
+                <a:solidFill>
+                  <a:srgbClr val="1B3A6B"/>
+                </a:solidFill>
+                <a:latin typeface="Georgia"/>
+              </a:rPr>
+              <a:t>6.594 s  vs.  0.020 s</a:t>
+            </a:r>
+          </a:p>
+        </p:txBody>
+      </p:sp>
+      <p:sp>
+        <p:nvSpPr>
+          <p:cNvPr id="14" name="TextBox 13"/>
+          <p:cNvSpPr txBox="1"/>
+          <p:nvPr/>
+        </p:nvSpPr>
+        <p:spPr>
+          <a:xfrm>
+            <a:off x="4802000" y="4500000"/>
+            <a:ext cx="3744800" cy="353500"/>
+          </a:xfrm>
+          <a:prstGeom prst="rect">
+            <a:avLst/>
+          </a:prstGeom>
+          <a:noFill/>
+        </p:spPr>
+        <p:txBody>
+          <a:bodyPr wrap="square" lIns="0" tIns="0" rIns="0" bIns="0" anchor="t">
+            <a:spAutoFit/>
+          </a:bodyPr>
+          <a:lstStyle/>
+          <a:p>
+            <a:pPr algn="l">
+              <a:lnSpc>
+                <a:spcPct val="105000"/>
+              </a:lnSpc>
+              <a:spcAft>
+                <a:spcPts val="0"/>
+              </a:spcAft>
+            </a:pPr>
+            <a:r>
+              <a:rPr sz="950" b="0" i="0">
+                <a:solidFill>
+                  <a:srgbClr val="6B7A8D"/>
+                </a:solidFill>
+                <a:latin typeface="Calibri"/>
+              </a:rPr>
+              <a:t>Quantum-inspired annealing (SA) needs ~330× the runtime of exact DP and still converges to a slightly worse SRS — DP remains the strongest classical baseline.</a:t>
+            </a:r>
+          </a:p>
+        </p:txBody>
+      </p:sp>
+    </p:spTree>
+  </p:cSld>
+  <p:clrMapOvr>
+    <a:masterClrMapping/>
+  </p:clrMapOvr>
+</p:sld>
+</file>
+
+<file path=ppt/slides/slide9.xml><?xml version="1.0" encoding="utf-8"?>
+<p:sld xmlns:a="http://schemas.openxmlformats.org/drawingml/2006/main" xmlns:r="http://schemas.openxmlformats.org/officeDocument/2006/relationships" xmlns:p="http://schemas.openxmlformats.org/presentationml/2006/main">
+  <p:cSld>
+    <p:bg>
+      <p:bgPr>
+        <a:solidFill>
+          <a:srgbClr val="F7F9FC"/>
+        </a:solidFill>
+        <a:effectLst/>
+      </p:bgPr>
+    </p:bg>
+    <p:spTree>
+      <p:nvGrpSpPr>
+        <p:cNvPr id="1" name=""/>
+        <p:cNvGrpSpPr/>
+        <p:nvPr/>
+      </p:nvGrpSpPr>
+      <p:grpSpPr>
+        <a:xfrm>
+          <a:off x="0" y="0"/>
+          <a:ext cx="0" cy="0"/>
+          <a:chOff x="0" y="0"/>
+          <a:chExt cx="0" cy="0"/>
+        </a:xfrm>
+      </p:grpSpPr>
+      <p:sp>
+        <p:nvSpPr>
+          <p:cNvPr id="2" name="Rectangle 1"/>
+          <p:cNvSpPr/>
+          <p:nvPr/>
+        </p:nvSpPr>
+        <p:spPr>
+          <a:xfrm>
+            <a:off x="0" y="0"/>
+            <a:ext cx="9144000" cy="868680"/>
           </a:xfrm>
           <a:prstGeom prst="rect">
             <a:avLst/>
           </a:prstGeom>
           <a:solidFill>
-            <a:srgbClr val="2E5FA3">
-              <a:alpha val="50000"/>
-            </a:srgbClr>
+            <a:srgbClr val="1B3A6B"/>
           </a:solidFill>
-          <a:ln w="12700">
-            <a:solidFill>
-              <a:srgbClr val="2E5FA3"/>
-            </a:solidFill>
-            <a:prstDash val="solid"/>
+          <a:ln>
+            <a:noFill/>
           </a:ln>
+          <a:effectLst/>
         </p:spPr>
+        <p:style>
+          <a:lnRef idx="1">
+            <a:schemeClr val="accent1"/>
+          </a:lnRef>
+          <a:fillRef idx="3">
+            <a:schemeClr val="accent1"/>
+          </a:fillRef>
+          <a:effectRef idx="2">
+            <a:schemeClr val="accent1"/>
+          </a:effectRef>
+          <a:fontRef idx="minor">
+            <a:schemeClr val="lt1"/>
+          </a:fontRef>
+        </p:style>
         <p:txBody>
-          <a:bodyPr/>
+          <a:bodyPr rtlCol="0" anchor="ctr"/>
           <a:lstStyle/>
           <a:p>
-            <a:endParaRPr lang="es-MX"/>
+            <a:pPr algn="ctr"/>
+            <a:endParaRPr/>
           </a:p>
         </p:txBody>
       </p:sp>
       <p:sp>
         <p:nvSpPr>
-          <p:cNvPr id="4" name="Text 2"/>
+          <p:cNvPr id="3" name="Rectangle 2"/>
           <p:cNvSpPr/>
           <p:nvPr/>
         </p:nvSpPr>
         <p:spPr>
           <a:xfrm>
-            <a:off x="457200" y="256032"/>
-            <a:ext cx="8229600" cy="658368"/>
+            <a:off x="0" y="804672"/>
+            <a:ext cx="9144000" cy="64008"/>
+          </a:xfrm>
+          <a:prstGeom prst="rect">
+            <a:avLst/>
+          </a:prstGeom>
+          <a:solidFill>
+            <a:srgbClr val="2DC9A4"/>
+          </a:solidFill>
+          <a:ln>
+            <a:noFill/>
+          </a:ln>
+          <a:effectLst/>
+        </p:spPr>
+        <p:style>
+          <a:lnRef idx="1">
+            <a:schemeClr val="accent1"/>
+          </a:lnRef>
+          <a:fillRef idx="3">
+            <a:schemeClr val="accent1"/>
+          </a:fillRef>
+          <a:effectRef idx="2">
+            <a:schemeClr val="accent1"/>
+          </a:effectRef>
+          <a:fontRef idx="minor">
+            <a:schemeClr val="lt1"/>
+          </a:fontRef>
+        </p:style>
+        <p:txBody>
+          <a:bodyPr rtlCol="0" anchor="ctr"/>
+          <a:lstStyle/>
+          <a:p>
+            <a:pPr algn="ctr"/>
+            <a:endParaRPr/>
+          </a:p>
+        </p:txBody>
+      </p:sp>
+      <p:sp>
+        <p:nvSpPr>
+          <p:cNvPr id="4" name="TextBox 3"/>
+          <p:cNvSpPr txBox="1"/>
+          <p:nvPr/>
+        </p:nvSpPr>
+        <p:spPr>
+          <a:xfrm>
+            <a:off x="457200" y="0"/>
+            <a:ext cx="7800000" cy="868680"/>
           </a:xfrm>
           <a:prstGeom prst="rect">
             <a:avLst/>
           </a:prstGeom>
           <a:noFill/>
-          <a:ln/>
         </p:spPr>
         <p:txBody>
-          <a:bodyPr wrap="square" rtlCol="0" anchor="ctr"/>
+          <a:bodyPr wrap="square" lIns="0" tIns="0" rIns="0" bIns="0" anchor="ctr">
+            <a:spAutoFit/>
+          </a:bodyPr>
           <a:lstStyle/>
           <a:p>
-            <a:pPr marL="0" indent="0">
-              <a:buNone/>
+            <a:pPr algn="l">
+              <a:spcAft>
+                <a:spcPts val="0"/>
+              </a:spcAft>
             </a:pPr>
             <a:r>
-              <a:rPr lang="en-US" sz="3600" b="1" dirty="0">
+              <a:rPr sz="2200" b="1" i="0">
                 <a:solidFill>
                   <a:srgbClr val="FFFFFF"/>
                 </a:solidFill>
-                <a:latin typeface="Georgia" pitchFamily="34" charset="0"/>
-                <a:ea typeface="Georgia" pitchFamily="34" charset="-122"/>
-                <a:cs typeface="Georgia" pitchFamily="34" charset="-120"/>
+                <a:latin typeface="Georgia"/>
               </a:rPr>
-              <a:t>Conclusions</a:t>
+              <a:t>Cost Decomposition &amp; Scaling Trend</a:t>
             </a:r>
-            <a:endParaRPr lang="en-US" sz="3600" dirty="0"/>
           </a:p>
         </p:txBody>
       </p:sp>
       <p:sp>
         <p:nvSpPr>
-          <p:cNvPr id="5" name="Shape 3"/>
+          <p:cNvPr id="5" name="Rounded Rectangle 4"/>
           <p:cNvSpPr/>
           <p:nvPr/>
         </p:nvSpPr>
         <p:spPr>
           <a:xfrm>
-            <a:off x="457200" y="987552"/>
-            <a:ext cx="8229600" cy="621792"/>
+            <a:off x="457200" y="1000000"/>
+            <a:ext cx="4024800" cy="2900000"/>
           </a:xfrm>
           <a:prstGeom prst="roundRect">
             <a:avLst>
-              <a:gd name="adj" fmla="val 14706"/>
+              <a:gd name="adj" fmla="val 6000"/>
             </a:avLst>
           </a:prstGeom>
           <a:solidFill>
-            <a:srgbClr val="2DC9A4">
-              <a:alpha val="15000"/>
-            </a:srgbClr>
+            <a:srgbClr val="FFFFFF"/>
           </a:solidFill>
-          <a:ln w="19050">
+          <a:ln w="9525">
             <a:solidFill>
-              <a:srgbClr val="2DC9A4"/>
+              <a:srgbClr val="D0DCE8"/>
             </a:solidFill>
-            <a:prstDash val="solid"/>
           </a:ln>
+          <a:effectLst/>
         </p:spPr>
+        <p:style>
+          <a:lnRef idx="1">
+            <a:schemeClr val="accent1"/>
+          </a:lnRef>
+          <a:fillRef idx="3">
+            <a:schemeClr val="accent1"/>
+          </a:fillRef>
+          <a:effectRef idx="2">
+            <a:schemeClr val="accent1"/>
+          </a:effectRef>
+          <a:fontRef idx="minor">
+            <a:schemeClr val="lt1"/>
+          </a:fontRef>
+        </p:style>
         <p:txBody>
-          <a:bodyPr/>
+          <a:bodyPr rtlCol="0" anchor="ctr"/>
           <a:lstStyle/>
           <a:p>
-            <a:endParaRPr lang="es-MX"/>
+            <a:pPr algn="ctr"/>
+            <a:endParaRPr/>
           </a:p>
         </p:txBody>
       </p:sp>
+      <p:pic>
+        <p:nvPicPr>
+          <p:cNvPr id="6" name="Picture 5" descr="cost_decomposition.png"/>
+          <p:cNvPicPr>
+            <a:picLocks noChangeAspect="1"/>
+          </p:cNvPicPr>
+          <p:nvPr/>
+        </p:nvPicPr>
+        <p:blipFill>
+          <a:blip r:embed="rId2"/>
+          <a:stretch>
+            <a:fillRect/>
+          </a:stretch>
+        </p:blipFill>
+        <p:spPr>
+          <a:xfrm>
+            <a:off x="517200" y="1385055"/>
+            <a:ext cx="3904800" cy="2129890"/>
+          </a:xfrm>
+          <a:prstGeom prst="rect">
+            <a:avLst/>
+          </a:prstGeom>
+        </p:spPr>
+      </p:pic>
       <p:sp>
         <p:nvSpPr>
-          <p:cNvPr id="6" name="Text 4"/>
+          <p:cNvPr id="7" name="Rounded Rectangle 6"/>
           <p:cNvSpPr/>
           <p:nvPr/>
         </p:nvSpPr>
         <p:spPr>
           <a:xfrm>
-            <a:off x="594360" y="1024128"/>
-            <a:ext cx="7955280" cy="548640"/>
+            <a:off x="4662000" y="1000000"/>
+            <a:ext cx="4024800" cy="2900000"/>
+          </a:xfrm>
+          <a:prstGeom prst="roundRect">
+            <a:avLst>
+              <a:gd name="adj" fmla="val 6000"/>
+            </a:avLst>
+          </a:prstGeom>
+          <a:solidFill>
+            <a:srgbClr val="FFFFFF"/>
+          </a:solidFill>
+          <a:ln w="9525">
+            <a:solidFill>
+              <a:srgbClr val="D0DCE8"/>
+            </a:solidFill>
+          </a:ln>
+          <a:effectLst/>
+        </p:spPr>
+        <p:style>
+          <a:lnRef idx="1">
+            <a:schemeClr val="accent1"/>
+          </a:lnRef>
+          <a:fillRef idx="3">
+            <a:schemeClr val="accent1"/>
+          </a:fillRef>
+          <a:effectRef idx="2">
+            <a:schemeClr val="accent1"/>
+          </a:effectRef>
+          <a:fontRef idx="minor">
+            <a:schemeClr val="lt1"/>
+          </a:fontRef>
+        </p:style>
+        <p:txBody>
+          <a:bodyPr rtlCol="0" anchor="ctr"/>
+          <a:lstStyle/>
+          <a:p>
+            <a:pPr algn="ctr"/>
+            <a:endParaRPr/>
+          </a:p>
+        </p:txBody>
+      </p:sp>
+      <p:pic>
+        <p:nvPicPr>
+          <p:cNvPr id="8" name="Picture 7" descr="scaling_runtime.png"/>
+          <p:cNvPicPr>
+            <a:picLocks noChangeAspect="1"/>
+          </p:cNvPicPr>
+          <p:nvPr/>
+        </p:nvPicPr>
+        <p:blipFill>
+          <a:blip r:embed="rId3"/>
+          <a:stretch>
+            <a:fillRect/>
+          </a:stretch>
+        </p:blipFill>
+        <p:spPr>
+          <a:xfrm>
+            <a:off x="4722000" y="1690733"/>
+            <a:ext cx="3904800" cy="1518533"/>
+          </a:xfrm>
+          <a:prstGeom prst="rect">
+            <a:avLst/>
+          </a:prstGeom>
+        </p:spPr>
+      </p:pic>
+      <p:sp>
+        <p:nvSpPr>
+          <p:cNvPr id="9" name="Rounded Rectangle 8"/>
+          <p:cNvSpPr/>
+          <p:nvPr/>
+        </p:nvSpPr>
+        <p:spPr>
+          <a:xfrm>
+            <a:off x="457200" y="4050000"/>
+            <a:ext cx="4024800" cy="863500"/>
+          </a:xfrm>
+          <a:prstGeom prst="roundRect">
+            <a:avLst>
+              <a:gd name="adj" fmla="val 6000"/>
+            </a:avLst>
+          </a:prstGeom>
+          <a:solidFill>
+            <a:srgbClr val="F0FBF8"/>
+          </a:solidFill>
+          <a:ln w="9525">
+            <a:solidFill>
+              <a:srgbClr val="BFE9DC"/>
+            </a:solidFill>
+          </a:ln>
+          <a:effectLst/>
+        </p:spPr>
+        <p:style>
+          <a:lnRef idx="1">
+            <a:schemeClr val="accent1"/>
+          </a:lnRef>
+          <a:fillRef idx="3">
+            <a:schemeClr val="accent1"/>
+          </a:fillRef>
+          <a:effectRef idx="2">
+            <a:schemeClr val="accent1"/>
+          </a:effectRef>
+          <a:fontRef idx="minor">
+            <a:schemeClr val="lt1"/>
+          </a:fontRef>
+        </p:style>
+        <p:txBody>
+          <a:bodyPr rtlCol="0" anchor="ctr"/>
+          <a:lstStyle/>
+          <a:p>
+            <a:pPr algn="ctr"/>
+            <a:endParaRPr/>
+          </a:p>
+        </p:txBody>
+      </p:sp>
+      <p:sp>
+        <p:nvSpPr>
+          <p:cNvPr id="10" name="TextBox 9"/>
+          <p:cNvSpPr txBox="1"/>
+          <p:nvPr/>
+        </p:nvSpPr>
+        <p:spPr>
+          <a:xfrm>
+            <a:off x="597200" y="4110000"/>
+            <a:ext cx="3744800" cy="743500"/>
           </a:xfrm>
           <a:prstGeom prst="rect">
             <a:avLst/>
           </a:prstGeom>
           <a:noFill/>
-          <a:ln/>
         </p:spPr>
         <p:txBody>
-          <a:bodyPr wrap="square" rtlCol="0" anchor="ctr"/>
+          <a:bodyPr wrap="square" lIns="0" tIns="0" rIns="0" bIns="0" anchor="t">
+            <a:spAutoFit/>
+          </a:bodyPr>
           <a:lstStyle/>
           <a:p>
-            <a:pPr marL="0" indent="0" algn="ctr">
-              <a:buNone/>
+            <a:pPr algn="l">
+              <a:lnSpc>
+                <a:spcPct val="108000"/>
+              </a:lnSpc>
+              <a:spcAft>
+                <a:spcPts val="0"/>
+              </a:spcAft>
             </a:pPr>
             <a:r>
-              <a:rPr lang="en-US" sz="1300" b="1" dirty="0">
+              <a:rPr sz="969" b="0" i="0">
                 <a:solidFill>
-                  <a:srgbClr val="FFFFFF"/>
+                  <a:srgbClr val="1A2332"/>
                 </a:solidFill>
-                <a:latin typeface="Georgia" pitchFamily="34" charset="0"/>
-                <a:ea typeface="Georgia" pitchFamily="34" charset="-122"/>
-                <a:cs typeface="Georgia" pitchFamily="34" charset="-120"/>
+                <a:latin typeface="Calibri"/>
               </a:rPr>
-              <a:t>Best feasible result:  ΔSRS = +0.021111  (DP &amp; Threshold Rule)  —  6.78 % reduction in total penalized cost</a:t>
+              <a:t>DP cuts the critical-storage penalty from 0.3115 to 0.2796 </a:t>
             </a:r>
-            <a:endParaRPr lang="en-US" sz="1300" dirty="0"/>
+            <a:r>
+              <a:rPr sz="969" b="1" i="0">
+                <a:solidFill>
+                  <a:srgbClr val="0E7C7B"/>
+                </a:solidFill>
+                <a:latin typeface="Calibri"/>
+              </a:rPr>
+              <a:t>(net cost −6.8%)</a:t>
+            </a:r>
+            <a:r>
+              <a:rPr sz="969" b="0" i="0">
+                <a:solidFill>
+                  <a:srgbClr val="1A2332"/>
+                </a:solidFill>
+                <a:latin typeface="Calibri"/>
+              </a:rPr>
+              <a:t>, paying only a small deviation (0.0106) and smoothness (0.0003) cost.</a:t>
+            </a:r>
           </a:p>
         </p:txBody>
       </p:sp>
       <p:sp>
         <p:nvSpPr>
-          <p:cNvPr id="7" name="Shape 5"/>
+          <p:cNvPr id="11" name="Rounded Rectangle 10"/>
           <p:cNvSpPr/>
           <p:nvPr/>
         </p:nvSpPr>
         <p:spPr>
           <a:xfrm>
-            <a:off x="457200" y="1737360"/>
-            <a:ext cx="4114800" cy="1371600"/>
+            <a:off x="4662000" y="4050000"/>
+            <a:ext cx="4024800" cy="863500"/>
           </a:xfrm>
           <a:prstGeom prst="roundRect">
             <a:avLst>
-              <a:gd name="adj" fmla="val 8000"/>
+              <a:gd name="adj" fmla="val 6000"/>
             </a:avLst>
           </a:prstGeom>
           <a:solidFill>
-            <a:srgbClr val="0D2035"/>
+            <a:srgbClr val="F0FBF8"/>
           </a:solidFill>
-          <a:ln w="19050">
+          <a:ln w="9525">
             <a:solidFill>
-              <a:srgbClr val="0E7C7B"/>
+              <a:srgbClr val="BFE9DC"/>
             </a:solidFill>
-            <a:prstDash val="solid"/>
           </a:ln>
-          <a:effectLst>
-            <a:outerShdw blurRad="76200" dist="25400" dir="2700000" algn="bl" rotWithShape="0">
-              <a:srgbClr val="000000">
-                <a:alpha val="10000"/>
-              </a:srgbClr>
-            </a:outerShdw>
-          </a:effectLst>
+          <a:effectLst/>
         </p:spPr>
+        <p:style>
+          <a:lnRef idx="1">
+            <a:schemeClr val="accent1"/>
+          </a:lnRef>
+          <a:fillRef idx="3">
+            <a:schemeClr val="accent1"/>
+          </a:fillRef>
+          <a:effectRef idx="2">
+            <a:schemeClr val="accent1"/>
+          </a:effectRef>
+          <a:fontRef idx="minor">
+            <a:schemeClr val="lt1"/>
+          </a:fontRef>
+        </p:style>
         <p:txBody>
-          <a:bodyPr/>
+          <a:bodyPr rtlCol="0" anchor="ctr"/>
           <a:lstStyle/>
           <a:p>
-            <a:endParaRPr lang="es-MX"/>
+            <a:pPr algn="ctr"/>
+            <a:endParaRPr/>
           </a:p>
         </p:txBody>
       </p:sp>
       <p:sp>
         <p:nvSpPr>
-          <p:cNvPr id="8" name="Shape 6"/>
-          <p:cNvSpPr/>
+          <p:cNvPr id="12" name="TextBox 11"/>
+          <p:cNvSpPr txBox="1"/>
           <p:nvPr/>
         </p:nvSpPr>
         <p:spPr>
           <a:xfrm>
-            <a:off x="457200" y="1737360"/>
-            <a:ext cx="54864" cy="1371600"/>
-          </a:xfrm>
-          <a:prstGeom prst="rect">
-            <a:avLst/>
-          </a:prstGeom>
-          <a:solidFill>
-            <a:srgbClr val="0E7C7B"/>
-          </a:solidFill>
-          <a:ln w="12700">
-            <a:solidFill>
-              <a:srgbClr val="0E7C7B"/>
-            </a:solidFill>
-            <a:prstDash val="solid"/>
-          </a:ln>
-        </p:spPr>
-        <p:txBody>
-          <a:bodyPr/>
-          <a:lstStyle/>
-          <a:p>
-            <a:endParaRPr lang="es-MX"/>
-          </a:p>
-        </p:txBody>
-      </p:sp>
-      <p:sp>
-        <p:nvSpPr>
-          <p:cNvPr id="9" name="Text 7"/>
-          <p:cNvSpPr/>
-          <p:nvPr/>
-        </p:nvSpPr>
-        <p:spPr>
-          <a:xfrm>
-            <a:off x="621792" y="1828800"/>
-            <a:ext cx="3749040" cy="292608"/>
+            <a:off x="4802000" y="4110000"/>
+            <a:ext cx="3744800" cy="743500"/>
           </a:xfrm>
           <a:prstGeom prst="rect">
             <a:avLst/>
           </a:prstGeom>
           <a:noFill/>
-          <a:ln/>
         </p:spPr>
         <p:txBody>
-          <a:bodyPr wrap="square" rtlCol="0" anchor="ctr"/>
+          <a:bodyPr wrap="square" lIns="0" tIns="0" rIns="0" bIns="0" anchor="t">
+            <a:spAutoFit/>
+          </a:bodyPr>
           <a:lstStyle/>
           <a:p>
-            <a:pPr marL="0" indent="0">
-              <a:buNone/>
+            <a:pPr algn="l">
+              <a:lnSpc>
+                <a:spcPct val="108000"/>
+              </a:lnSpc>
+              <a:spcAft>
+                <a:spcPts val="0"/>
+              </a:spcAft>
             </a:pPr>
             <a:r>
-              <a:rPr lang="en-US" sz="1400" b="1" dirty="0">
+              <a:rPr sz="969" b="1" i="0">
                 <a:solidFill>
                   <a:srgbClr val="0E7C7B"/>
                 </a:solidFill>
-                <a:latin typeface="Georgia" pitchFamily="34" charset="0"/>
-                <a:ea typeface="Georgia" pitchFamily="34" charset="-122"/>
-                <a:cs typeface="Georgia" pitchFamily="34" charset="-120"/>
+                <a:latin typeface="Calibri"/>
               </a:rPr>
-              <a:t>Problem Formulation</a:t>
+              <a:t>New scaling point: </a:t>
             </a:r>
-            <a:endParaRPr lang="en-US" sz="1400" dirty="0"/>
-          </a:p>
-        </p:txBody>
-      </p:sp>
-      <p:sp>
-        <p:nvSpPr>
-          <p:cNvPr id="10" name="Text 8"/>
-          <p:cNvSpPr/>
-          <p:nvPr/>
-        </p:nvSpPr>
-        <p:spPr>
-          <a:xfrm>
-            <a:off x="621792" y="2157984"/>
-            <a:ext cx="3749040" cy="914400"/>
-          </a:xfrm>
-          <a:prstGeom prst="rect">
-            <a:avLst/>
-          </a:prstGeom>
-          <a:noFill/>
-          <a:ln/>
-        </p:spPr>
-        <p:txBody>
-          <a:bodyPr wrap="square" rtlCol="0" anchor="ctr"/>
-          <a:lstStyle/>
-          <a:p>
-            <a:pPr marL="0" indent="0">
-              <a:buNone/>
-            </a:pPr>
             <a:r>
-              <a:rPr lang="en-US" sz="1400" dirty="0">
+              <a:rPr sz="969" b="0" i="0">
                 <a:solidFill>
-                  <a:srgbClr val="CCDAE8"/>
+                  <a:srgbClr val="1A2332"/>
                 </a:solidFill>
-                <a:latin typeface="Calibri" pitchFamily="34" charset="0"/>
-                <a:ea typeface="Calibri" pitchFamily="34" charset="-122"/>
-                <a:cs typeface="Calibri" pitchFamily="34" charset="-120"/>
+                <a:latin typeface="Calibri"/>
               </a:rPr>
-              <a:t>Reservoir scheduling encoded as discrete optimization over T=26 weeks × 5 levels. SRS metric with 3 penalty terms, 4 operational constraints verified.</a:t>
+              <a:t>T = 52, L = 7  →  7⁵² ≈ 10⁴³ schedules solved exactly in 1.056 s (ΔSRS = +0.075) — runtime stays far below the combinatorial growth.</a:t>
             </a:r>
-            <a:endParaRPr lang="en-US" sz="1400" dirty="0"/>
-          </a:p>
-        </p:txBody>
-      </p:sp>
-      <p:sp>
-        <p:nvSpPr>
-          <p:cNvPr id="11" name="Shape 9"/>
-          <p:cNvSpPr/>
-          <p:nvPr/>
-        </p:nvSpPr>
-        <p:spPr>
-          <a:xfrm>
-            <a:off x="4846320" y="1737360"/>
-            <a:ext cx="4114800" cy="1371600"/>
-          </a:xfrm>
-          <a:prstGeom prst="roundRect">
-            <a:avLst>
-              <a:gd name="adj" fmla="val 8000"/>
-            </a:avLst>
-          </a:prstGeom>
-          <a:solidFill>
-            <a:srgbClr val="0D2035"/>
-          </a:solidFill>
-          <a:ln w="19050">
-            <a:solidFill>
-              <a:srgbClr val="4A90C4"/>
-            </a:solidFill>
-            <a:prstDash val="solid"/>
-          </a:ln>
-          <a:effectLst>
-            <a:outerShdw blurRad="76200" dist="25400" dir="2700000" algn="bl" rotWithShape="0">
-              <a:srgbClr val="000000">
-                <a:alpha val="10000"/>
-              </a:srgbClr>
-            </a:outerShdw>
-          </a:effectLst>
-        </p:spPr>
-        <p:txBody>
-          <a:bodyPr/>
-          <a:lstStyle/>
-          <a:p>
-            <a:endParaRPr lang="es-MX"/>
-          </a:p>
-        </p:txBody>
-      </p:sp>
-      <p:sp>
-        <p:nvSpPr>
-          <p:cNvPr id="12" name="Shape 10"/>
-          <p:cNvSpPr/>
-          <p:nvPr/>
-        </p:nvSpPr>
-        <p:spPr>
-          <a:xfrm>
-            <a:off x="4846320" y="1737360"/>
-            <a:ext cx="54864" cy="1371600"/>
-          </a:xfrm>
-          <a:prstGeom prst="rect">
-            <a:avLst/>
-          </a:prstGeom>
-          <a:solidFill>
-            <a:srgbClr val="4A90C4"/>
-          </a:solidFill>
-          <a:ln w="12700">
-            <a:solidFill>
-              <a:srgbClr val="4A90C4"/>
-            </a:solidFill>
-            <a:prstDash val="solid"/>
-          </a:ln>
-        </p:spPr>
-        <p:txBody>
-          <a:bodyPr/>
-          <a:lstStyle/>
-          <a:p>
-            <a:endParaRPr lang="es-MX"/>
-          </a:p>
-        </p:txBody>
-      </p:sp>
-      <p:sp>
-        <p:nvSpPr>
-          <p:cNvPr id="13" name="Text 11"/>
-          <p:cNvSpPr/>
-          <p:nvPr/>
-        </p:nvSpPr>
-        <p:spPr>
-          <a:xfrm>
-            <a:off x="5010912" y="1828800"/>
-            <a:ext cx="3749040" cy="292608"/>
-          </a:xfrm>
-          <a:prstGeom prst="rect">
-            <a:avLst/>
-          </a:prstGeom>
-          <a:noFill/>
-          <a:ln/>
-        </p:spPr>
-        <p:txBody>
-          <a:bodyPr wrap="square" rtlCol="0" anchor="ctr"/>
-          <a:lstStyle/>
-          <a:p>
-            <a:pPr marL="0" indent="0">
-              <a:buNone/>
-            </a:pPr>
-            <a:r>
-              <a:rPr lang="en-US" sz="1400" b="1" dirty="0">
-                <a:solidFill>
-                  <a:srgbClr val="4A90C4"/>
-                </a:solidFill>
-                <a:latin typeface="Georgia" pitchFamily="34" charset="0"/>
-                <a:ea typeface="Georgia" pitchFamily="34" charset="-122"/>
-                <a:cs typeface="Georgia" pitchFamily="34" charset="-120"/>
-              </a:rPr>
-              <a:t>Classical Optimum</a:t>
-            </a:r>
-            <a:endParaRPr lang="en-US" sz="1400" dirty="0"/>
-          </a:p>
-        </p:txBody>
-      </p:sp>
-      <p:sp>
-        <p:nvSpPr>
-          <p:cNvPr id="14" name="Text 12"/>
-          <p:cNvSpPr/>
-          <p:nvPr/>
-        </p:nvSpPr>
-        <p:spPr>
-          <a:xfrm>
-            <a:off x="5010912" y="2157984"/>
-            <a:ext cx="3749040" cy="914400"/>
-          </a:xfrm>
-          <a:prstGeom prst="rect">
-            <a:avLst/>
-          </a:prstGeom>
-          <a:noFill/>
-          <a:ln/>
-        </p:spPr>
-        <p:txBody>
-          <a:bodyPr wrap="square" rtlCol="0" anchor="ctr"/>
-          <a:lstStyle/>
-          <a:p>
-            <a:pPr marL="0" indent="0">
-              <a:buNone/>
-            </a:pPr>
-            <a:r>
-              <a:rPr lang="en-US" sz="1400" dirty="0">
-                <a:solidFill>
-                  <a:srgbClr val="CCDAE8"/>
-                </a:solidFill>
-                <a:latin typeface="Calibri" pitchFamily="34" charset="0"/>
-                <a:ea typeface="Calibri" pitchFamily="34" charset="-122"/>
-                <a:cs typeface="Calibri" pitchFamily="34" charset="-120"/>
-              </a:rPr>
-              <a:t>DP finds the exact optimal within the discrete level set: u* = −Δu for 11 weeks then 0. Runtime: 0.020 s. Formally verified by brute-force at T=12.</a:t>
-            </a:r>
-            <a:endParaRPr lang="en-US" sz="1400" dirty="0"/>
-          </a:p>
-        </p:txBody>
-      </p:sp>
-      <p:sp>
-        <p:nvSpPr>
-          <p:cNvPr id="15" name="Shape 13"/>
-          <p:cNvSpPr/>
-          <p:nvPr/>
-        </p:nvSpPr>
-        <p:spPr>
-          <a:xfrm>
-            <a:off x="457200" y="3246120"/>
-            <a:ext cx="4114800" cy="1371600"/>
-          </a:xfrm>
-          <a:prstGeom prst="roundRect">
-            <a:avLst>
-              <a:gd name="adj" fmla="val 8000"/>
-            </a:avLst>
-          </a:prstGeom>
-          <a:solidFill>
-            <a:srgbClr val="0D2035"/>
-          </a:solidFill>
-          <a:ln w="19050">
-            <a:solidFill>
-              <a:srgbClr val="2E5FA3"/>
-            </a:solidFill>
-            <a:prstDash val="solid"/>
-          </a:ln>
-          <a:effectLst>
-            <a:outerShdw blurRad="76200" dist="25400" dir="2700000" algn="bl" rotWithShape="0">
-              <a:srgbClr val="000000">
-                <a:alpha val="10000"/>
-              </a:srgbClr>
-            </a:outerShdw>
-          </a:effectLst>
-        </p:spPr>
-        <p:txBody>
-          <a:bodyPr/>
-          <a:lstStyle/>
-          <a:p>
-            <a:endParaRPr lang="es-MX"/>
-          </a:p>
-        </p:txBody>
-      </p:sp>
-      <p:sp>
-        <p:nvSpPr>
-          <p:cNvPr id="16" name="Shape 14"/>
-          <p:cNvSpPr/>
-          <p:nvPr/>
-        </p:nvSpPr>
-        <p:spPr>
-          <a:xfrm>
-            <a:off x="457200" y="3246120"/>
-            <a:ext cx="54864" cy="1371600"/>
-          </a:xfrm>
-          <a:prstGeom prst="rect">
-            <a:avLst/>
-          </a:prstGeom>
-          <a:solidFill>
-            <a:srgbClr val="2E5FA3"/>
-          </a:solidFill>
-          <a:ln w="12700">
-            <a:solidFill>
-              <a:srgbClr val="2E5FA3"/>
-            </a:solidFill>
-            <a:prstDash val="solid"/>
-          </a:ln>
-        </p:spPr>
-        <p:txBody>
-          <a:bodyPr/>
-          <a:lstStyle/>
-          <a:p>
-            <a:endParaRPr lang="es-MX"/>
-          </a:p>
-        </p:txBody>
-      </p:sp>
-      <p:sp>
-        <p:nvSpPr>
-          <p:cNvPr id="17" name="Text 15"/>
-          <p:cNvSpPr/>
-          <p:nvPr/>
-        </p:nvSpPr>
-        <p:spPr>
-          <a:xfrm>
-            <a:off x="621792" y="3337560"/>
-            <a:ext cx="3749040" cy="292608"/>
-          </a:xfrm>
-          <a:prstGeom prst="rect">
-            <a:avLst/>
-          </a:prstGeom>
-          <a:noFill/>
-          <a:ln/>
-        </p:spPr>
-        <p:txBody>
-          <a:bodyPr wrap="square" rtlCol="0" anchor="ctr"/>
-          <a:lstStyle/>
-          <a:p>
-            <a:pPr marL="0" indent="0">
-              <a:buNone/>
-            </a:pPr>
-            <a:r>
-              <a:rPr lang="en-US" sz="1400" b="1" dirty="0">
-                <a:solidFill>
-                  <a:srgbClr val="2E5FA3"/>
-                </a:solidFill>
-                <a:latin typeface="Georgia" pitchFamily="34" charset="0"/>
-                <a:ea typeface="Georgia" pitchFamily="34" charset="-122"/>
-                <a:cs typeface="Georgia" pitchFamily="34" charset="-120"/>
-              </a:rPr>
-              <a:t>Scalability</a:t>
-            </a:r>
-            <a:endParaRPr lang="en-US" sz="1400" dirty="0"/>
-          </a:p>
-        </p:txBody>
-      </p:sp>
-      <p:sp>
-        <p:nvSpPr>
-          <p:cNvPr id="18" name="Text 16"/>
-          <p:cNvSpPr/>
-          <p:nvPr/>
-        </p:nvSpPr>
-        <p:spPr>
-          <a:xfrm>
-            <a:off x="621792" y="3666744"/>
-            <a:ext cx="3749040" cy="914400"/>
-          </a:xfrm>
-          <a:prstGeom prst="rect">
-            <a:avLst/>
-          </a:prstGeom>
-          <a:noFill/>
-          <a:ln/>
-        </p:spPr>
-        <p:txBody>
-          <a:bodyPr wrap="square" rtlCol="0" anchor="ctr"/>
-          <a:lstStyle/>
-          <a:p>
-            <a:pPr marL="0" indent="0">
-              <a:buNone/>
-            </a:pPr>
-            <a:r>
-              <a:rPr lang="en-US" sz="1400" dirty="0">
-                <a:solidFill>
-                  <a:srgbClr val="CCDAE8"/>
-                </a:solidFill>
-                <a:latin typeface="Calibri" pitchFamily="34" charset="0"/>
-                <a:ea typeface="Calibri" pitchFamily="34" charset="-122"/>
-                <a:cs typeface="Calibri" pitchFamily="34" charset="-120"/>
-              </a:rPr>
-              <a:t>DP scales from 5²⁶ ≈ 10¹⁸ to 7⁵² ≈ 10⁴³ in &lt; 1.1 s. Search space grows exponentially; DP keeps runtime polynomial via cumulative-state reduction.</a:t>
-            </a:r>
-            <a:endParaRPr lang="en-US" sz="1400" dirty="0"/>
-          </a:p>
-        </p:txBody>
-      </p:sp>
-      <p:sp>
-        <p:nvSpPr>
-          <p:cNvPr id="19" name="Shape 17"/>
-          <p:cNvSpPr/>
-          <p:nvPr/>
-        </p:nvSpPr>
-        <p:spPr>
-          <a:xfrm>
-            <a:off x="4846320" y="3246120"/>
-            <a:ext cx="4114800" cy="1371600"/>
-          </a:xfrm>
-          <a:prstGeom prst="roundRect">
-            <a:avLst>
-              <a:gd name="adj" fmla="val 8000"/>
-            </a:avLst>
-          </a:prstGeom>
-          <a:solidFill>
-            <a:srgbClr val="0D2035"/>
-          </a:solidFill>
-          <a:ln w="19050">
-            <a:solidFill>
-              <a:srgbClr val="5B7FA6"/>
-            </a:solidFill>
-            <a:prstDash val="solid"/>
-          </a:ln>
-          <a:effectLst>
-            <a:outerShdw blurRad="76200" dist="25400" dir="2700000" algn="bl" rotWithShape="0">
-              <a:srgbClr val="000000">
-                <a:alpha val="10000"/>
-              </a:srgbClr>
-            </a:outerShdw>
-          </a:effectLst>
-        </p:spPr>
-        <p:txBody>
-          <a:bodyPr/>
-          <a:lstStyle/>
-          <a:p>
-            <a:endParaRPr lang="es-MX"/>
-          </a:p>
-        </p:txBody>
-      </p:sp>
-      <p:sp>
-        <p:nvSpPr>
-          <p:cNvPr id="20" name="Shape 18"/>
-          <p:cNvSpPr/>
-          <p:nvPr/>
-        </p:nvSpPr>
-        <p:spPr>
-          <a:xfrm>
-            <a:off x="4846320" y="3246120"/>
-            <a:ext cx="54864" cy="1371600"/>
-          </a:xfrm>
-          <a:prstGeom prst="rect">
-            <a:avLst/>
-          </a:prstGeom>
-          <a:solidFill>
-            <a:srgbClr val="5B7FA6"/>
-          </a:solidFill>
-          <a:ln w="12700">
-            <a:solidFill>
-              <a:srgbClr val="5B7FA6"/>
-            </a:solidFill>
-            <a:prstDash val="solid"/>
-          </a:ln>
-        </p:spPr>
-        <p:txBody>
-          <a:bodyPr/>
-          <a:lstStyle/>
-          <a:p>
-            <a:endParaRPr lang="es-MX"/>
-          </a:p>
-        </p:txBody>
-      </p:sp>
-      <p:sp>
-        <p:nvSpPr>
-          <p:cNvPr id="21" name="Text 19"/>
-          <p:cNvSpPr/>
-          <p:nvPr/>
-        </p:nvSpPr>
-        <p:spPr>
-          <a:xfrm>
-            <a:off x="5010912" y="3337560"/>
-            <a:ext cx="3749040" cy="292608"/>
-          </a:xfrm>
-          <a:prstGeom prst="rect">
-            <a:avLst/>
-          </a:prstGeom>
-          <a:noFill/>
-          <a:ln/>
-        </p:spPr>
-        <p:txBody>
-          <a:bodyPr wrap="square" rtlCol="0" anchor="ctr"/>
-          <a:lstStyle/>
-          <a:p>
-            <a:pPr marL="0" indent="0">
-              <a:buNone/>
-            </a:pPr>
-            <a:r>
-              <a:rPr lang="en-US" sz="1400" b="1" dirty="0">
-                <a:solidFill>
-                  <a:srgbClr val="5B7FA6"/>
-                </a:solidFill>
-                <a:latin typeface="Georgia" pitchFamily="34" charset="0"/>
-                <a:ea typeface="Georgia" pitchFamily="34" charset="-122"/>
-                <a:cs typeface="Georgia" pitchFamily="34" charset="-120"/>
-              </a:rPr>
-              <a:t>Limitations &amp; Next Steps</a:t>
-            </a:r>
-            <a:endParaRPr lang="en-US" sz="1400" dirty="0"/>
-          </a:p>
-        </p:txBody>
-      </p:sp>
-      <p:sp>
-        <p:nvSpPr>
-          <p:cNvPr id="22" name="Text 20"/>
-          <p:cNvSpPr/>
-          <p:nvPr/>
-        </p:nvSpPr>
-        <p:spPr>
-          <a:xfrm>
-            <a:off x="5010912" y="3632278"/>
-            <a:ext cx="3749040" cy="914400"/>
-          </a:xfrm>
-          <a:prstGeom prst="rect">
-            <a:avLst/>
-          </a:prstGeom>
-          <a:noFill/>
-          <a:ln/>
-        </p:spPr>
-        <p:txBody>
-          <a:bodyPr wrap="square" rtlCol="0" anchor="ctr"/>
-          <a:lstStyle/>
-          <a:p>
-            <a:pPr marL="0" indent="0">
-              <a:buNone/>
-            </a:pPr>
-            <a:r>
-              <a:rPr lang="en-US" sz="1400" dirty="0">
-                <a:solidFill>
-                  <a:srgbClr val="CCDAE8"/>
-                </a:solidFill>
-                <a:latin typeface="Calibri" pitchFamily="34" charset="0"/>
-                <a:ea typeface="Calibri" pitchFamily="34" charset="-122"/>
-                <a:cs typeface="Calibri" pitchFamily="34" charset="-120"/>
-              </a:rPr>
-              <a:t>Simplified hydrological model. No treaty/legal constraints. Future work: QUBO/QAOA formulation (56 qubits/window) for quantum comparison on QPU.</a:t>
-            </a:r>
-            <a:endParaRPr lang="en-US" sz="1400" dirty="0"/>
-          </a:p>
-        </p:txBody>
-      </p:sp>
-      <p:sp>
-        <p:nvSpPr>
-          <p:cNvPr id="23" name="Shape 21"/>
-          <p:cNvSpPr/>
-          <p:nvPr/>
-        </p:nvSpPr>
-        <p:spPr>
-          <a:xfrm>
-            <a:off x="0" y="4937760"/>
-            <a:ext cx="9144000" cy="320040"/>
-          </a:xfrm>
-          <a:prstGeom prst="rect">
-            <a:avLst/>
-          </a:prstGeom>
-          <a:solidFill>
-            <a:srgbClr val="050E1A"/>
-          </a:solidFill>
-          <a:ln w="12700">
-            <a:solidFill>
-              <a:srgbClr val="050E1A"/>
-            </a:solidFill>
-            <a:prstDash val="solid"/>
-          </a:ln>
-        </p:spPr>
-        <p:txBody>
-          <a:bodyPr/>
-          <a:lstStyle/>
-          <a:p>
-            <a:endParaRPr lang="es-MX"/>
           </a:p>
         </p:txBody>
       </p:sp>
